--- a/slides/2_foundations.pptx
+++ b/slides/2_foundations.pptx
@@ -5,32 +5,33 @@
     <p:sldMasterId id="2147483648" r:id="rId1"/>
   </p:sldMasterIdLst>
   <p:notesMasterIdLst>
-    <p:notesMasterId r:id="rId25"/>
+    <p:notesMasterId r:id="rId26"/>
   </p:notesMasterIdLst>
   <p:sldIdLst>
     <p:sldId id="256" r:id="rId2"/>
-    <p:sldId id="572" r:id="rId3"/>
-    <p:sldId id="550" r:id="rId4"/>
-    <p:sldId id="573" r:id="rId5"/>
-    <p:sldId id="863" r:id="rId6"/>
-    <p:sldId id="574" r:id="rId7"/>
-    <p:sldId id="575" r:id="rId8"/>
-    <p:sldId id="576" r:id="rId9"/>
-    <p:sldId id="577" r:id="rId10"/>
-    <p:sldId id="578" r:id="rId11"/>
-    <p:sldId id="557" r:id="rId12"/>
-    <p:sldId id="864" r:id="rId13"/>
-    <p:sldId id="558" r:id="rId14"/>
-    <p:sldId id="566" r:id="rId15"/>
-    <p:sldId id="579" r:id="rId16"/>
-    <p:sldId id="865" r:id="rId17"/>
-    <p:sldId id="580" r:id="rId18"/>
-    <p:sldId id="569" r:id="rId19"/>
-    <p:sldId id="570" r:id="rId20"/>
-    <p:sldId id="581" r:id="rId21"/>
-    <p:sldId id="582" r:id="rId22"/>
-    <p:sldId id="565" r:id="rId23"/>
-    <p:sldId id="780" r:id="rId24"/>
+    <p:sldId id="866" r:id="rId3"/>
+    <p:sldId id="572" r:id="rId4"/>
+    <p:sldId id="550" r:id="rId5"/>
+    <p:sldId id="573" r:id="rId6"/>
+    <p:sldId id="863" r:id="rId7"/>
+    <p:sldId id="574" r:id="rId8"/>
+    <p:sldId id="575" r:id="rId9"/>
+    <p:sldId id="576" r:id="rId10"/>
+    <p:sldId id="577" r:id="rId11"/>
+    <p:sldId id="578" r:id="rId12"/>
+    <p:sldId id="557" r:id="rId13"/>
+    <p:sldId id="864" r:id="rId14"/>
+    <p:sldId id="558" r:id="rId15"/>
+    <p:sldId id="566" r:id="rId16"/>
+    <p:sldId id="579" r:id="rId17"/>
+    <p:sldId id="865" r:id="rId18"/>
+    <p:sldId id="580" r:id="rId19"/>
+    <p:sldId id="569" r:id="rId20"/>
+    <p:sldId id="570" r:id="rId21"/>
+    <p:sldId id="581" r:id="rId22"/>
+    <p:sldId id="582" r:id="rId23"/>
+    <p:sldId id="565" r:id="rId24"/>
+    <p:sldId id="780" r:id="rId25"/>
   </p:sldIdLst>
   <p:sldSz cx="12192000" cy="6858000"/>
   <p:notesSz cx="6858000" cy="9144000"/>
@@ -4028,7 +4029,7 @@
           <a:p>
             <a:r>
               <a:rPr lang="en-GB" dirty="0"/>
-              <a:t>Foundations</a:t>
+              <a:t>Tabular Methods</a:t>
             </a:r>
           </a:p>
         </p:txBody>
@@ -4096,7 +4097,7 @@
           <p:cNvPr id="2" name="Title 1">
             <a:extLst>
               <a:ext uri="{FF2B5EF4-FFF2-40B4-BE49-F238E27FC236}">
-                <a16:creationId xmlns:a16="http://schemas.microsoft.com/office/drawing/2014/main" id="{134F5B4C-755B-6562-2C17-4B127886AB02}"/>
+                <a16:creationId xmlns:a16="http://schemas.microsoft.com/office/drawing/2014/main" id="{ED2B2E7C-9701-D067-1265-0D20B8DCA7DF}"/>
               </a:ext>
             </a:extLst>
           </p:cNvPr>
@@ -4114,7 +4115,7 @@
           <a:p>
             <a:r>
               <a:rPr lang="en-DE" dirty="0"/>
-              <a:t>Action-Value Function</a:t>
+              <a:t>State-Value Function</a:t>
             </a:r>
           </a:p>
         </p:txBody>
@@ -4124,7 +4125,7 @@
           <p:cNvPr id="4" name="Slide Number Placeholder 3">
             <a:extLst>
               <a:ext uri="{FF2B5EF4-FFF2-40B4-BE49-F238E27FC236}">
-                <a16:creationId xmlns:a16="http://schemas.microsoft.com/office/drawing/2014/main" id="{2711539F-29FB-43F2-21A3-8F8ECE02246D}"/>
+                <a16:creationId xmlns:a16="http://schemas.microsoft.com/office/drawing/2014/main" id="{1EFB1BDD-B851-5E2C-CF80-8DACCA77C54E}"/>
               </a:ext>
             </a:extLst>
           </p:cNvPr>
@@ -4143,6 +4144,1965 @@
             <a:fld id="{C48B675A-2084-C34A-84F6-1B6A8516A5F3}" type="slidenum">
               <a:rPr lang="en-DE" smtClean="0"/>
               <a:t>10</a:t>
+            </a:fld>
+            <a:endParaRPr lang="en-DE"/>
+          </a:p>
+        </p:txBody>
+      </p:sp>
+      <p:sp>
+        <p:nvSpPr>
+          <p:cNvPr id="7" name="TextBox 6">
+            <a:extLst>
+              <a:ext uri="{FF2B5EF4-FFF2-40B4-BE49-F238E27FC236}">
+                <a16:creationId xmlns:a16="http://schemas.microsoft.com/office/drawing/2014/main" id="{F86A3A0F-766F-2A79-DF4F-182A1C27DFBE}"/>
+              </a:ext>
+            </a:extLst>
+          </p:cNvPr>
+          <p:cNvSpPr txBox="1"/>
+          <p:nvPr/>
+        </p:nvSpPr>
+        <p:spPr>
+          <a:xfrm>
+            <a:off x="4616664" y="1454224"/>
+            <a:ext cx="905569" cy="430887"/>
+          </a:xfrm>
+          <a:prstGeom prst="rect">
+            <a:avLst/>
+          </a:prstGeom>
+          <a:noFill/>
+        </p:spPr>
+        <p:txBody>
+          <a:bodyPr wrap="none" rtlCol="0">
+            <a:spAutoFit/>
+          </a:bodyPr>
+          <a:lstStyle/>
+          <a:p>
+            <a:r>
+              <a:rPr lang="en-DE" sz="2200" dirty="0"/>
+              <a:t>return</a:t>
+            </a:r>
+          </a:p>
+        </p:txBody>
+      </p:sp>
+      <p:sp>
+        <p:nvSpPr>
+          <p:cNvPr id="9" name="TextBox 8">
+            <a:extLst>
+              <a:ext uri="{FF2B5EF4-FFF2-40B4-BE49-F238E27FC236}">
+                <a16:creationId xmlns:a16="http://schemas.microsoft.com/office/drawing/2014/main" id="{F4C76EB1-E98E-D814-8DAE-F1B1E4629A94}"/>
+              </a:ext>
+            </a:extLst>
+          </p:cNvPr>
+          <p:cNvSpPr txBox="1"/>
+          <p:nvPr/>
+        </p:nvSpPr>
+        <p:spPr>
+          <a:xfrm>
+            <a:off x="8468235" y="1475244"/>
+            <a:ext cx="1679883" cy="430887"/>
+          </a:xfrm>
+          <a:prstGeom prst="rect">
+            <a:avLst/>
+          </a:prstGeom>
+          <a:noFill/>
+        </p:spPr>
+        <p:txBody>
+          <a:bodyPr wrap="none" rtlCol="0">
+            <a:spAutoFit/>
+          </a:bodyPr>
+          <a:lstStyle/>
+          <a:p>
+            <a:r>
+              <a:rPr lang="en-GB" sz="2200" dirty="0"/>
+              <a:t>d</a:t>
+            </a:r>
+            <a:r>
+              <a:rPr lang="en-DE" sz="2200" dirty="0"/>
+              <a:t>iscount rate</a:t>
+            </a:r>
+          </a:p>
+        </p:txBody>
+      </p:sp>
+      <p:sp>
+        <p:nvSpPr>
+          <p:cNvPr id="13" name="TextBox 12">
+            <a:extLst>
+              <a:ext uri="{FF2B5EF4-FFF2-40B4-BE49-F238E27FC236}">
+                <a16:creationId xmlns:a16="http://schemas.microsoft.com/office/drawing/2014/main" id="{B8E4BCE3-0435-7B93-69AA-E2F22458853D}"/>
+              </a:ext>
+            </a:extLst>
+          </p:cNvPr>
+          <p:cNvSpPr txBox="1"/>
+          <p:nvPr/>
+        </p:nvSpPr>
+        <p:spPr>
+          <a:xfrm>
+            <a:off x="8468234" y="4906378"/>
+            <a:ext cx="2885565" cy="769441"/>
+          </a:xfrm>
+          <a:prstGeom prst="rect">
+            <a:avLst/>
+          </a:prstGeom>
+          <a:noFill/>
+        </p:spPr>
+        <p:txBody>
+          <a:bodyPr wrap="square" rtlCol="0">
+            <a:spAutoFit/>
+          </a:bodyPr>
+          <a:lstStyle/>
+          <a:p>
+            <a:r>
+              <a:rPr lang="en-DE" sz="2200" dirty="0"/>
+              <a:t>Bellman (expectation) equation: recursion</a:t>
+            </a:r>
+          </a:p>
+        </p:txBody>
+      </p:sp>
+      <p:sp>
+        <p:nvSpPr>
+          <p:cNvPr id="15" name="TextBox 14">
+            <a:extLst>
+              <a:ext uri="{FF2B5EF4-FFF2-40B4-BE49-F238E27FC236}">
+                <a16:creationId xmlns:a16="http://schemas.microsoft.com/office/drawing/2014/main" id="{35D9E7E4-E111-5331-39DB-7541E009D843}"/>
+              </a:ext>
+            </a:extLst>
+          </p:cNvPr>
+          <p:cNvSpPr txBox="1"/>
+          <p:nvPr/>
+        </p:nvSpPr>
+        <p:spPr>
+          <a:xfrm>
+            <a:off x="571308" y="4877089"/>
+            <a:ext cx="3138844" cy="1107996"/>
+          </a:xfrm>
+          <a:prstGeom prst="rect">
+            <a:avLst/>
+          </a:prstGeom>
+          <a:noFill/>
+          <a:ln>
+            <a:solidFill>
+              <a:schemeClr val="tx1"/>
+            </a:solidFill>
+          </a:ln>
+        </p:spPr>
+        <p:txBody>
+          <a:bodyPr wrap="square" rtlCol="0">
+            <a:spAutoFit/>
+          </a:bodyPr>
+          <a:lstStyle/>
+          <a:p>
+            <a:r>
+              <a:rPr lang="en-GB" sz="2200" dirty="0"/>
+              <a:t>p</a:t>
+            </a:r>
+            <a:r>
+              <a:rPr lang="en-DE" sz="2200" dirty="0"/>
+              <a:t>olicy: probabilitiy to take specific action being in a given state</a:t>
+            </a:r>
+            <a:endParaRPr lang="en-DE" sz="2200" i="1" dirty="0"/>
+          </a:p>
+        </p:txBody>
+      </p:sp>
+      <mc:AlternateContent xmlns:mc="http://schemas.openxmlformats.org/markup-compatibility/2006" xmlns:a14="http://schemas.microsoft.com/office/drawing/2010/main">
+        <mc:Choice Requires="a14">
+          <p:sp>
+            <p:nvSpPr>
+              <p:cNvPr id="17" name="TextBox 16">
+                <a:extLst>
+                  <a:ext uri="{FF2B5EF4-FFF2-40B4-BE49-F238E27FC236}">
+                    <a16:creationId xmlns:a16="http://schemas.microsoft.com/office/drawing/2014/main" id="{4A9A62D7-75B9-BE74-76EF-64C53C559BFB}"/>
+                  </a:ext>
+                </a:extLst>
+              </p:cNvPr>
+              <p:cNvSpPr txBox="1"/>
+              <p:nvPr/>
+            </p:nvSpPr>
+            <p:spPr>
+              <a:xfrm>
+                <a:off x="4117036" y="4877089"/>
+                <a:ext cx="4196646" cy="1154355"/>
+              </a:xfrm>
+              <a:prstGeom prst="rect">
+                <a:avLst/>
+              </a:prstGeom>
+              <a:noFill/>
+              <a:ln>
+                <a:solidFill>
+                  <a:schemeClr val="tx1"/>
+                </a:solidFill>
+              </a:ln>
+            </p:spPr>
+            <p:txBody>
+              <a:bodyPr wrap="square" rtlCol="0">
+                <a:spAutoFit/>
+              </a:bodyPr>
+              <a:lstStyle/>
+              <a:p>
+                <a:r>
+                  <a:rPr lang="en-GB" sz="2200" dirty="0"/>
+                  <a:t>t</a:t>
+                </a:r>
+                <a:r>
+                  <a:rPr lang="en-DE" sz="2200" dirty="0"/>
+                  <a:t>ransition probability (depending on environment) from state </a:t>
+                </a:r>
+                <a14:m>
+                  <m:oMath xmlns:m="http://schemas.openxmlformats.org/officeDocument/2006/math">
+                    <m:sSub>
+                      <m:sSubPr>
+                        <m:ctrlPr>
+                          <a:rPr lang="en-US" sz="2400" b="0" i="1" smtClean="0">
+                            <a:latin typeface="Cambria Math" panose="02040503050406030204" pitchFamily="18" charset="0"/>
+                            <a:ea typeface="Cambria Math" panose="02040503050406030204" pitchFamily="18" charset="0"/>
+                          </a:rPr>
+                        </m:ctrlPr>
+                      </m:sSubPr>
+                      <m:e>
+                        <m:r>
+                          <a:rPr lang="en-US" sz="2400" b="0" i="1" smtClean="0">
+                            <a:latin typeface="Cambria Math" panose="02040503050406030204" pitchFamily="18" charset="0"/>
+                            <a:ea typeface="Cambria Math" panose="02040503050406030204" pitchFamily="18" charset="0"/>
+                          </a:rPr>
+                          <m:t>𝑠</m:t>
+                        </m:r>
+                      </m:e>
+                      <m:sub>
+                        <m:r>
+                          <a:rPr lang="en-US" sz="2400" b="0" i="1" smtClean="0">
+                            <a:latin typeface="Cambria Math" panose="02040503050406030204" pitchFamily="18" charset="0"/>
+                            <a:ea typeface="Cambria Math" panose="02040503050406030204" pitchFamily="18" charset="0"/>
+                          </a:rPr>
+                          <m:t>𝑡</m:t>
+                        </m:r>
+                      </m:sub>
+                    </m:sSub>
+                  </m:oMath>
+                </a14:m>
+                <a:r>
+                  <a:rPr lang="en-DE" sz="2200" dirty="0"/>
+                  <a:t> to state </a:t>
+                </a:r>
+                <a14:m>
+                  <m:oMath xmlns:m="http://schemas.openxmlformats.org/officeDocument/2006/math">
+                    <m:sSubSup>
+                      <m:sSubSupPr>
+                        <m:ctrlPr>
+                          <a:rPr lang="en-US" sz="2400" i="1">
+                            <a:latin typeface="Cambria Math" panose="02040503050406030204" pitchFamily="18" charset="0"/>
+                            <a:ea typeface="Cambria Math" panose="02040503050406030204" pitchFamily="18" charset="0"/>
+                          </a:rPr>
+                        </m:ctrlPr>
+                      </m:sSubSupPr>
+                      <m:e>
+                        <m:r>
+                          <a:rPr lang="en-US" sz="2400" i="1">
+                            <a:latin typeface="Cambria Math" panose="02040503050406030204" pitchFamily="18" charset="0"/>
+                            <a:ea typeface="Cambria Math" panose="02040503050406030204" pitchFamily="18" charset="0"/>
+                          </a:rPr>
+                          <m:t>𝑠</m:t>
+                        </m:r>
+                      </m:e>
+                      <m:sub>
+                        <m:r>
+                          <a:rPr lang="en-US" sz="2400" i="1">
+                            <a:latin typeface="Cambria Math" panose="02040503050406030204" pitchFamily="18" charset="0"/>
+                            <a:ea typeface="Cambria Math" panose="02040503050406030204" pitchFamily="18" charset="0"/>
+                          </a:rPr>
+                          <m:t>𝑡</m:t>
+                        </m:r>
+                        <m:r>
+                          <a:rPr lang="en-US" sz="2400" i="1">
+                            <a:latin typeface="Cambria Math" panose="02040503050406030204" pitchFamily="18" charset="0"/>
+                            <a:ea typeface="Cambria Math" panose="02040503050406030204" pitchFamily="18" charset="0"/>
+                          </a:rPr>
+                          <m:t>+1</m:t>
+                        </m:r>
+                      </m:sub>
+                      <m:sup>
+                        <m:r>
+                          <a:rPr lang="en-US" sz="2400" i="1">
+                            <a:latin typeface="Cambria Math" panose="02040503050406030204" pitchFamily="18" charset="0"/>
+                            <a:ea typeface="Cambria Math" panose="02040503050406030204" pitchFamily="18" charset="0"/>
+                          </a:rPr>
+                          <m:t>′</m:t>
+                        </m:r>
+                      </m:sup>
+                    </m:sSubSup>
+                    <m:r>
+                      <a:rPr lang="en-US" sz="2400" i="1">
+                        <a:latin typeface="Cambria Math" panose="02040503050406030204" pitchFamily="18" charset="0"/>
+                        <a:ea typeface="Cambria Math" panose="02040503050406030204" pitchFamily="18" charset="0"/>
+                      </a:rPr>
+                      <m:t> </m:t>
+                    </m:r>
+                  </m:oMath>
+                </a14:m>
+                <a:r>
+                  <a:rPr lang="en-DE" sz="2200" dirty="0"/>
+                  <a:t>for a given action</a:t>
+                </a:r>
+              </a:p>
+            </p:txBody>
+          </p:sp>
+        </mc:Choice>
+        <mc:Fallback xmlns="">
+          <p:sp>
+            <p:nvSpPr>
+              <p:cNvPr id="17" name="TextBox 16">
+                <a:extLst>
+                  <a:ext uri="{FF2B5EF4-FFF2-40B4-BE49-F238E27FC236}">
+                    <a16:creationId xmlns:a16="http://schemas.microsoft.com/office/drawing/2014/main" id="{4A9A62D7-75B9-BE74-76EF-64C53C559BFB}"/>
+                  </a:ext>
+                </a:extLst>
+              </p:cNvPr>
+              <p:cNvSpPr txBox="1">
+                <a:spLocks noRot="1" noChangeAspect="1" noMove="1" noResize="1" noEditPoints="1" noAdjustHandles="1" noChangeArrowheads="1" noChangeShapeType="1" noTextEdit="1"/>
+              </p:cNvSpPr>
+              <p:nvPr/>
+            </p:nvSpPr>
+            <p:spPr>
+              <a:xfrm>
+                <a:off x="4117036" y="4877089"/>
+                <a:ext cx="4196646" cy="1154355"/>
+              </a:xfrm>
+              <a:prstGeom prst="rect">
+                <a:avLst/>
+              </a:prstGeom>
+              <a:blipFill>
+                <a:blip r:embed="rId2"/>
+                <a:stretch>
+                  <a:fillRect l="-1502" t="-2151" r="-601" b="-8602"/>
+                </a:stretch>
+              </a:blipFill>
+              <a:ln>
+                <a:solidFill>
+                  <a:schemeClr val="tx1"/>
+                </a:solidFill>
+              </a:ln>
+            </p:spPr>
+            <p:txBody>
+              <a:bodyPr/>
+              <a:lstStyle/>
+              <a:p>
+                <a:r>
+                  <a:rPr lang="de-DE">
+                    <a:noFill/>
+                  </a:rPr>
+                  <a:t> </a:t>
+                </a:r>
+              </a:p>
+            </p:txBody>
+          </p:sp>
+        </mc:Fallback>
+      </mc:AlternateContent>
+      <mc:AlternateContent xmlns:mc="http://schemas.openxmlformats.org/markup-compatibility/2006" xmlns:a14="http://schemas.microsoft.com/office/drawing/2010/main">
+        <mc:Choice Requires="a14">
+          <p:sp>
+            <p:nvSpPr>
+              <p:cNvPr id="3" name="TextBox 2">
+                <a:extLst>
+                  <a:ext uri="{FF2B5EF4-FFF2-40B4-BE49-F238E27FC236}">
+                    <a16:creationId xmlns:a16="http://schemas.microsoft.com/office/drawing/2014/main" id="{9126A8EE-7175-F901-57A1-E7EBCCAAE429}"/>
+                  </a:ext>
+                </a:extLst>
+              </p:cNvPr>
+              <p:cNvSpPr txBox="1"/>
+              <p:nvPr/>
+            </p:nvSpPr>
+            <p:spPr>
+              <a:xfrm>
+                <a:off x="1634063" y="2133759"/>
+                <a:ext cx="9016123" cy="2331920"/>
+              </a:xfrm>
+              <a:prstGeom prst="rect">
+                <a:avLst/>
+              </a:prstGeom>
+              <a:noFill/>
+            </p:spPr>
+            <p:txBody>
+              <a:bodyPr wrap="none" lIns="0" tIns="0" rIns="0" bIns="0" rtlCol="0">
+                <a:spAutoFit/>
+              </a:bodyPr>
+              <a:lstStyle/>
+              <a:p>
+                <a:pPr/>
+                <a14:m>
+                  <m:oMathPara xmlns:m="http://schemas.openxmlformats.org/officeDocument/2006/math">
+                    <m:oMathParaPr>
+                      <m:jc m:val="centerGroup"/>
+                    </m:oMathParaPr>
+                    <m:oMath xmlns:m="http://schemas.openxmlformats.org/officeDocument/2006/math">
+                      <m:sSub>
+                        <m:sSubPr>
+                          <m:ctrlPr>
+                            <a:rPr lang="en-DE" sz="2800" i="1" smtClean="0">
+                              <a:latin typeface="Cambria Math" panose="02040503050406030204" pitchFamily="18" charset="0"/>
+                            </a:rPr>
+                          </m:ctrlPr>
+                        </m:sSubPr>
+                        <m:e>
+                          <m:r>
+                            <a:rPr lang="en-US" sz="2800" b="0" i="1" smtClean="0">
+                              <a:latin typeface="Cambria Math" panose="02040503050406030204" pitchFamily="18" charset="0"/>
+                            </a:rPr>
+                            <m:t>𝑣</m:t>
+                          </m:r>
+                        </m:e>
+                        <m:sub>
+                          <m:r>
+                            <a:rPr lang="en-DE" sz="2800" i="1" smtClean="0">
+                              <a:latin typeface="Cambria Math" panose="02040503050406030204" pitchFamily="18" charset="0"/>
+                              <a:ea typeface="Cambria Math" panose="02040503050406030204" pitchFamily="18" charset="0"/>
+                            </a:rPr>
+                            <m:t>𝜋</m:t>
+                          </m:r>
+                        </m:sub>
+                      </m:sSub>
+                      <m:d>
+                        <m:dPr>
+                          <m:ctrlPr>
+                            <a:rPr lang="en-DE" sz="2800" i="1" smtClean="0">
+                              <a:latin typeface="Cambria Math" panose="02040503050406030204" pitchFamily="18" charset="0"/>
+                            </a:rPr>
+                          </m:ctrlPr>
+                        </m:dPr>
+                        <m:e>
+                          <m:sSub>
+                            <m:sSubPr>
+                              <m:ctrlPr>
+                                <a:rPr lang="en-DE" sz="2800" i="1" smtClean="0">
+                                  <a:latin typeface="Cambria Math" panose="02040503050406030204" pitchFamily="18" charset="0"/>
+                                </a:rPr>
+                              </m:ctrlPr>
+                            </m:sSubPr>
+                            <m:e>
+                              <m:r>
+                                <a:rPr lang="en-US" sz="2800" b="0" i="1" smtClean="0">
+                                  <a:latin typeface="Cambria Math" panose="02040503050406030204" pitchFamily="18" charset="0"/>
+                                </a:rPr>
+                                <m:t>𝑠</m:t>
+                              </m:r>
+                            </m:e>
+                            <m:sub>
+                              <m:r>
+                                <a:rPr lang="en-US" sz="2800" b="0" i="1" smtClean="0">
+                                  <a:latin typeface="Cambria Math" panose="02040503050406030204" pitchFamily="18" charset="0"/>
+                                </a:rPr>
+                                <m:t>𝑡</m:t>
+                              </m:r>
+                            </m:sub>
+                          </m:sSub>
+                        </m:e>
+                      </m:d>
+                      <m:r>
+                        <a:rPr lang="en-US" sz="2800" b="0" i="1" smtClean="0">
+                          <a:latin typeface="Cambria Math" panose="02040503050406030204" pitchFamily="18" charset="0"/>
+                        </a:rPr>
+                        <m:t>=</m:t>
+                      </m:r>
+                      <m:sSub>
+                        <m:sSubPr>
+                          <m:ctrlPr>
+                            <a:rPr lang="en-US" sz="2800" b="0" i="1" smtClean="0">
+                              <a:latin typeface="Cambria Math" panose="02040503050406030204" pitchFamily="18" charset="0"/>
+                            </a:rPr>
+                          </m:ctrlPr>
+                        </m:sSubPr>
+                        <m:e>
+                          <m:r>
+                            <a:rPr lang="en-US" sz="2800" b="0" i="1" smtClean="0">
+                              <a:latin typeface="Cambria Math" panose="02040503050406030204" pitchFamily="18" charset="0"/>
+                            </a:rPr>
+                            <m:t>𝐸</m:t>
+                          </m:r>
+                        </m:e>
+                        <m:sub>
+                          <m:r>
+                            <a:rPr lang="en-US" sz="2800" b="0" i="1" smtClean="0">
+                              <a:latin typeface="Cambria Math" panose="02040503050406030204" pitchFamily="18" charset="0"/>
+                              <a:ea typeface="Cambria Math" panose="02040503050406030204" pitchFamily="18" charset="0"/>
+                            </a:rPr>
+                            <m:t>𝜋</m:t>
+                          </m:r>
+                        </m:sub>
+                      </m:sSub>
+                      <m:d>
+                        <m:dPr>
+                          <m:begChr m:val="["/>
+                          <m:endChr m:val="]"/>
+                          <m:ctrlPr>
+                            <a:rPr lang="en-US" sz="2800" b="0" i="1" smtClean="0">
+                              <a:latin typeface="Cambria Math" panose="02040503050406030204" pitchFamily="18" charset="0"/>
+                            </a:rPr>
+                          </m:ctrlPr>
+                        </m:dPr>
+                        <m:e>
+                          <m:nary>
+                            <m:naryPr>
+                              <m:chr m:val="∑"/>
+                              <m:ctrlPr>
+                                <a:rPr lang="en-US" sz="2800" b="0" i="1" smtClean="0">
+                                  <a:latin typeface="Cambria Math" panose="02040503050406030204" pitchFamily="18" charset="0"/>
+                                </a:rPr>
+                              </m:ctrlPr>
+                            </m:naryPr>
+                            <m:sub>
+                              <m:r>
+                                <m:rPr>
+                                  <m:brk m:alnAt="23"/>
+                                </m:rPr>
+                                <a:rPr lang="en-US" sz="2800" b="0" i="1" smtClean="0">
+                                  <a:latin typeface="Cambria Math" panose="02040503050406030204" pitchFamily="18" charset="0"/>
+                                </a:rPr>
+                                <m:t>𝑘</m:t>
+                              </m:r>
+                              <m:r>
+                                <a:rPr lang="en-US" sz="2800" b="0" i="1" smtClean="0">
+                                  <a:latin typeface="Cambria Math" panose="02040503050406030204" pitchFamily="18" charset="0"/>
+                                </a:rPr>
+                                <m:t>=</m:t>
+                              </m:r>
+                              <m:r>
+                                <a:rPr lang="en-US" sz="2800" b="0" i="1" smtClean="0">
+                                  <a:latin typeface="Cambria Math" panose="02040503050406030204" pitchFamily="18" charset="0"/>
+                                </a:rPr>
+                                <m:t>𝑜</m:t>
+                              </m:r>
+                            </m:sub>
+                            <m:sup>
+                              <m:r>
+                                <a:rPr lang="en-US" sz="2800" b="0" i="1" smtClean="0">
+                                  <a:latin typeface="Cambria Math" panose="02040503050406030204" pitchFamily="18" charset="0"/>
+                                  <a:ea typeface="Cambria Math" panose="02040503050406030204" pitchFamily="18" charset="0"/>
+                                </a:rPr>
+                                <m:t>∞</m:t>
+                              </m:r>
+                            </m:sup>
+                            <m:e>
+                              <m:sSup>
+                                <m:sSupPr>
+                                  <m:ctrlPr>
+                                    <a:rPr lang="en-US" sz="2800" b="0" i="1" smtClean="0">
+                                      <a:latin typeface="Cambria Math" panose="02040503050406030204" pitchFamily="18" charset="0"/>
+                                    </a:rPr>
+                                  </m:ctrlPr>
+                                </m:sSupPr>
+                                <m:e>
+                                  <m:r>
+                                    <a:rPr lang="en-US" sz="2800" b="0" i="1" smtClean="0">
+                                      <a:latin typeface="Cambria Math" panose="02040503050406030204" pitchFamily="18" charset="0"/>
+                                      <a:ea typeface="Cambria Math" panose="02040503050406030204" pitchFamily="18" charset="0"/>
+                                    </a:rPr>
+                                    <m:t>𝛾</m:t>
+                                  </m:r>
+                                </m:e>
+                                <m:sup>
+                                  <m:r>
+                                    <a:rPr lang="en-US" sz="2800" b="0" i="1" smtClean="0">
+                                      <a:latin typeface="Cambria Math" panose="02040503050406030204" pitchFamily="18" charset="0"/>
+                                    </a:rPr>
+                                    <m:t>𝑘</m:t>
+                                  </m:r>
+                                </m:sup>
+                              </m:sSup>
+                              <m:sSub>
+                                <m:sSubPr>
+                                  <m:ctrlPr>
+                                    <a:rPr lang="en-US" sz="2800" b="0" i="1" smtClean="0">
+                                      <a:latin typeface="Cambria Math" panose="02040503050406030204" pitchFamily="18" charset="0"/>
+                                    </a:rPr>
+                                  </m:ctrlPr>
+                                </m:sSubPr>
+                                <m:e>
+                                  <m:r>
+                                    <a:rPr lang="en-US" sz="2800" b="0" i="1" smtClean="0">
+                                      <a:latin typeface="Cambria Math" panose="02040503050406030204" pitchFamily="18" charset="0"/>
+                                    </a:rPr>
+                                    <m:t>𝑟</m:t>
+                                  </m:r>
+                                </m:e>
+                                <m:sub>
+                                  <m:r>
+                                    <a:rPr lang="en-US" sz="2800" b="0" i="1" smtClean="0">
+                                      <a:latin typeface="Cambria Math" panose="02040503050406030204" pitchFamily="18" charset="0"/>
+                                    </a:rPr>
+                                    <m:t>𝑡</m:t>
+                                  </m:r>
+                                  <m:r>
+                                    <a:rPr lang="en-US" sz="2800" b="0" i="1" smtClean="0">
+                                      <a:latin typeface="Cambria Math" panose="02040503050406030204" pitchFamily="18" charset="0"/>
+                                    </a:rPr>
+                                    <m:t>+</m:t>
+                                  </m:r>
+                                  <m:r>
+                                    <a:rPr lang="en-US" sz="2800" b="0" i="1" smtClean="0">
+                                      <a:latin typeface="Cambria Math" panose="02040503050406030204" pitchFamily="18" charset="0"/>
+                                    </a:rPr>
+                                    <m:t>𝑘</m:t>
+                                  </m:r>
+                                  <m:r>
+                                    <a:rPr lang="en-US" sz="2800" b="0" i="1" smtClean="0">
+                                      <a:latin typeface="Cambria Math" panose="02040503050406030204" pitchFamily="18" charset="0"/>
+                                    </a:rPr>
+                                    <m:t>+1</m:t>
+                                  </m:r>
+                                </m:sub>
+                              </m:sSub>
+                            </m:e>
+                          </m:nary>
+                          <m:r>
+                            <a:rPr lang="en-US" sz="2800" b="0" i="1" smtClean="0">
+                              <a:latin typeface="Cambria Math" panose="02040503050406030204" pitchFamily="18" charset="0"/>
+                            </a:rPr>
+                            <m:t>|</m:t>
+                          </m:r>
+                          <m:sSub>
+                            <m:sSubPr>
+                              <m:ctrlPr>
+                                <a:rPr lang="en-US" sz="2800" b="0" i="1" smtClean="0">
+                                  <a:latin typeface="Cambria Math" panose="02040503050406030204" pitchFamily="18" charset="0"/>
+                                </a:rPr>
+                              </m:ctrlPr>
+                            </m:sSubPr>
+                            <m:e>
+                              <m:r>
+                                <a:rPr lang="en-US" sz="2800" b="0" i="1" smtClean="0">
+                                  <a:latin typeface="Cambria Math" panose="02040503050406030204" pitchFamily="18" charset="0"/>
+                                </a:rPr>
+                                <m:t>𝑠</m:t>
+                              </m:r>
+                            </m:e>
+                            <m:sub>
+                              <m:r>
+                                <a:rPr lang="en-US" sz="2800" b="0" i="1" smtClean="0">
+                                  <a:latin typeface="Cambria Math" panose="02040503050406030204" pitchFamily="18" charset="0"/>
+                                </a:rPr>
+                                <m:t>𝑡</m:t>
+                              </m:r>
+                            </m:sub>
+                          </m:sSub>
+                        </m:e>
+                      </m:d>
+                      <m:r>
+                        <a:rPr lang="en-US" sz="2800" b="0" i="1" smtClean="0">
+                          <a:latin typeface="Cambria Math" panose="02040503050406030204" pitchFamily="18" charset="0"/>
+                        </a:rPr>
+                        <m:t>=</m:t>
+                      </m:r>
+                      <m:sSub>
+                        <m:sSubPr>
+                          <m:ctrlPr>
+                            <a:rPr lang="en-US" sz="2800" b="0" i="1" smtClean="0">
+                              <a:latin typeface="Cambria Math" panose="02040503050406030204" pitchFamily="18" charset="0"/>
+                            </a:rPr>
+                          </m:ctrlPr>
+                        </m:sSubPr>
+                        <m:e>
+                          <m:r>
+                            <a:rPr lang="en-US" sz="2800" b="0" i="1" smtClean="0">
+                              <a:latin typeface="Cambria Math" panose="02040503050406030204" pitchFamily="18" charset="0"/>
+                            </a:rPr>
+                            <m:t>𝐸</m:t>
+                          </m:r>
+                        </m:e>
+                        <m:sub>
+                          <m:r>
+                            <a:rPr lang="en-US" sz="2800" b="0" i="1" smtClean="0">
+                              <a:latin typeface="Cambria Math" panose="02040503050406030204" pitchFamily="18" charset="0"/>
+                              <a:ea typeface="Cambria Math" panose="02040503050406030204" pitchFamily="18" charset="0"/>
+                            </a:rPr>
+                            <m:t>𝜋</m:t>
+                          </m:r>
+                        </m:sub>
+                      </m:sSub>
+                      <m:d>
+                        <m:dPr>
+                          <m:begChr m:val="["/>
+                          <m:endChr m:val="]"/>
+                          <m:ctrlPr>
+                            <a:rPr lang="en-US" sz="2800" b="0" i="1" smtClean="0">
+                              <a:latin typeface="Cambria Math" panose="02040503050406030204" pitchFamily="18" charset="0"/>
+                            </a:rPr>
+                          </m:ctrlPr>
+                        </m:dPr>
+                        <m:e>
+                          <m:sSub>
+                            <m:sSubPr>
+                              <m:ctrlPr>
+                                <a:rPr lang="en-US" sz="2800" b="0" i="1" smtClean="0">
+                                  <a:latin typeface="Cambria Math" panose="02040503050406030204" pitchFamily="18" charset="0"/>
+                                </a:rPr>
+                              </m:ctrlPr>
+                            </m:sSubPr>
+                            <m:e>
+                              <m:r>
+                                <a:rPr lang="en-US" sz="2800" b="0" i="1" smtClean="0">
+                                  <a:latin typeface="Cambria Math" panose="02040503050406030204" pitchFamily="18" charset="0"/>
+                                </a:rPr>
+                                <m:t>𝑟</m:t>
+                              </m:r>
+                            </m:e>
+                            <m:sub>
+                              <m:r>
+                                <a:rPr lang="en-US" sz="2800" b="0" i="1" smtClean="0">
+                                  <a:latin typeface="Cambria Math" panose="02040503050406030204" pitchFamily="18" charset="0"/>
+                                </a:rPr>
+                                <m:t>𝑡</m:t>
+                              </m:r>
+                              <m:r>
+                                <a:rPr lang="en-US" sz="2800" b="0" i="1" smtClean="0">
+                                  <a:latin typeface="Cambria Math" panose="02040503050406030204" pitchFamily="18" charset="0"/>
+                                </a:rPr>
+                                <m:t>+1</m:t>
+                              </m:r>
+                            </m:sub>
+                          </m:sSub>
+                          <m:r>
+                            <a:rPr lang="en-US" sz="2800" b="0" i="1" smtClean="0">
+                              <a:latin typeface="Cambria Math" panose="02040503050406030204" pitchFamily="18" charset="0"/>
+                            </a:rPr>
+                            <m:t>+</m:t>
+                          </m:r>
+                          <m:r>
+                            <a:rPr lang="en-US" sz="2800" b="0" i="1" smtClean="0">
+                              <a:latin typeface="Cambria Math" panose="02040503050406030204" pitchFamily="18" charset="0"/>
+                              <a:ea typeface="Cambria Math" panose="02040503050406030204" pitchFamily="18" charset="0"/>
+                            </a:rPr>
+                            <m:t>𝛾</m:t>
+                          </m:r>
+                          <m:sSub>
+                            <m:sSubPr>
+                              <m:ctrlPr>
+                                <a:rPr lang="en-US" sz="2800" b="0" i="1" smtClean="0">
+                                  <a:latin typeface="Cambria Math" panose="02040503050406030204" pitchFamily="18" charset="0"/>
+                                  <a:ea typeface="Cambria Math" panose="02040503050406030204" pitchFamily="18" charset="0"/>
+                                </a:rPr>
+                              </m:ctrlPr>
+                            </m:sSubPr>
+                            <m:e>
+                              <m:r>
+                                <a:rPr lang="en-US" sz="2800" b="0" i="1" smtClean="0">
+                                  <a:latin typeface="Cambria Math" panose="02040503050406030204" pitchFamily="18" charset="0"/>
+                                  <a:ea typeface="Cambria Math" panose="02040503050406030204" pitchFamily="18" charset="0"/>
+                                </a:rPr>
+                                <m:t>𝑣</m:t>
+                              </m:r>
+                            </m:e>
+                            <m:sub>
+                              <m:r>
+                                <a:rPr lang="en-US" sz="2800" b="0" i="1" smtClean="0">
+                                  <a:latin typeface="Cambria Math" panose="02040503050406030204" pitchFamily="18" charset="0"/>
+                                  <a:ea typeface="Cambria Math" panose="02040503050406030204" pitchFamily="18" charset="0"/>
+                                </a:rPr>
+                                <m:t>𝜋</m:t>
+                              </m:r>
+                            </m:sub>
+                          </m:sSub>
+                          <m:d>
+                            <m:dPr>
+                              <m:ctrlPr>
+                                <a:rPr lang="en-US" sz="2800" b="0" i="1" smtClean="0">
+                                  <a:latin typeface="Cambria Math" panose="02040503050406030204" pitchFamily="18" charset="0"/>
+                                  <a:ea typeface="Cambria Math" panose="02040503050406030204" pitchFamily="18" charset="0"/>
+                                </a:rPr>
+                              </m:ctrlPr>
+                            </m:dPr>
+                            <m:e>
+                              <m:sSub>
+                                <m:sSubPr>
+                                  <m:ctrlPr>
+                                    <a:rPr lang="en-US" sz="2800" b="0" i="1" smtClean="0">
+                                      <a:latin typeface="Cambria Math" panose="02040503050406030204" pitchFamily="18" charset="0"/>
+                                      <a:ea typeface="Cambria Math" panose="02040503050406030204" pitchFamily="18" charset="0"/>
+                                    </a:rPr>
+                                  </m:ctrlPr>
+                                </m:sSubPr>
+                                <m:e>
+                                  <m:r>
+                                    <a:rPr lang="en-US" sz="2800" b="0" i="1" smtClean="0">
+                                      <a:latin typeface="Cambria Math" panose="02040503050406030204" pitchFamily="18" charset="0"/>
+                                      <a:ea typeface="Cambria Math" panose="02040503050406030204" pitchFamily="18" charset="0"/>
+                                    </a:rPr>
+                                    <m:t>𝑠</m:t>
+                                  </m:r>
+                                </m:e>
+                                <m:sub>
+                                  <m:r>
+                                    <a:rPr lang="en-US" sz="2800" b="0" i="1" smtClean="0">
+                                      <a:latin typeface="Cambria Math" panose="02040503050406030204" pitchFamily="18" charset="0"/>
+                                      <a:ea typeface="Cambria Math" panose="02040503050406030204" pitchFamily="18" charset="0"/>
+                                    </a:rPr>
+                                    <m:t>𝑡</m:t>
+                                  </m:r>
+                                  <m:r>
+                                    <a:rPr lang="en-US" sz="2800" b="0" i="1" smtClean="0">
+                                      <a:latin typeface="Cambria Math" panose="02040503050406030204" pitchFamily="18" charset="0"/>
+                                      <a:ea typeface="Cambria Math" panose="02040503050406030204" pitchFamily="18" charset="0"/>
+                                    </a:rPr>
+                                    <m:t>+1</m:t>
+                                  </m:r>
+                                </m:sub>
+                              </m:sSub>
+                            </m:e>
+                          </m:d>
+                          <m:r>
+                            <a:rPr lang="en-US" sz="2800" b="0" i="1" smtClean="0">
+                              <a:latin typeface="Cambria Math" panose="02040503050406030204" pitchFamily="18" charset="0"/>
+                              <a:ea typeface="Cambria Math" panose="02040503050406030204" pitchFamily="18" charset="0"/>
+                            </a:rPr>
+                            <m:t>|</m:t>
+                          </m:r>
+                          <m:sSub>
+                            <m:sSubPr>
+                              <m:ctrlPr>
+                                <a:rPr lang="en-US" sz="2800" b="0" i="1" smtClean="0">
+                                  <a:latin typeface="Cambria Math" panose="02040503050406030204" pitchFamily="18" charset="0"/>
+                                  <a:ea typeface="Cambria Math" panose="02040503050406030204" pitchFamily="18" charset="0"/>
+                                </a:rPr>
+                              </m:ctrlPr>
+                            </m:sSubPr>
+                            <m:e>
+                              <m:r>
+                                <a:rPr lang="en-US" sz="2800" b="0" i="1" smtClean="0">
+                                  <a:latin typeface="Cambria Math" panose="02040503050406030204" pitchFamily="18" charset="0"/>
+                                  <a:ea typeface="Cambria Math" panose="02040503050406030204" pitchFamily="18" charset="0"/>
+                                </a:rPr>
+                                <m:t>𝑠</m:t>
+                              </m:r>
+                            </m:e>
+                            <m:sub>
+                              <m:r>
+                                <a:rPr lang="en-US" sz="2800" b="0" i="1" smtClean="0">
+                                  <a:latin typeface="Cambria Math" panose="02040503050406030204" pitchFamily="18" charset="0"/>
+                                  <a:ea typeface="Cambria Math" panose="02040503050406030204" pitchFamily="18" charset="0"/>
+                                </a:rPr>
+                                <m:t>𝑡</m:t>
+                              </m:r>
+                            </m:sub>
+                          </m:sSub>
+                        </m:e>
+                      </m:d>
+                    </m:oMath>
+                  </m:oMathPara>
+                </a14:m>
+                <a:endParaRPr lang="en-US" sz="2800" b="0" i="1" dirty="0">
+                  <a:latin typeface="Cambria Math" panose="02040503050406030204" pitchFamily="18" charset="0"/>
+                </a:endParaRPr>
+              </a:p>
+              <a:p>
+                <a:pPr/>
+                <a14:m>
+                  <m:oMathPara xmlns:m="http://schemas.openxmlformats.org/officeDocument/2006/math">
+                    <m:oMathParaPr>
+                      <m:jc m:val="centerGroup"/>
+                    </m:oMathParaPr>
+                    <m:oMath xmlns:m="http://schemas.openxmlformats.org/officeDocument/2006/math">
+                      <m:r>
+                        <a:rPr lang="en-US" sz="2800" b="0" i="1" smtClean="0">
+                          <a:latin typeface="Cambria Math" panose="02040503050406030204" pitchFamily="18" charset="0"/>
+                        </a:rPr>
+                        <m:t>=</m:t>
+                      </m:r>
+                      <m:nary>
+                        <m:naryPr>
+                          <m:chr m:val="∑"/>
+                          <m:supHide m:val="on"/>
+                          <m:ctrlPr>
+                            <a:rPr lang="en-US" sz="2800" b="0" i="1" smtClean="0">
+                              <a:latin typeface="Cambria Math" panose="02040503050406030204" pitchFamily="18" charset="0"/>
+                            </a:rPr>
+                          </m:ctrlPr>
+                        </m:naryPr>
+                        <m:sub>
+                          <m:sSub>
+                            <m:sSubPr>
+                              <m:ctrlPr>
+                                <a:rPr lang="en-US" sz="2800" b="0" i="1" smtClean="0">
+                                  <a:latin typeface="Cambria Math" panose="02040503050406030204" pitchFamily="18" charset="0"/>
+                                </a:rPr>
+                              </m:ctrlPr>
+                            </m:sSubPr>
+                            <m:e>
+                              <m:r>
+                                <a:rPr lang="en-US" sz="2800" b="0" i="1" smtClean="0">
+                                  <a:latin typeface="Cambria Math" panose="02040503050406030204" pitchFamily="18" charset="0"/>
+                                </a:rPr>
+                                <m:t>𝑎</m:t>
+                              </m:r>
+                            </m:e>
+                            <m:sub>
+                              <m:r>
+                                <a:rPr lang="en-US" sz="2800" b="0" i="1" smtClean="0">
+                                  <a:latin typeface="Cambria Math" panose="02040503050406030204" pitchFamily="18" charset="0"/>
+                                </a:rPr>
+                                <m:t>𝑡</m:t>
+                              </m:r>
+                            </m:sub>
+                          </m:sSub>
+                        </m:sub>
+                        <m:sup/>
+                        <m:e>
+                          <m:r>
+                            <a:rPr lang="en-US" sz="2800" b="0" i="1" smtClean="0">
+                              <a:latin typeface="Cambria Math" panose="02040503050406030204" pitchFamily="18" charset="0"/>
+                              <a:ea typeface="Cambria Math" panose="02040503050406030204" pitchFamily="18" charset="0"/>
+                            </a:rPr>
+                            <m:t>𝜋</m:t>
+                          </m:r>
+                          <m:d>
+                            <m:dPr>
+                              <m:ctrlPr>
+                                <a:rPr lang="en-US" sz="2800" b="0" i="1" smtClean="0">
+                                  <a:latin typeface="Cambria Math" panose="02040503050406030204" pitchFamily="18" charset="0"/>
+                                  <a:ea typeface="Cambria Math" panose="02040503050406030204" pitchFamily="18" charset="0"/>
+                                </a:rPr>
+                              </m:ctrlPr>
+                            </m:dPr>
+                            <m:e>
+                              <m:sSub>
+                                <m:sSubPr>
+                                  <m:ctrlPr>
+                                    <a:rPr lang="en-US" sz="2800" b="0" i="1" smtClean="0">
+                                      <a:latin typeface="Cambria Math" panose="02040503050406030204" pitchFamily="18" charset="0"/>
+                                      <a:ea typeface="Cambria Math" panose="02040503050406030204" pitchFamily="18" charset="0"/>
+                                    </a:rPr>
+                                  </m:ctrlPr>
+                                </m:sSubPr>
+                                <m:e>
+                                  <m:r>
+                                    <a:rPr lang="en-US" sz="2800" b="0" i="1" smtClean="0">
+                                      <a:latin typeface="Cambria Math" panose="02040503050406030204" pitchFamily="18" charset="0"/>
+                                      <a:ea typeface="Cambria Math" panose="02040503050406030204" pitchFamily="18" charset="0"/>
+                                    </a:rPr>
+                                    <m:t>𝑎</m:t>
+                                  </m:r>
+                                </m:e>
+                                <m:sub>
+                                  <m:r>
+                                    <a:rPr lang="en-US" sz="2800" b="0" i="1" smtClean="0">
+                                      <a:latin typeface="Cambria Math" panose="02040503050406030204" pitchFamily="18" charset="0"/>
+                                      <a:ea typeface="Cambria Math" panose="02040503050406030204" pitchFamily="18" charset="0"/>
+                                    </a:rPr>
+                                    <m:t>𝑡</m:t>
+                                  </m:r>
+                                </m:sub>
+                              </m:sSub>
+                              <m:r>
+                                <a:rPr lang="en-US" sz="2800" b="0" i="1" smtClean="0">
+                                  <a:latin typeface="Cambria Math" panose="02040503050406030204" pitchFamily="18" charset="0"/>
+                                  <a:ea typeface="Cambria Math" panose="02040503050406030204" pitchFamily="18" charset="0"/>
+                                </a:rPr>
+                                <m:t>|</m:t>
+                              </m:r>
+                              <m:sSub>
+                                <m:sSubPr>
+                                  <m:ctrlPr>
+                                    <a:rPr lang="en-US" sz="2800" b="0" i="1" smtClean="0">
+                                      <a:latin typeface="Cambria Math" panose="02040503050406030204" pitchFamily="18" charset="0"/>
+                                      <a:ea typeface="Cambria Math" panose="02040503050406030204" pitchFamily="18" charset="0"/>
+                                    </a:rPr>
+                                  </m:ctrlPr>
+                                </m:sSubPr>
+                                <m:e>
+                                  <m:r>
+                                    <a:rPr lang="en-US" sz="2800" b="0" i="1" smtClean="0">
+                                      <a:latin typeface="Cambria Math" panose="02040503050406030204" pitchFamily="18" charset="0"/>
+                                      <a:ea typeface="Cambria Math" panose="02040503050406030204" pitchFamily="18" charset="0"/>
+                                    </a:rPr>
+                                    <m:t>𝑠</m:t>
+                                  </m:r>
+                                </m:e>
+                                <m:sub>
+                                  <m:r>
+                                    <a:rPr lang="en-US" sz="2800" b="0" i="1" smtClean="0">
+                                      <a:latin typeface="Cambria Math" panose="02040503050406030204" pitchFamily="18" charset="0"/>
+                                      <a:ea typeface="Cambria Math" panose="02040503050406030204" pitchFamily="18" charset="0"/>
+                                    </a:rPr>
+                                    <m:t>𝑡</m:t>
+                                  </m:r>
+                                </m:sub>
+                              </m:sSub>
+                            </m:e>
+                          </m:d>
+                          <m:nary>
+                            <m:naryPr>
+                              <m:chr m:val="∑"/>
+                              <m:supHide m:val="on"/>
+                              <m:ctrlPr>
+                                <a:rPr lang="en-US" sz="2800" b="0" i="1" smtClean="0">
+                                  <a:latin typeface="Cambria Math" panose="02040503050406030204" pitchFamily="18" charset="0"/>
+                                  <a:ea typeface="Cambria Math" panose="02040503050406030204" pitchFamily="18" charset="0"/>
+                                </a:rPr>
+                              </m:ctrlPr>
+                            </m:naryPr>
+                            <m:sub>
+                              <m:sSubSup>
+                                <m:sSubSupPr>
+                                  <m:ctrlPr>
+                                    <a:rPr lang="en-US" sz="2800" i="1">
+                                      <a:latin typeface="Cambria Math" panose="02040503050406030204" pitchFamily="18" charset="0"/>
+                                      <a:ea typeface="Cambria Math" panose="02040503050406030204" pitchFamily="18" charset="0"/>
+                                    </a:rPr>
+                                  </m:ctrlPr>
+                                </m:sSubSupPr>
+                                <m:e>
+                                  <m:r>
+                                    <a:rPr lang="en-US" sz="2800" i="1">
+                                      <a:latin typeface="Cambria Math" panose="02040503050406030204" pitchFamily="18" charset="0"/>
+                                      <a:ea typeface="Cambria Math" panose="02040503050406030204" pitchFamily="18" charset="0"/>
+                                    </a:rPr>
+                                    <m:t>𝑠</m:t>
+                                  </m:r>
+                                </m:e>
+                                <m:sub>
+                                  <m:r>
+                                    <a:rPr lang="en-US" sz="2800" i="1">
+                                      <a:latin typeface="Cambria Math" panose="02040503050406030204" pitchFamily="18" charset="0"/>
+                                      <a:ea typeface="Cambria Math" panose="02040503050406030204" pitchFamily="18" charset="0"/>
+                                    </a:rPr>
+                                    <m:t>𝑡</m:t>
+                                  </m:r>
+                                  <m:r>
+                                    <a:rPr lang="en-US" sz="2800" i="1">
+                                      <a:latin typeface="Cambria Math" panose="02040503050406030204" pitchFamily="18" charset="0"/>
+                                      <a:ea typeface="Cambria Math" panose="02040503050406030204" pitchFamily="18" charset="0"/>
+                                    </a:rPr>
+                                    <m:t>+1</m:t>
+                                  </m:r>
+                                </m:sub>
+                                <m:sup>
+                                  <m:r>
+                                    <a:rPr lang="en-US" sz="2800" i="1">
+                                      <a:latin typeface="Cambria Math" panose="02040503050406030204" pitchFamily="18" charset="0"/>
+                                      <a:ea typeface="Cambria Math" panose="02040503050406030204" pitchFamily="18" charset="0"/>
+                                    </a:rPr>
+                                    <m:t>′</m:t>
+                                  </m:r>
+                                </m:sup>
+                              </m:sSubSup>
+                              <m:r>
+                                <m:rPr>
+                                  <m:brk m:alnAt="7"/>
+                                </m:rPr>
+                                <a:rPr lang="en-US" sz="2800" b="0" i="1" smtClean="0">
+                                  <a:latin typeface="Cambria Math" panose="02040503050406030204" pitchFamily="18" charset="0"/>
+                                  <a:ea typeface="Cambria Math" panose="02040503050406030204" pitchFamily="18" charset="0"/>
+                                </a:rPr>
+                                <m:t>,</m:t>
+                              </m:r>
+                              <m:sSub>
+                                <m:sSubPr>
+                                  <m:ctrlPr>
+                                    <a:rPr lang="en-US" sz="2800" b="0" i="1" smtClean="0">
+                                      <a:latin typeface="Cambria Math" panose="02040503050406030204" pitchFamily="18" charset="0"/>
+                                      <a:ea typeface="Cambria Math" panose="02040503050406030204" pitchFamily="18" charset="0"/>
+                                    </a:rPr>
+                                  </m:ctrlPr>
+                                </m:sSubPr>
+                                <m:e>
+                                  <m:r>
+                                    <a:rPr lang="en-US" sz="2800" b="0" i="1" smtClean="0">
+                                      <a:latin typeface="Cambria Math" panose="02040503050406030204" pitchFamily="18" charset="0"/>
+                                      <a:ea typeface="Cambria Math" panose="02040503050406030204" pitchFamily="18" charset="0"/>
+                                    </a:rPr>
+                                    <m:t>𝑟</m:t>
+                                  </m:r>
+                                </m:e>
+                                <m:sub>
+                                  <m:r>
+                                    <a:rPr lang="en-US" sz="2800" b="0" i="1" smtClean="0">
+                                      <a:latin typeface="Cambria Math" panose="02040503050406030204" pitchFamily="18" charset="0"/>
+                                      <a:ea typeface="Cambria Math" panose="02040503050406030204" pitchFamily="18" charset="0"/>
+                                    </a:rPr>
+                                    <m:t>𝑡</m:t>
+                                  </m:r>
+                                  <m:r>
+                                    <a:rPr lang="en-US" sz="2800" b="0" i="1" smtClean="0">
+                                      <a:latin typeface="Cambria Math" panose="02040503050406030204" pitchFamily="18" charset="0"/>
+                                      <a:ea typeface="Cambria Math" panose="02040503050406030204" pitchFamily="18" charset="0"/>
+                                    </a:rPr>
+                                    <m:t>+1</m:t>
+                                  </m:r>
+                                </m:sub>
+                              </m:sSub>
+                            </m:sub>
+                            <m:sup/>
+                            <m:e>
+                              <m:r>
+                                <a:rPr lang="en-US" sz="2800" b="0" i="1" smtClean="0">
+                                  <a:latin typeface="Cambria Math" panose="02040503050406030204" pitchFamily="18" charset="0"/>
+                                  <a:ea typeface="Cambria Math" panose="02040503050406030204" pitchFamily="18" charset="0"/>
+                                </a:rPr>
+                                <m:t>𝑝</m:t>
+                              </m:r>
+                              <m:d>
+                                <m:dPr>
+                                  <m:ctrlPr>
+                                    <a:rPr lang="en-US" sz="2800" b="0" i="1" smtClean="0">
+                                      <a:latin typeface="Cambria Math" panose="02040503050406030204" pitchFamily="18" charset="0"/>
+                                      <a:ea typeface="Cambria Math" panose="02040503050406030204" pitchFamily="18" charset="0"/>
+                                    </a:rPr>
+                                  </m:ctrlPr>
+                                </m:dPr>
+                                <m:e>
+                                  <m:sSubSup>
+                                    <m:sSubSupPr>
+                                      <m:ctrlPr>
+                                        <a:rPr lang="en-US" sz="2800" i="1">
+                                          <a:latin typeface="Cambria Math" panose="02040503050406030204" pitchFamily="18" charset="0"/>
+                                          <a:ea typeface="Cambria Math" panose="02040503050406030204" pitchFamily="18" charset="0"/>
+                                        </a:rPr>
+                                      </m:ctrlPr>
+                                    </m:sSubSupPr>
+                                    <m:e>
+                                      <m:r>
+                                        <a:rPr lang="en-US" sz="2800" i="1">
+                                          <a:latin typeface="Cambria Math" panose="02040503050406030204" pitchFamily="18" charset="0"/>
+                                          <a:ea typeface="Cambria Math" panose="02040503050406030204" pitchFamily="18" charset="0"/>
+                                        </a:rPr>
+                                        <m:t>𝑠</m:t>
+                                      </m:r>
+                                    </m:e>
+                                    <m:sub>
+                                      <m:r>
+                                        <a:rPr lang="en-US" sz="2800" i="1">
+                                          <a:latin typeface="Cambria Math" panose="02040503050406030204" pitchFamily="18" charset="0"/>
+                                          <a:ea typeface="Cambria Math" panose="02040503050406030204" pitchFamily="18" charset="0"/>
+                                        </a:rPr>
+                                        <m:t>𝑡</m:t>
+                                      </m:r>
+                                      <m:r>
+                                        <a:rPr lang="en-US" sz="2800" i="1">
+                                          <a:latin typeface="Cambria Math" panose="02040503050406030204" pitchFamily="18" charset="0"/>
+                                          <a:ea typeface="Cambria Math" panose="02040503050406030204" pitchFamily="18" charset="0"/>
+                                        </a:rPr>
+                                        <m:t>+1</m:t>
+                                      </m:r>
+                                    </m:sub>
+                                    <m:sup>
+                                      <m:r>
+                                        <a:rPr lang="en-US" sz="2800" i="1">
+                                          <a:latin typeface="Cambria Math" panose="02040503050406030204" pitchFamily="18" charset="0"/>
+                                          <a:ea typeface="Cambria Math" panose="02040503050406030204" pitchFamily="18" charset="0"/>
+                                        </a:rPr>
+                                        <m:t>′</m:t>
+                                      </m:r>
+                                    </m:sup>
+                                  </m:sSubSup>
+                                  <m:r>
+                                    <a:rPr lang="en-US" sz="2800" b="0" i="1" smtClean="0">
+                                      <a:latin typeface="Cambria Math" panose="02040503050406030204" pitchFamily="18" charset="0"/>
+                                      <a:ea typeface="Cambria Math" panose="02040503050406030204" pitchFamily="18" charset="0"/>
+                                    </a:rPr>
+                                    <m:t>,</m:t>
+                                  </m:r>
+                                  <m:sSub>
+                                    <m:sSubPr>
+                                      <m:ctrlPr>
+                                        <a:rPr lang="en-US" sz="2800" b="0" i="1" smtClean="0">
+                                          <a:latin typeface="Cambria Math" panose="02040503050406030204" pitchFamily="18" charset="0"/>
+                                          <a:ea typeface="Cambria Math" panose="02040503050406030204" pitchFamily="18" charset="0"/>
+                                        </a:rPr>
+                                      </m:ctrlPr>
+                                    </m:sSubPr>
+                                    <m:e>
+                                      <m:r>
+                                        <a:rPr lang="en-US" sz="2800" b="0" i="1" smtClean="0">
+                                          <a:latin typeface="Cambria Math" panose="02040503050406030204" pitchFamily="18" charset="0"/>
+                                          <a:ea typeface="Cambria Math" panose="02040503050406030204" pitchFamily="18" charset="0"/>
+                                        </a:rPr>
+                                        <m:t>𝑟</m:t>
+                                      </m:r>
+                                    </m:e>
+                                    <m:sub>
+                                      <m:r>
+                                        <a:rPr lang="en-US" sz="2800" b="0" i="1" smtClean="0">
+                                          <a:latin typeface="Cambria Math" panose="02040503050406030204" pitchFamily="18" charset="0"/>
+                                          <a:ea typeface="Cambria Math" panose="02040503050406030204" pitchFamily="18" charset="0"/>
+                                        </a:rPr>
+                                        <m:t>𝑡</m:t>
+                                      </m:r>
+                                      <m:r>
+                                        <a:rPr lang="en-US" sz="2800" b="0" i="1" smtClean="0">
+                                          <a:latin typeface="Cambria Math" panose="02040503050406030204" pitchFamily="18" charset="0"/>
+                                          <a:ea typeface="Cambria Math" panose="02040503050406030204" pitchFamily="18" charset="0"/>
+                                        </a:rPr>
+                                        <m:t>+1</m:t>
+                                      </m:r>
+                                    </m:sub>
+                                  </m:sSub>
+                                  <m:r>
+                                    <a:rPr lang="en-US" sz="2800" b="0" i="1" smtClean="0">
+                                      <a:latin typeface="Cambria Math" panose="02040503050406030204" pitchFamily="18" charset="0"/>
+                                      <a:ea typeface="Cambria Math" panose="02040503050406030204" pitchFamily="18" charset="0"/>
+                                    </a:rPr>
+                                    <m:t>|</m:t>
+                                  </m:r>
+                                  <m:sSub>
+                                    <m:sSubPr>
+                                      <m:ctrlPr>
+                                        <a:rPr lang="en-US" sz="2800" b="0" i="1" smtClean="0">
+                                          <a:latin typeface="Cambria Math" panose="02040503050406030204" pitchFamily="18" charset="0"/>
+                                          <a:ea typeface="Cambria Math" panose="02040503050406030204" pitchFamily="18" charset="0"/>
+                                        </a:rPr>
+                                      </m:ctrlPr>
+                                    </m:sSubPr>
+                                    <m:e>
+                                      <m:r>
+                                        <a:rPr lang="en-US" sz="2800" b="0" i="1" smtClean="0">
+                                          <a:latin typeface="Cambria Math" panose="02040503050406030204" pitchFamily="18" charset="0"/>
+                                          <a:ea typeface="Cambria Math" panose="02040503050406030204" pitchFamily="18" charset="0"/>
+                                        </a:rPr>
+                                        <m:t>𝑠</m:t>
+                                      </m:r>
+                                    </m:e>
+                                    <m:sub>
+                                      <m:r>
+                                        <a:rPr lang="en-US" sz="2800" b="0" i="1" smtClean="0">
+                                          <a:latin typeface="Cambria Math" panose="02040503050406030204" pitchFamily="18" charset="0"/>
+                                          <a:ea typeface="Cambria Math" panose="02040503050406030204" pitchFamily="18" charset="0"/>
+                                        </a:rPr>
+                                        <m:t>𝑡</m:t>
+                                      </m:r>
+                                    </m:sub>
+                                  </m:sSub>
+                                  <m:r>
+                                    <a:rPr lang="en-US" sz="2800" b="0" i="1" smtClean="0">
+                                      <a:latin typeface="Cambria Math" panose="02040503050406030204" pitchFamily="18" charset="0"/>
+                                      <a:ea typeface="Cambria Math" panose="02040503050406030204" pitchFamily="18" charset="0"/>
+                                    </a:rPr>
+                                    <m:t>,</m:t>
+                                  </m:r>
+                                  <m:sSub>
+                                    <m:sSubPr>
+                                      <m:ctrlPr>
+                                        <a:rPr lang="en-US" sz="2800" b="0" i="1" smtClean="0">
+                                          <a:latin typeface="Cambria Math" panose="02040503050406030204" pitchFamily="18" charset="0"/>
+                                          <a:ea typeface="Cambria Math" panose="02040503050406030204" pitchFamily="18" charset="0"/>
+                                        </a:rPr>
+                                      </m:ctrlPr>
+                                    </m:sSubPr>
+                                    <m:e>
+                                      <m:r>
+                                        <a:rPr lang="en-US" sz="2800" b="0" i="1" smtClean="0">
+                                          <a:latin typeface="Cambria Math" panose="02040503050406030204" pitchFamily="18" charset="0"/>
+                                          <a:ea typeface="Cambria Math" panose="02040503050406030204" pitchFamily="18" charset="0"/>
+                                        </a:rPr>
+                                        <m:t>𝑎</m:t>
+                                      </m:r>
+                                    </m:e>
+                                    <m:sub>
+                                      <m:r>
+                                        <a:rPr lang="en-US" sz="2800" b="0" i="1" smtClean="0">
+                                          <a:latin typeface="Cambria Math" panose="02040503050406030204" pitchFamily="18" charset="0"/>
+                                          <a:ea typeface="Cambria Math" panose="02040503050406030204" pitchFamily="18" charset="0"/>
+                                        </a:rPr>
+                                        <m:t>𝑡</m:t>
+                                      </m:r>
+                                    </m:sub>
+                                  </m:sSub>
+                                </m:e>
+                              </m:d>
+                              <m:d>
+                                <m:dPr>
+                                  <m:begChr m:val="["/>
+                                  <m:endChr m:val="]"/>
+                                  <m:ctrlPr>
+                                    <a:rPr lang="en-US" sz="2800" b="0" i="1" smtClean="0">
+                                      <a:latin typeface="Cambria Math" panose="02040503050406030204" pitchFamily="18" charset="0"/>
+                                      <a:ea typeface="Cambria Math" panose="02040503050406030204" pitchFamily="18" charset="0"/>
+                                    </a:rPr>
+                                  </m:ctrlPr>
+                                </m:dPr>
+                                <m:e>
+                                  <m:sSub>
+                                    <m:sSubPr>
+                                      <m:ctrlPr>
+                                        <a:rPr lang="en-US" sz="2800" b="0" i="1" smtClean="0">
+                                          <a:latin typeface="Cambria Math" panose="02040503050406030204" pitchFamily="18" charset="0"/>
+                                          <a:ea typeface="Cambria Math" panose="02040503050406030204" pitchFamily="18" charset="0"/>
+                                        </a:rPr>
+                                      </m:ctrlPr>
+                                    </m:sSubPr>
+                                    <m:e>
+                                      <m:r>
+                                        <a:rPr lang="en-US" sz="2800" b="0" i="1" smtClean="0">
+                                          <a:latin typeface="Cambria Math" panose="02040503050406030204" pitchFamily="18" charset="0"/>
+                                          <a:ea typeface="Cambria Math" panose="02040503050406030204" pitchFamily="18" charset="0"/>
+                                        </a:rPr>
+                                        <m:t>𝑟</m:t>
+                                      </m:r>
+                                    </m:e>
+                                    <m:sub>
+                                      <m:r>
+                                        <a:rPr lang="en-US" sz="2800" b="0" i="1" smtClean="0">
+                                          <a:latin typeface="Cambria Math" panose="02040503050406030204" pitchFamily="18" charset="0"/>
+                                          <a:ea typeface="Cambria Math" panose="02040503050406030204" pitchFamily="18" charset="0"/>
+                                        </a:rPr>
+                                        <m:t>𝑡</m:t>
+                                      </m:r>
+                                      <m:r>
+                                        <a:rPr lang="en-US" sz="2800" b="0" i="1" smtClean="0">
+                                          <a:latin typeface="Cambria Math" panose="02040503050406030204" pitchFamily="18" charset="0"/>
+                                          <a:ea typeface="Cambria Math" panose="02040503050406030204" pitchFamily="18" charset="0"/>
+                                        </a:rPr>
+                                        <m:t>+1</m:t>
+                                      </m:r>
+                                    </m:sub>
+                                  </m:sSub>
+                                  <m:r>
+                                    <a:rPr lang="en-US" sz="2800" b="0" i="1" smtClean="0">
+                                      <a:latin typeface="Cambria Math" panose="02040503050406030204" pitchFamily="18" charset="0"/>
+                                      <a:ea typeface="Cambria Math" panose="02040503050406030204" pitchFamily="18" charset="0"/>
+                                    </a:rPr>
+                                    <m:t>+</m:t>
+                                  </m:r>
+                                  <m:r>
+                                    <a:rPr lang="en-US" sz="2800" b="0" i="1" smtClean="0">
+                                      <a:latin typeface="Cambria Math" panose="02040503050406030204" pitchFamily="18" charset="0"/>
+                                      <a:ea typeface="Cambria Math" panose="02040503050406030204" pitchFamily="18" charset="0"/>
+                                    </a:rPr>
+                                    <m:t>𝛾</m:t>
+                                  </m:r>
+                                  <m:sSub>
+                                    <m:sSubPr>
+                                      <m:ctrlPr>
+                                        <a:rPr lang="en-US" sz="2800" b="0" i="1" smtClean="0">
+                                          <a:latin typeface="Cambria Math" panose="02040503050406030204" pitchFamily="18" charset="0"/>
+                                          <a:ea typeface="Cambria Math" panose="02040503050406030204" pitchFamily="18" charset="0"/>
+                                        </a:rPr>
+                                      </m:ctrlPr>
+                                    </m:sSubPr>
+                                    <m:e>
+                                      <m:r>
+                                        <a:rPr lang="en-US" sz="2800" b="0" i="1" smtClean="0">
+                                          <a:latin typeface="Cambria Math" panose="02040503050406030204" pitchFamily="18" charset="0"/>
+                                          <a:ea typeface="Cambria Math" panose="02040503050406030204" pitchFamily="18" charset="0"/>
+                                        </a:rPr>
+                                        <m:t>𝑣</m:t>
+                                      </m:r>
+                                    </m:e>
+                                    <m:sub>
+                                      <m:r>
+                                        <a:rPr lang="en-US" sz="2800" b="0" i="1" smtClean="0">
+                                          <a:latin typeface="Cambria Math" panose="02040503050406030204" pitchFamily="18" charset="0"/>
+                                          <a:ea typeface="Cambria Math" panose="02040503050406030204" pitchFamily="18" charset="0"/>
+                                        </a:rPr>
+                                        <m:t>𝜋</m:t>
+                                      </m:r>
+                                    </m:sub>
+                                  </m:sSub>
+                                  <m:d>
+                                    <m:dPr>
+                                      <m:ctrlPr>
+                                        <a:rPr lang="en-US" sz="2800" b="0" i="1" smtClean="0">
+                                          <a:latin typeface="Cambria Math" panose="02040503050406030204" pitchFamily="18" charset="0"/>
+                                          <a:ea typeface="Cambria Math" panose="02040503050406030204" pitchFamily="18" charset="0"/>
+                                        </a:rPr>
+                                      </m:ctrlPr>
+                                    </m:dPr>
+                                    <m:e>
+                                      <m:sSubSup>
+                                        <m:sSubSupPr>
+                                          <m:ctrlPr>
+                                            <a:rPr lang="en-US" sz="2800" i="1">
+                                              <a:latin typeface="Cambria Math" panose="02040503050406030204" pitchFamily="18" charset="0"/>
+                                              <a:ea typeface="Cambria Math" panose="02040503050406030204" pitchFamily="18" charset="0"/>
+                                            </a:rPr>
+                                          </m:ctrlPr>
+                                        </m:sSubSupPr>
+                                        <m:e>
+                                          <m:r>
+                                            <a:rPr lang="en-US" sz="2800" i="1">
+                                              <a:latin typeface="Cambria Math" panose="02040503050406030204" pitchFamily="18" charset="0"/>
+                                              <a:ea typeface="Cambria Math" panose="02040503050406030204" pitchFamily="18" charset="0"/>
+                                            </a:rPr>
+                                            <m:t>𝑠</m:t>
+                                          </m:r>
+                                        </m:e>
+                                        <m:sub>
+                                          <m:r>
+                                            <a:rPr lang="en-US" sz="2800" i="1">
+                                              <a:latin typeface="Cambria Math" panose="02040503050406030204" pitchFamily="18" charset="0"/>
+                                              <a:ea typeface="Cambria Math" panose="02040503050406030204" pitchFamily="18" charset="0"/>
+                                            </a:rPr>
+                                            <m:t>𝑡</m:t>
+                                          </m:r>
+                                          <m:r>
+                                            <a:rPr lang="en-US" sz="2800" i="1">
+                                              <a:latin typeface="Cambria Math" panose="02040503050406030204" pitchFamily="18" charset="0"/>
+                                              <a:ea typeface="Cambria Math" panose="02040503050406030204" pitchFamily="18" charset="0"/>
+                                            </a:rPr>
+                                            <m:t>+1</m:t>
+                                          </m:r>
+                                        </m:sub>
+                                        <m:sup>
+                                          <m:r>
+                                            <a:rPr lang="en-US" sz="2800" i="1">
+                                              <a:latin typeface="Cambria Math" panose="02040503050406030204" pitchFamily="18" charset="0"/>
+                                              <a:ea typeface="Cambria Math" panose="02040503050406030204" pitchFamily="18" charset="0"/>
+                                            </a:rPr>
+                                            <m:t>′</m:t>
+                                          </m:r>
+                                        </m:sup>
+                                      </m:sSubSup>
+                                    </m:e>
+                                  </m:d>
+                                </m:e>
+                              </m:d>
+                            </m:e>
+                          </m:nary>
+                        </m:e>
+                      </m:nary>
+                    </m:oMath>
+                  </m:oMathPara>
+                </a14:m>
+                <a:endParaRPr lang="en-DE" sz="2800" dirty="0"/>
+              </a:p>
+            </p:txBody>
+          </p:sp>
+        </mc:Choice>
+        <mc:Fallback xmlns="">
+          <p:sp>
+            <p:nvSpPr>
+              <p:cNvPr id="3" name="TextBox 2">
+                <a:extLst>
+                  <a:ext uri="{FF2B5EF4-FFF2-40B4-BE49-F238E27FC236}">
+                    <a16:creationId xmlns:a16="http://schemas.microsoft.com/office/drawing/2014/main" id="{9126A8EE-7175-F901-57A1-E7EBCCAAE429}"/>
+                  </a:ext>
+                </a:extLst>
+              </p:cNvPr>
+              <p:cNvSpPr txBox="1">
+                <a:spLocks noRot="1" noChangeAspect="1" noMove="1" noResize="1" noEditPoints="1" noAdjustHandles="1" noChangeArrowheads="1" noChangeShapeType="1" noTextEdit="1"/>
+              </p:cNvSpPr>
+              <p:nvPr/>
+            </p:nvSpPr>
+            <p:spPr>
+              <a:xfrm>
+                <a:off x="1634063" y="2133759"/>
+                <a:ext cx="9016123" cy="2331920"/>
+              </a:xfrm>
+              <a:prstGeom prst="rect">
+                <a:avLst/>
+              </a:prstGeom>
+              <a:blipFill>
+                <a:blip r:embed="rId3"/>
+                <a:stretch>
+                  <a:fillRect l="-9986" t="-60870" b="-85870"/>
+                </a:stretch>
+              </a:blipFill>
+            </p:spPr>
+            <p:txBody>
+              <a:bodyPr/>
+              <a:lstStyle/>
+              <a:p>
+                <a:r>
+                  <a:rPr lang="en-DE">
+                    <a:noFill/>
+                  </a:rPr>
+                  <a:t> </a:t>
+                </a:r>
+              </a:p>
+            </p:txBody>
+          </p:sp>
+        </mc:Fallback>
+      </mc:AlternateContent>
+      <p:sp>
+        <p:nvSpPr>
+          <p:cNvPr id="19" name="Left Brace 18">
+            <a:extLst>
+              <a:ext uri="{FF2B5EF4-FFF2-40B4-BE49-F238E27FC236}">
+                <a16:creationId xmlns:a16="http://schemas.microsoft.com/office/drawing/2014/main" id="{277115C8-7CDA-F941-965F-CE13CAC5ECDF}"/>
+              </a:ext>
+            </a:extLst>
+          </p:cNvPr>
+          <p:cNvSpPr/>
+          <p:nvPr/>
+        </p:nvSpPr>
+        <p:spPr>
+          <a:xfrm rot="5400000">
+            <a:off x="4890890" y="749972"/>
+            <a:ext cx="320518" cy="2489095"/>
+          </a:xfrm>
+          <a:prstGeom prst="leftBrace">
+            <a:avLst>
+              <a:gd name="adj1" fmla="val 8333"/>
+              <a:gd name="adj2" fmla="val 49166"/>
+            </a:avLst>
+          </a:prstGeom>
+          <a:ln w="12700"/>
+        </p:spPr>
+        <p:style>
+          <a:lnRef idx="1">
+            <a:schemeClr val="accent1"/>
+          </a:lnRef>
+          <a:fillRef idx="0">
+            <a:schemeClr val="accent1"/>
+          </a:fillRef>
+          <a:effectRef idx="0">
+            <a:schemeClr val="accent1"/>
+          </a:effectRef>
+          <a:fontRef idx="minor">
+            <a:schemeClr val="tx1"/>
+          </a:fontRef>
+        </p:style>
+        <p:txBody>
+          <a:bodyPr rtlCol="0" anchor="ctr"/>
+          <a:lstStyle/>
+          <a:p>
+            <a:pPr algn="ctr"/>
+            <a:endParaRPr lang="en-DE"/>
+          </a:p>
+        </p:txBody>
+      </p:sp>
+      <p:cxnSp>
+        <p:nvCxnSpPr>
+          <p:cNvPr id="21" name="Straight Arrow Connector 20">
+            <a:extLst>
+              <a:ext uri="{FF2B5EF4-FFF2-40B4-BE49-F238E27FC236}">
+                <a16:creationId xmlns:a16="http://schemas.microsoft.com/office/drawing/2014/main" id="{2282F94A-C2EB-AFB0-C700-67868031BDBE}"/>
+              </a:ext>
+            </a:extLst>
+          </p:cNvPr>
+          <p:cNvCxnSpPr/>
+          <p:nvPr/>
+        </p:nvCxnSpPr>
+        <p:spPr>
+          <a:xfrm flipH="1">
+            <a:off x="8610600" y="1885111"/>
+            <a:ext cx="829678" cy="700434"/>
+          </a:xfrm>
+          <a:prstGeom prst="straightConnector1">
+            <a:avLst/>
+          </a:prstGeom>
+          <a:ln>
+            <a:tailEnd type="triangle"/>
+          </a:ln>
+        </p:spPr>
+        <p:style>
+          <a:lnRef idx="1">
+            <a:schemeClr val="accent1"/>
+          </a:lnRef>
+          <a:fillRef idx="0">
+            <a:schemeClr val="accent1"/>
+          </a:fillRef>
+          <a:effectRef idx="0">
+            <a:schemeClr val="accent1"/>
+          </a:effectRef>
+          <a:fontRef idx="minor">
+            <a:schemeClr val="tx1"/>
+          </a:fontRef>
+        </p:style>
+      </p:cxnSp>
+      <p:cxnSp>
+        <p:nvCxnSpPr>
+          <p:cNvPr id="24" name="Straight Arrow Connector 23">
+            <a:extLst>
+              <a:ext uri="{FF2B5EF4-FFF2-40B4-BE49-F238E27FC236}">
+                <a16:creationId xmlns:a16="http://schemas.microsoft.com/office/drawing/2014/main" id="{5FF27745-54C9-FD6B-9DD3-B4F1128351D0}"/>
+              </a:ext>
+            </a:extLst>
+          </p:cNvPr>
+          <p:cNvCxnSpPr>
+            <a:cxnSpLocks/>
+            <a:stCxn id="13" idx="0"/>
+          </p:cNvCxnSpPr>
+          <p:nvPr/>
+        </p:nvCxnSpPr>
+        <p:spPr>
+          <a:xfrm flipH="1" flipV="1">
+            <a:off x="9301655" y="4272456"/>
+            <a:ext cx="609362" cy="633922"/>
+          </a:xfrm>
+          <a:prstGeom prst="straightConnector1">
+            <a:avLst/>
+          </a:prstGeom>
+          <a:ln>
+            <a:tailEnd type="triangle"/>
+          </a:ln>
+        </p:spPr>
+        <p:style>
+          <a:lnRef idx="1">
+            <a:schemeClr val="accent1"/>
+          </a:lnRef>
+          <a:fillRef idx="0">
+            <a:schemeClr val="accent1"/>
+          </a:fillRef>
+          <a:effectRef idx="0">
+            <a:schemeClr val="accent1"/>
+          </a:effectRef>
+          <a:fontRef idx="minor">
+            <a:schemeClr val="tx1"/>
+          </a:fontRef>
+        </p:style>
+      </p:cxnSp>
+      <p:cxnSp>
+        <p:nvCxnSpPr>
+          <p:cNvPr id="29" name="Straight Arrow Connector 28">
+            <a:extLst>
+              <a:ext uri="{FF2B5EF4-FFF2-40B4-BE49-F238E27FC236}">
+                <a16:creationId xmlns:a16="http://schemas.microsoft.com/office/drawing/2014/main" id="{6CFC785C-433A-C24F-4F57-2347239C1CB0}"/>
+              </a:ext>
+            </a:extLst>
+          </p:cNvPr>
+          <p:cNvCxnSpPr>
+            <a:cxnSpLocks/>
+            <a:stCxn id="15" idx="0"/>
+          </p:cNvCxnSpPr>
+          <p:nvPr/>
+        </p:nvCxnSpPr>
+        <p:spPr>
+          <a:xfrm flipV="1">
+            <a:off x="2140730" y="3993931"/>
+            <a:ext cx="581449" cy="883158"/>
+          </a:xfrm>
+          <a:prstGeom prst="straightConnector1">
+            <a:avLst/>
+          </a:prstGeom>
+          <a:ln>
+            <a:tailEnd type="triangle"/>
+          </a:ln>
+        </p:spPr>
+        <p:style>
+          <a:lnRef idx="1">
+            <a:schemeClr val="accent1"/>
+          </a:lnRef>
+          <a:fillRef idx="0">
+            <a:schemeClr val="accent1"/>
+          </a:fillRef>
+          <a:effectRef idx="0">
+            <a:schemeClr val="accent1"/>
+          </a:effectRef>
+          <a:fontRef idx="minor">
+            <a:schemeClr val="tx1"/>
+          </a:fontRef>
+        </p:style>
+      </p:cxnSp>
+      <p:cxnSp>
+        <p:nvCxnSpPr>
+          <p:cNvPr id="31" name="Straight Arrow Connector 30">
+            <a:extLst>
+              <a:ext uri="{FF2B5EF4-FFF2-40B4-BE49-F238E27FC236}">
+                <a16:creationId xmlns:a16="http://schemas.microsoft.com/office/drawing/2014/main" id="{AC3F895B-1239-0440-2FAE-74FD00099180}"/>
+              </a:ext>
+            </a:extLst>
+          </p:cNvPr>
+          <p:cNvCxnSpPr>
+            <a:cxnSpLocks/>
+            <a:stCxn id="17" idx="0"/>
+          </p:cNvCxnSpPr>
+          <p:nvPr/>
+        </p:nvCxnSpPr>
+        <p:spPr>
+          <a:xfrm flipH="1" flipV="1">
+            <a:off x="5297214" y="3993931"/>
+            <a:ext cx="918145" cy="883158"/>
+          </a:xfrm>
+          <a:prstGeom prst="straightConnector1">
+            <a:avLst/>
+          </a:prstGeom>
+          <a:ln>
+            <a:tailEnd type="triangle"/>
+          </a:ln>
+        </p:spPr>
+        <p:style>
+          <a:lnRef idx="1">
+            <a:schemeClr val="accent1"/>
+          </a:lnRef>
+          <a:fillRef idx="0">
+            <a:schemeClr val="accent1"/>
+          </a:fillRef>
+          <a:effectRef idx="0">
+            <a:schemeClr val="accent1"/>
+          </a:effectRef>
+          <a:fontRef idx="minor">
+            <a:schemeClr val="tx1"/>
+          </a:fontRef>
+        </p:style>
+      </p:cxnSp>
+      <p:sp>
+        <p:nvSpPr>
+          <p:cNvPr id="5" name="TextBox 4">
+            <a:extLst>
+              <a:ext uri="{FF2B5EF4-FFF2-40B4-BE49-F238E27FC236}">
+                <a16:creationId xmlns:a16="http://schemas.microsoft.com/office/drawing/2014/main" id="{E8A28ACD-56E5-3C56-68CC-AEB9A6A1E18C}"/>
+              </a:ext>
+            </a:extLst>
+          </p:cNvPr>
+          <p:cNvSpPr txBox="1"/>
+          <p:nvPr/>
+        </p:nvSpPr>
+        <p:spPr>
+          <a:xfrm>
+            <a:off x="4117036" y="6123543"/>
+            <a:ext cx="3944314" cy="369332"/>
+          </a:xfrm>
+          <a:prstGeom prst="rect">
+            <a:avLst/>
+          </a:prstGeom>
+          <a:noFill/>
+        </p:spPr>
+        <p:txBody>
+          <a:bodyPr wrap="square" rtlCol="0">
+            <a:spAutoFit/>
+          </a:bodyPr>
+          <a:lstStyle/>
+          <a:p>
+            <a:r>
+              <a:rPr lang="en-GB" dirty="0"/>
+              <a:t>(s</a:t>
+            </a:r>
+            <a:r>
+              <a:rPr lang="en-DE" dirty="0"/>
+              <a:t>weep through entire state space)</a:t>
+            </a:r>
+          </a:p>
+        </p:txBody>
+      </p:sp>
+      <p:sp>
+        <p:nvSpPr>
+          <p:cNvPr id="6" name="TextBox 5">
+            <a:extLst>
+              <a:ext uri="{FF2B5EF4-FFF2-40B4-BE49-F238E27FC236}">
+                <a16:creationId xmlns:a16="http://schemas.microsoft.com/office/drawing/2014/main" id="{AA4B3A5C-3343-E2FA-59CA-78F1332A61AB}"/>
+              </a:ext>
+            </a:extLst>
+          </p:cNvPr>
+          <p:cNvSpPr txBox="1"/>
+          <p:nvPr/>
+        </p:nvSpPr>
+        <p:spPr>
+          <a:xfrm>
+            <a:off x="84103" y="1764427"/>
+            <a:ext cx="2229649" cy="369332"/>
+          </a:xfrm>
+          <a:prstGeom prst="rect">
+            <a:avLst/>
+          </a:prstGeom>
+          <a:noFill/>
+        </p:spPr>
+        <p:txBody>
+          <a:bodyPr wrap="none" rtlCol="0">
+            <a:spAutoFit/>
+          </a:bodyPr>
+          <a:lstStyle/>
+          <a:p>
+            <a:r>
+              <a:rPr lang="en-GB" dirty="0"/>
+              <a:t>(n</a:t>
+            </a:r>
+            <a:r>
+              <a:rPr lang="en-DE" dirty="0"/>
+              <a:t>eeded for all states)</a:t>
+            </a:r>
+          </a:p>
+        </p:txBody>
+      </p:sp>
+      <p:cxnSp>
+        <p:nvCxnSpPr>
+          <p:cNvPr id="10" name="Straight Arrow Connector 9">
+            <a:extLst>
+              <a:ext uri="{FF2B5EF4-FFF2-40B4-BE49-F238E27FC236}">
+                <a16:creationId xmlns:a16="http://schemas.microsoft.com/office/drawing/2014/main" id="{B4E2CBBA-87B7-4BA4-3F0B-61B11CA2A450}"/>
+              </a:ext>
+            </a:extLst>
+          </p:cNvPr>
+          <p:cNvCxnSpPr>
+            <a:stCxn id="6" idx="2"/>
+          </p:cNvCxnSpPr>
+          <p:nvPr/>
+        </p:nvCxnSpPr>
+        <p:spPr>
+          <a:xfrm>
+            <a:off x="1198928" y="2133759"/>
+            <a:ext cx="671913" cy="451786"/>
+          </a:xfrm>
+          <a:prstGeom prst="straightConnector1">
+            <a:avLst/>
+          </a:prstGeom>
+          <a:ln>
+            <a:tailEnd type="triangle"/>
+          </a:ln>
+        </p:spPr>
+        <p:style>
+          <a:lnRef idx="1">
+            <a:schemeClr val="accent1"/>
+          </a:lnRef>
+          <a:fillRef idx="0">
+            <a:schemeClr val="accent1"/>
+          </a:fillRef>
+          <a:effectRef idx="0">
+            <a:schemeClr val="accent1"/>
+          </a:effectRef>
+          <a:fontRef idx="minor">
+            <a:schemeClr val="tx1"/>
+          </a:fontRef>
+        </p:style>
+      </p:cxnSp>
+      <p:sp>
+        <p:nvSpPr>
+          <p:cNvPr id="8" name="TextBox 5">
+            <a:extLst>
+              <a:ext uri="{FF2B5EF4-FFF2-40B4-BE49-F238E27FC236}">
+                <a16:creationId xmlns:a16="http://schemas.microsoft.com/office/drawing/2014/main" id="{7FDD51CF-77E5-7BB7-2BDA-0F5094E9A4E5}"/>
+              </a:ext>
+            </a:extLst>
+          </p:cNvPr>
+          <p:cNvSpPr txBox="1"/>
+          <p:nvPr/>
+        </p:nvSpPr>
+        <p:spPr>
+          <a:xfrm>
+            <a:off x="15194" y="3059668"/>
+            <a:ext cx="1112228" cy="369332"/>
+          </a:xfrm>
+          <a:prstGeom prst="rect">
+            <a:avLst/>
+          </a:prstGeom>
+          <a:noFill/>
+        </p:spPr>
+        <p:txBody>
+          <a:bodyPr wrap="none" rtlCol="0">
+            <a:spAutoFit/>
+          </a:bodyPr>
+          <a:lstStyle/>
+          <a:p>
+            <a:r>
+              <a:rPr lang="de-DE" dirty="0"/>
+              <a:t>on-</a:t>
+            </a:r>
+            <a:r>
+              <a:rPr lang="de-DE" dirty="0" err="1"/>
+              <a:t>policy</a:t>
+            </a:r>
+            <a:endParaRPr lang="en-DE" dirty="0"/>
+          </a:p>
+        </p:txBody>
+      </p:sp>
+      <p:cxnSp>
+        <p:nvCxnSpPr>
+          <p:cNvPr id="14" name="Straight Arrow Connector 9">
+            <a:extLst>
+              <a:ext uri="{FF2B5EF4-FFF2-40B4-BE49-F238E27FC236}">
+                <a16:creationId xmlns:a16="http://schemas.microsoft.com/office/drawing/2014/main" id="{E333265D-643E-9A46-F9C5-BBD2442D0199}"/>
+              </a:ext>
+            </a:extLst>
+          </p:cNvPr>
+          <p:cNvCxnSpPr>
+            <a:cxnSpLocks/>
+            <a:stCxn id="8" idx="3"/>
+          </p:cNvCxnSpPr>
+          <p:nvPr/>
+        </p:nvCxnSpPr>
+        <p:spPr>
+          <a:xfrm flipV="1">
+            <a:off x="1127422" y="2885044"/>
+            <a:ext cx="869544" cy="359290"/>
+          </a:xfrm>
+          <a:prstGeom prst="straightConnector1">
+            <a:avLst/>
+          </a:prstGeom>
+          <a:ln>
+            <a:tailEnd type="triangle"/>
+          </a:ln>
+        </p:spPr>
+        <p:style>
+          <a:lnRef idx="1">
+            <a:schemeClr val="accent1"/>
+          </a:lnRef>
+          <a:fillRef idx="0">
+            <a:schemeClr val="accent1"/>
+          </a:fillRef>
+          <a:effectRef idx="0">
+            <a:schemeClr val="accent1"/>
+          </a:effectRef>
+          <a:fontRef idx="minor">
+            <a:schemeClr val="tx1"/>
+          </a:fontRef>
+        </p:style>
+      </p:cxnSp>
+    </p:spTree>
+    <p:extLst>
+      <p:ext uri="{BB962C8B-B14F-4D97-AF65-F5344CB8AC3E}">
+        <p14:creationId xmlns:p14="http://schemas.microsoft.com/office/powerpoint/2010/main" val="3242170843"/>
+      </p:ext>
+    </p:extLst>
+  </p:cSld>
+  <p:clrMapOvr>
+    <a:masterClrMapping/>
+  </p:clrMapOvr>
+</p:sld>
+</file>
+
+<file path=ppt/slides/slide11.xml><?xml version="1.0" encoding="utf-8"?>
+<p:sld xmlns:a="http://schemas.openxmlformats.org/drawingml/2006/main" xmlns:r="http://schemas.openxmlformats.org/officeDocument/2006/relationships" xmlns:p="http://schemas.openxmlformats.org/presentationml/2006/main">
+  <p:cSld>
+    <p:spTree>
+      <p:nvGrpSpPr>
+        <p:cNvPr id="1" name=""/>
+        <p:cNvGrpSpPr/>
+        <p:nvPr/>
+      </p:nvGrpSpPr>
+      <p:grpSpPr>
+        <a:xfrm>
+          <a:off x="0" y="0"/>
+          <a:ext cx="0" cy="0"/>
+          <a:chOff x="0" y="0"/>
+          <a:chExt cx="0" cy="0"/>
+        </a:xfrm>
+      </p:grpSpPr>
+      <p:sp>
+        <p:nvSpPr>
+          <p:cNvPr id="2" name="Title 1">
+            <a:extLst>
+              <a:ext uri="{FF2B5EF4-FFF2-40B4-BE49-F238E27FC236}">
+                <a16:creationId xmlns:a16="http://schemas.microsoft.com/office/drawing/2014/main" id="{134F5B4C-755B-6562-2C17-4B127886AB02}"/>
+              </a:ext>
+            </a:extLst>
+          </p:cNvPr>
+          <p:cNvSpPr>
+            <a:spLocks noGrp="1"/>
+          </p:cNvSpPr>
+          <p:nvPr>
+            <p:ph type="title"/>
+          </p:nvPr>
+        </p:nvSpPr>
+        <p:spPr/>
+        <p:txBody>
+          <a:bodyPr/>
+          <a:lstStyle/>
+          <a:p>
+            <a:r>
+              <a:rPr lang="en-DE" dirty="0"/>
+              <a:t>Action-Value Function</a:t>
+            </a:r>
+          </a:p>
+        </p:txBody>
+      </p:sp>
+      <p:sp>
+        <p:nvSpPr>
+          <p:cNvPr id="4" name="Slide Number Placeholder 3">
+            <a:extLst>
+              <a:ext uri="{FF2B5EF4-FFF2-40B4-BE49-F238E27FC236}">
+                <a16:creationId xmlns:a16="http://schemas.microsoft.com/office/drawing/2014/main" id="{2711539F-29FB-43F2-21A3-8F8ECE02246D}"/>
+              </a:ext>
+            </a:extLst>
+          </p:cNvPr>
+          <p:cNvSpPr>
+            <a:spLocks noGrp="1"/>
+          </p:cNvSpPr>
+          <p:nvPr>
+            <p:ph type="sldNum" sz="quarter" idx="12"/>
+          </p:nvPr>
+        </p:nvSpPr>
+        <p:spPr/>
+        <p:txBody>
+          <a:bodyPr/>
+          <a:lstStyle/>
+          <a:p>
+            <a:fld id="{C48B675A-2084-C34A-84F6-1B6A8516A5F3}" type="slidenum">
+              <a:rPr lang="en-DE" smtClean="0"/>
+              <a:t>11</a:t>
             </a:fld>
             <a:endParaRPr lang="en-DE"/>
           </a:p>
@@ -5579,7 +7539,7 @@
 </p:sld>
 </file>
 
-<file path=ppt/slides/slide11.xml><?xml version="1.0" encoding="utf-8"?>
+<file path=ppt/slides/slide12.xml><?xml version="1.0" encoding="utf-8"?>
 <p:sld xmlns:a="http://schemas.openxmlformats.org/drawingml/2006/main" xmlns:r="http://schemas.openxmlformats.org/officeDocument/2006/relationships" xmlns:p="http://schemas.openxmlformats.org/presentationml/2006/main">
   <p:cSld>
     <p:spTree>
@@ -5769,7 +7729,7 @@
           <a:p>
             <a:fld id="{C48B675A-2084-C34A-84F6-1B6A8516A5F3}" type="slidenum">
               <a:rPr lang="en-DE" smtClean="0"/>
-              <a:t>11</a:t>
+              <a:t>12</a:t>
             </a:fld>
             <a:endParaRPr lang="en-DE"/>
           </a:p>
@@ -5818,7 +7778,7 @@
 </p:sld>
 </file>
 
-<file path=ppt/slides/slide12.xml><?xml version="1.0" encoding="utf-8"?>
+<file path=ppt/slides/slide13.xml><?xml version="1.0" encoding="utf-8"?>
 <p:sld xmlns:a="http://schemas.openxmlformats.org/drawingml/2006/main" xmlns:r="http://schemas.openxmlformats.org/officeDocument/2006/relationships" xmlns:p="http://schemas.openxmlformats.org/presentationml/2006/main">
   <p:cSld>
     <p:spTree>
@@ -5887,7 +7847,7 @@
           <a:p>
             <a:fld id="{08C366F5-AFAD-49CB-854A-9D9E238FCA13}" type="slidenum">
               <a:rPr lang="en-GB" smtClean="0"/>
-              <a:t>12</a:t>
+              <a:t>13</a:t>
             </a:fld>
             <a:endParaRPr lang="en-GB"/>
           </a:p>
@@ -5906,7 +7866,7 @@
 </p:sld>
 </file>
 
-<file path=ppt/slides/slide13.xml><?xml version="1.0" encoding="utf-8"?>
+<file path=ppt/slides/slide14.xml><?xml version="1.0" encoding="utf-8"?>
 <p:sld xmlns:a="http://schemas.openxmlformats.org/drawingml/2006/main" xmlns:r="http://schemas.openxmlformats.org/officeDocument/2006/relationships" xmlns:p="http://schemas.openxmlformats.org/presentationml/2006/main">
   <p:cSld>
     <p:spTree>
@@ -6139,7 +8099,7 @@
           <a:p>
             <a:fld id="{C48B675A-2084-C34A-84F6-1B6A8516A5F3}" type="slidenum">
               <a:rPr lang="en-DE" smtClean="0"/>
-              <a:t>13</a:t>
+              <a:t>14</a:t>
             </a:fld>
             <a:endParaRPr lang="en-DE"/>
           </a:p>
@@ -6283,196 +8243,6 @@
     <p:extLst>
       <p:ext uri="{BB962C8B-B14F-4D97-AF65-F5344CB8AC3E}">
         <p14:creationId xmlns:p14="http://schemas.microsoft.com/office/powerpoint/2010/main" val="461603474"/>
-      </p:ext>
-    </p:extLst>
-  </p:cSld>
-  <p:clrMapOvr>
-    <a:masterClrMapping/>
-  </p:clrMapOvr>
-</p:sld>
-</file>
-
-<file path=ppt/slides/slide14.xml><?xml version="1.0" encoding="utf-8"?>
-<p:sld xmlns:a="http://schemas.openxmlformats.org/drawingml/2006/main" xmlns:r="http://schemas.openxmlformats.org/officeDocument/2006/relationships" xmlns:p="http://schemas.openxmlformats.org/presentationml/2006/main">
-  <p:cSld>
-    <p:spTree>
-      <p:nvGrpSpPr>
-        <p:cNvPr id="1" name=""/>
-        <p:cNvGrpSpPr/>
-        <p:nvPr/>
-      </p:nvGrpSpPr>
-      <p:grpSpPr>
-        <a:xfrm>
-          <a:off x="0" y="0"/>
-          <a:ext cx="0" cy="0"/>
-          <a:chOff x="0" y="0"/>
-          <a:chExt cx="0" cy="0"/>
-        </a:xfrm>
-      </p:grpSpPr>
-      <p:sp>
-        <p:nvSpPr>
-          <p:cNvPr id="2" name="Title 1">
-            <a:extLst>
-              <a:ext uri="{FF2B5EF4-FFF2-40B4-BE49-F238E27FC236}">
-                <a16:creationId xmlns:a16="http://schemas.microsoft.com/office/drawing/2014/main" id="{07E2C3FC-F2B9-7298-40F0-30300DECA8DD}"/>
-              </a:ext>
-            </a:extLst>
-          </p:cNvPr>
-          <p:cNvSpPr>
-            <a:spLocks noGrp="1"/>
-          </p:cNvSpPr>
-          <p:nvPr>
-            <p:ph type="title"/>
-          </p:nvPr>
-        </p:nvSpPr>
-        <p:spPr/>
-        <p:txBody>
-          <a:bodyPr/>
-          <a:lstStyle/>
-          <a:p>
-            <a:r>
-              <a:rPr lang="en-DE" dirty="0"/>
-              <a:t>Limited Utility of DP</a:t>
-            </a:r>
-          </a:p>
-        </p:txBody>
-      </p:sp>
-      <p:sp>
-        <p:nvSpPr>
-          <p:cNvPr id="3" name="Content Placeholder 2">
-            <a:extLst>
-              <a:ext uri="{FF2B5EF4-FFF2-40B4-BE49-F238E27FC236}">
-                <a16:creationId xmlns:a16="http://schemas.microsoft.com/office/drawing/2014/main" id="{579E4169-E0E3-4AF2-B882-6FE60E1CB1C6}"/>
-              </a:ext>
-            </a:extLst>
-          </p:cNvPr>
-          <p:cNvSpPr>
-            <a:spLocks noGrp="1"/>
-          </p:cNvSpPr>
-          <p:nvPr>
-            <p:ph idx="1"/>
-          </p:nvPr>
-        </p:nvSpPr>
-        <p:spPr/>
-        <p:txBody>
-          <a:bodyPr>
-            <a:normAutofit fontScale="92500" lnSpcReduction="20000"/>
-          </a:bodyPr>
-          <a:lstStyle/>
-          <a:p>
-            <a:pPr marL="0" indent="0">
-              <a:buNone/>
-            </a:pPr>
-            <a:r>
-              <a:rPr lang="en-GB" dirty="0"/>
-              <a:t>requires full model of environment</a:t>
-            </a:r>
-          </a:p>
-          <a:p>
-            <a:pPr marL="0" indent="0">
-              <a:buNone/>
-            </a:pPr>
-            <a:endParaRPr lang="en-GB" dirty="0"/>
-          </a:p>
-          <a:p>
-            <a:pPr marL="0" indent="0">
-              <a:buNone/>
-            </a:pPr>
-            <a:r>
-              <a:rPr lang="en-GB" dirty="0"/>
-              <a:t>c</a:t>
-            </a:r>
-            <a:r>
-              <a:rPr lang="en-DE" dirty="0"/>
-              <a:t>omputationally expensive</a:t>
-            </a:r>
-          </a:p>
-          <a:p>
-            <a:r>
-              <a:rPr lang="en-DE" dirty="0"/>
-              <a:t>expected update operation (based on values of all possible successor states and their probability)</a:t>
-            </a:r>
-          </a:p>
-          <a:p>
-            <a:r>
-              <a:rPr lang="en-DE" dirty="0"/>
-              <a:t>for each state (in potentially huge state space)</a:t>
-            </a:r>
-          </a:p>
-          <a:p>
-            <a:pPr marL="0" indent="0">
-              <a:buNone/>
-            </a:pPr>
-            <a:r>
-              <a:rPr lang="en-DE" dirty="0"/>
-              <a:t>(asynchronous DP at least avoids systematic sweeps over entire state space)</a:t>
-            </a:r>
-          </a:p>
-          <a:p>
-            <a:pPr marL="0" indent="0">
-              <a:buNone/>
-            </a:pPr>
-            <a:endParaRPr lang="en-DE" dirty="0"/>
-          </a:p>
-          <a:p>
-            <a:pPr marL="0" indent="0">
-              <a:buNone/>
-            </a:pPr>
-            <a:r>
-              <a:rPr lang="en-DE" dirty="0">
-                <a:sym typeface="Wingdings" pitchFamily="2" charset="2"/>
-              </a:rPr>
-              <a:t> </a:t>
-            </a:r>
-            <a:r>
-              <a:rPr lang="en-GB" dirty="0">
-                <a:sym typeface="Wingdings" pitchFamily="2" charset="2"/>
-              </a:rPr>
-              <a:t>n</a:t>
-            </a:r>
-            <a:r>
-              <a:rPr lang="en-DE" dirty="0">
-                <a:sym typeface="Wingdings" pitchFamily="2" charset="2"/>
-              </a:rPr>
-              <a:t>eed for more efficient methods achieving the same effect as DP, without (perfect) model of environment</a:t>
-            </a:r>
-            <a:endParaRPr lang="en-DE" dirty="0"/>
-          </a:p>
-        </p:txBody>
-      </p:sp>
-      <p:sp>
-        <p:nvSpPr>
-          <p:cNvPr id="4" name="Slide Number Placeholder 3">
-            <a:extLst>
-              <a:ext uri="{FF2B5EF4-FFF2-40B4-BE49-F238E27FC236}">
-                <a16:creationId xmlns:a16="http://schemas.microsoft.com/office/drawing/2014/main" id="{9AEAF159-1FA2-BE72-E5F7-780EA6F026EC}"/>
-              </a:ext>
-            </a:extLst>
-          </p:cNvPr>
-          <p:cNvSpPr>
-            <a:spLocks noGrp="1"/>
-          </p:cNvSpPr>
-          <p:nvPr>
-            <p:ph type="sldNum" sz="quarter" idx="12"/>
-          </p:nvPr>
-        </p:nvSpPr>
-        <p:spPr/>
-        <p:txBody>
-          <a:bodyPr/>
-          <a:lstStyle/>
-          <a:p>
-            <a:fld id="{C48B675A-2084-C34A-84F6-1B6A8516A5F3}" type="slidenum">
-              <a:rPr lang="en-DE" smtClean="0"/>
-              <a:t>14</a:t>
-            </a:fld>
-            <a:endParaRPr lang="en-DE"/>
-          </a:p>
-        </p:txBody>
-      </p:sp>
-    </p:spTree>
-    <p:extLst>
-      <p:ext uri="{BB962C8B-B14F-4D97-AF65-F5344CB8AC3E}">
-        <p14:creationId xmlns:p14="http://schemas.microsoft.com/office/powerpoint/2010/main" val="2226179452"/>
       </p:ext>
     </p:extLst>
   </p:cSld>
@@ -6504,7 +8274,7 @@
           <p:cNvPr id="2" name="Title 1">
             <a:extLst>
               <a:ext uri="{FF2B5EF4-FFF2-40B4-BE49-F238E27FC236}">
-                <a16:creationId xmlns:a16="http://schemas.microsoft.com/office/drawing/2014/main" id="{454AA315-43F4-8A94-5710-7E016D037C2C}"/>
+                <a16:creationId xmlns:a16="http://schemas.microsoft.com/office/drawing/2014/main" id="{07E2C3FC-F2B9-7298-40F0-30300DECA8DD}"/>
               </a:ext>
             </a:extLst>
           </p:cNvPr>
@@ -6522,7 +8292,7 @@
           <a:p>
             <a:r>
               <a:rPr lang="en-DE" dirty="0"/>
-              <a:t>Bootstrapping and Sampling</a:t>
+              <a:t>Limited Utility of DP</a:t>
             </a:r>
           </a:p>
         </p:txBody>
@@ -6532,7 +8302,7 @@
           <p:cNvPr id="3" name="Content Placeholder 2">
             <a:extLst>
               <a:ext uri="{FF2B5EF4-FFF2-40B4-BE49-F238E27FC236}">
-                <a16:creationId xmlns:a16="http://schemas.microsoft.com/office/drawing/2014/main" id="{D43A814A-B09E-D7AD-778F-9A87D4268A57}"/>
+                <a16:creationId xmlns:a16="http://schemas.microsoft.com/office/drawing/2014/main" id="{579E4169-E0E3-4AF2-B882-6FE60E1CB1C6}"/>
               </a:ext>
             </a:extLst>
           </p:cNvPr>
@@ -6543,15 +8313,10 @@
             <p:ph idx="1"/>
           </p:nvPr>
         </p:nvSpPr>
-        <p:spPr>
-          <a:xfrm>
-            <a:off x="838200" y="1825625"/>
-            <a:ext cx="10515600" cy="818595"/>
-          </a:xfrm>
-        </p:spPr>
+        <p:spPr/>
         <p:txBody>
           <a:bodyPr>
-            <a:normAutofit fontScale="62500" lnSpcReduction="20000"/>
+            <a:normAutofit fontScale="92500" lnSpcReduction="20000"/>
           </a:bodyPr>
           <a:lstStyle/>
           <a:p>
@@ -6559,39 +8324,79 @@
               <a:buNone/>
             </a:pPr>
             <a:r>
-              <a:rPr lang="en-GB" b="1" dirty="0"/>
-              <a:t>b</a:t>
-            </a:r>
-            <a:r>
-              <a:rPr lang="en-DE" b="1" dirty="0"/>
-              <a:t>ootstrapping</a:t>
-            </a:r>
-            <a:r>
-              <a:rPr lang="en-DE" dirty="0"/>
-              <a:t>: </a:t>
-            </a:r>
-            <a:r>
               <a:rPr lang="en-GB" dirty="0"/>
-              <a:t>update estimates of state values based on estimates of values of successor states </a:t>
-            </a:r>
-            <a:endParaRPr lang="en-DE" dirty="0"/>
+              <a:t>requires full model of environment</a:t>
+            </a:r>
           </a:p>
           <a:p>
             <a:pPr marL="0" indent="0">
               <a:buNone/>
             </a:pPr>
-            <a:r>
-              <a:rPr lang="en-GB" b="1" dirty="0"/>
-              <a:t>s</a:t>
-            </a:r>
-            <a:r>
-              <a:rPr lang="en-DE" b="1" dirty="0"/>
-              <a:t>ampling</a:t>
+            <a:endParaRPr lang="en-GB" dirty="0"/>
+          </a:p>
+          <a:p>
+            <a:pPr marL="0" indent="0">
+              <a:buNone/>
+            </a:pPr>
+            <a:r>
+              <a:rPr lang="en-GB" dirty="0"/>
+              <a:t>c</a:t>
             </a:r>
             <a:r>
               <a:rPr lang="en-DE" dirty="0"/>
-              <a:t>: experience of sample sequences (no need for complete knowledge of environment)</a:t>
-            </a:r>
+              <a:t>omputationally expensive</a:t>
+            </a:r>
+          </a:p>
+          <a:p>
+            <a:r>
+              <a:rPr lang="en-DE" dirty="0"/>
+              <a:t>expected update operation (based on values of all possible successor states and their probability)</a:t>
+            </a:r>
+          </a:p>
+          <a:p>
+            <a:r>
+              <a:rPr lang="en-DE" dirty="0"/>
+              <a:t>for each state (in potentially huge state space)</a:t>
+            </a:r>
+          </a:p>
+          <a:p>
+            <a:pPr marL="0" indent="0">
+              <a:buNone/>
+            </a:pPr>
+            <a:r>
+              <a:rPr lang="en-DE" dirty="0"/>
+              <a:t>(asynchronous DP at least avoids systematic sweeps over entire state space)</a:t>
+            </a:r>
+          </a:p>
+          <a:p>
+            <a:pPr marL="0" indent="0">
+              <a:buNone/>
+            </a:pPr>
+            <a:endParaRPr lang="en-DE" dirty="0"/>
+          </a:p>
+          <a:p>
+            <a:pPr marL="0" indent="0">
+              <a:buNone/>
+            </a:pPr>
+            <a:r>
+              <a:rPr lang="en-DE" dirty="0">
+                <a:sym typeface="Wingdings" pitchFamily="2" charset="2"/>
+              </a:rPr>
+              <a:t> </a:t>
+            </a:r>
+            <a:r>
+              <a:rPr lang="en-GB" dirty="0">
+                <a:sym typeface="Wingdings" pitchFamily="2" charset="2"/>
+              </a:rPr>
+              <a:t>n</a:t>
+            </a:r>
+            <a:r>
+              <a:rPr lang="en-DE" dirty="0">
+                <a:sym typeface="Wingdings" pitchFamily="2" charset="2"/>
+              </a:rPr>
+              <a:t>eed for more efficient methods achieving the same effect as DP, without (perfect) model of environment</a:t>
+            </a:r>
+            <a:endParaRPr lang="en-DE" dirty="0"/>
           </a:p>
         </p:txBody>
       </p:sp>
@@ -6600,7 +8405,7 @@
           <p:cNvPr id="4" name="Slide Number Placeholder 3">
             <a:extLst>
               <a:ext uri="{FF2B5EF4-FFF2-40B4-BE49-F238E27FC236}">
-                <a16:creationId xmlns:a16="http://schemas.microsoft.com/office/drawing/2014/main" id="{28ACD391-3E92-5154-E47D-1A6B248D2D7B}"/>
+                <a16:creationId xmlns:a16="http://schemas.microsoft.com/office/drawing/2014/main" id="{9AEAF159-1FA2-BE72-E5F7-780EA6F026EC}"/>
               </a:ext>
             </a:extLst>
           </p:cNvPr>
@@ -6624,410 +8429,10 @@
           </a:p>
         </p:txBody>
       </p:sp>
-      <p:pic>
-        <p:nvPicPr>
-          <p:cNvPr id="5" name="Picture 4" descr="A picture containing hanging, air, wire, flying&#10;&#10;Description automatically generated">
-            <a:extLst>
-              <a:ext uri="{FF2B5EF4-FFF2-40B4-BE49-F238E27FC236}">
-                <a16:creationId xmlns:a16="http://schemas.microsoft.com/office/drawing/2014/main" id="{470E8653-E80C-691E-2A46-1B1FBDBB0127}"/>
-              </a:ext>
-            </a:extLst>
-          </p:cNvPr>
-          <p:cNvPicPr>
-            <a:picLocks noChangeAspect="1"/>
-          </p:cNvPicPr>
-          <p:nvPr/>
-        </p:nvPicPr>
-        <p:blipFill>
-          <a:blip r:embed="rId2"/>
-          <a:stretch>
-            <a:fillRect/>
-          </a:stretch>
-        </p:blipFill>
-        <p:spPr>
-          <a:xfrm>
-            <a:off x="505350" y="3322897"/>
-            <a:ext cx="3333573" cy="2079625"/>
-          </a:xfrm>
-          <a:prstGeom prst="rect">
-            <a:avLst/>
-          </a:prstGeom>
-        </p:spPr>
-      </p:pic>
-      <p:pic>
-        <p:nvPicPr>
-          <p:cNvPr id="6" name="Picture 5" descr="A picture containing hanging, colored, air, flying&#10;&#10;Description automatically generated">
-            <a:extLst>
-              <a:ext uri="{FF2B5EF4-FFF2-40B4-BE49-F238E27FC236}">
-                <a16:creationId xmlns:a16="http://schemas.microsoft.com/office/drawing/2014/main" id="{F4C08FFA-90B4-91B8-ACEC-A9659FAAD534}"/>
-              </a:ext>
-            </a:extLst>
-          </p:cNvPr>
-          <p:cNvPicPr>
-            <a:picLocks noChangeAspect="1"/>
-          </p:cNvPicPr>
-          <p:nvPr/>
-        </p:nvPicPr>
-        <p:blipFill>
-          <a:blip r:embed="rId3"/>
-          <a:stretch>
-            <a:fillRect/>
-          </a:stretch>
-        </p:blipFill>
-        <p:spPr>
-          <a:xfrm>
-            <a:off x="7977823" y="3322897"/>
-            <a:ext cx="3708827" cy="2079921"/>
-          </a:xfrm>
-          <a:prstGeom prst="rect">
-            <a:avLst/>
-          </a:prstGeom>
-        </p:spPr>
-      </p:pic>
-      <p:pic>
-        <p:nvPicPr>
-          <p:cNvPr id="7" name="Picture 6" descr="A picture containing hanging, air, flying, colored&#10;&#10;Description automatically generated">
-            <a:extLst>
-              <a:ext uri="{FF2B5EF4-FFF2-40B4-BE49-F238E27FC236}">
-                <a16:creationId xmlns:a16="http://schemas.microsoft.com/office/drawing/2014/main" id="{18F0F24E-CA05-E49B-09A2-35A78D05FEF9}"/>
-              </a:ext>
-            </a:extLst>
-          </p:cNvPr>
-          <p:cNvPicPr>
-            <a:picLocks noChangeAspect="1"/>
-          </p:cNvPicPr>
-          <p:nvPr/>
-        </p:nvPicPr>
-        <p:blipFill>
-          <a:blip r:embed="rId4"/>
-          <a:stretch>
-            <a:fillRect/>
-          </a:stretch>
-        </p:blipFill>
-        <p:spPr>
-          <a:xfrm>
-            <a:off x="4167244" y="3322897"/>
-            <a:ext cx="3482257" cy="2079625"/>
-          </a:xfrm>
-          <a:prstGeom prst="rect">
-            <a:avLst/>
-          </a:prstGeom>
-        </p:spPr>
-      </p:pic>
-      <p:sp>
-        <p:nvSpPr>
-          <p:cNvPr id="8" name="TextBox 7">
-            <a:extLst>
-              <a:ext uri="{FF2B5EF4-FFF2-40B4-BE49-F238E27FC236}">
-                <a16:creationId xmlns:a16="http://schemas.microsoft.com/office/drawing/2014/main" id="{4EBCB5B3-F3E8-8EAA-728C-FE8F49BE4FBD}"/>
-              </a:ext>
-            </a:extLst>
-          </p:cNvPr>
-          <p:cNvSpPr txBox="1"/>
-          <p:nvPr/>
-        </p:nvSpPr>
-        <p:spPr>
-          <a:xfrm>
-            <a:off x="838200" y="2784735"/>
-            <a:ext cx="2316211" cy="369332"/>
-          </a:xfrm>
-          <a:prstGeom prst="rect">
-            <a:avLst/>
-          </a:prstGeom>
-          <a:noFill/>
-        </p:spPr>
-        <p:txBody>
-          <a:bodyPr wrap="none" rtlCol="0">
-            <a:spAutoFit/>
-          </a:bodyPr>
-          <a:lstStyle/>
-          <a:p>
-            <a:r>
-              <a:rPr lang="en-DE" dirty="0"/>
-              <a:t>Dynamic Programming</a:t>
-            </a:r>
-          </a:p>
-        </p:txBody>
-      </p:sp>
-      <p:sp>
-        <p:nvSpPr>
-          <p:cNvPr id="9" name="TextBox 8">
-            <a:extLst>
-              <a:ext uri="{FF2B5EF4-FFF2-40B4-BE49-F238E27FC236}">
-                <a16:creationId xmlns:a16="http://schemas.microsoft.com/office/drawing/2014/main" id="{FF39FFDF-6D09-9D42-9283-CB36BF014035}"/>
-              </a:ext>
-            </a:extLst>
-          </p:cNvPr>
-          <p:cNvSpPr txBox="1"/>
-          <p:nvPr/>
-        </p:nvSpPr>
-        <p:spPr>
-          <a:xfrm>
-            <a:off x="4328692" y="2784735"/>
-            <a:ext cx="3394455" cy="369332"/>
-          </a:xfrm>
-          <a:prstGeom prst="rect">
-            <a:avLst/>
-          </a:prstGeom>
-          <a:noFill/>
-        </p:spPr>
-        <p:txBody>
-          <a:bodyPr wrap="none" rtlCol="0">
-            <a:spAutoFit/>
-          </a:bodyPr>
-          <a:lstStyle/>
-          <a:p>
-            <a:r>
-              <a:rPr lang="en-DE" dirty="0"/>
-              <a:t>Temporal Difference (TD) Learning</a:t>
-            </a:r>
-          </a:p>
-        </p:txBody>
-      </p:sp>
-      <p:sp>
-        <p:nvSpPr>
-          <p:cNvPr id="10" name="TextBox 9">
-            <a:extLst>
-              <a:ext uri="{FF2B5EF4-FFF2-40B4-BE49-F238E27FC236}">
-                <a16:creationId xmlns:a16="http://schemas.microsoft.com/office/drawing/2014/main" id="{3F169AA0-E1A1-10DC-52BB-EF34F1FFCECB}"/>
-              </a:ext>
-            </a:extLst>
-          </p:cNvPr>
-          <p:cNvSpPr txBox="1"/>
-          <p:nvPr/>
-        </p:nvSpPr>
-        <p:spPr>
-          <a:xfrm>
-            <a:off x="8897429" y="2784735"/>
-            <a:ext cx="1869614" cy="369332"/>
-          </a:xfrm>
-          <a:prstGeom prst="rect">
-            <a:avLst/>
-          </a:prstGeom>
-          <a:noFill/>
-        </p:spPr>
-        <p:txBody>
-          <a:bodyPr wrap="none" rtlCol="0">
-            <a:spAutoFit/>
-          </a:bodyPr>
-          <a:lstStyle/>
-          <a:p>
-            <a:r>
-              <a:rPr lang="en-DE" dirty="0"/>
-              <a:t>Monte Carlo (MC)</a:t>
-            </a:r>
-          </a:p>
-        </p:txBody>
-      </p:sp>
-      <p:sp>
-        <p:nvSpPr>
-          <p:cNvPr id="11" name="TextBox 10">
-            <a:extLst>
-              <a:ext uri="{FF2B5EF4-FFF2-40B4-BE49-F238E27FC236}">
-                <a16:creationId xmlns:a16="http://schemas.microsoft.com/office/drawing/2014/main" id="{3918091D-23DA-8F89-5D7B-666CC7AB8BBB}"/>
-              </a:ext>
-            </a:extLst>
-          </p:cNvPr>
-          <p:cNvSpPr txBox="1"/>
-          <p:nvPr/>
-        </p:nvSpPr>
-        <p:spPr>
-          <a:xfrm>
-            <a:off x="505350" y="5574694"/>
-            <a:ext cx="3661894" cy="923330"/>
-          </a:xfrm>
-          <a:prstGeom prst="rect">
-            <a:avLst/>
-          </a:prstGeom>
-          <a:noFill/>
-        </p:spPr>
-        <p:txBody>
-          <a:bodyPr wrap="square" rtlCol="0">
-            <a:spAutoFit/>
-          </a:bodyPr>
-          <a:lstStyle/>
-          <a:p>
-            <a:pPr marL="285750" indent="-285750">
-              <a:buFont typeface="Arial" panose="020B0604020202020204" pitchFamily="34" charset="0"/>
-              <a:buChar char="•"/>
-            </a:pPr>
-            <a:r>
-              <a:rPr lang="en-GB" dirty="0"/>
-              <a:t>b</a:t>
-            </a:r>
-            <a:r>
-              <a:rPr lang="en-DE" dirty="0"/>
-              <a:t>ootstrapping</a:t>
-            </a:r>
-          </a:p>
-          <a:p>
-            <a:pPr marL="285750" indent="-285750">
-              <a:buFont typeface="Arial" panose="020B0604020202020204" pitchFamily="34" charset="0"/>
-              <a:buChar char="•"/>
-            </a:pPr>
-            <a:r>
-              <a:rPr lang="en-DE" dirty="0"/>
-              <a:t>no sampling </a:t>
-            </a:r>
-            <a:r>
-              <a:rPr lang="en-GB" dirty="0">
-                <a:sym typeface="Wingdings" pitchFamily="2" charset="2"/>
-              </a:rPr>
-              <a:t> </a:t>
-            </a:r>
-            <a:r>
-              <a:rPr lang="en-GB" dirty="0"/>
-              <a:t>model-based (transition probabilities needed)</a:t>
-            </a:r>
-          </a:p>
-        </p:txBody>
-      </p:sp>
-      <p:sp>
-        <p:nvSpPr>
-          <p:cNvPr id="12" name="TextBox 11">
-            <a:extLst>
-              <a:ext uri="{FF2B5EF4-FFF2-40B4-BE49-F238E27FC236}">
-                <a16:creationId xmlns:a16="http://schemas.microsoft.com/office/drawing/2014/main" id="{291B1DDF-BDA8-7EE6-F0A8-3E5A37D16AB2}"/>
-              </a:ext>
-            </a:extLst>
-          </p:cNvPr>
-          <p:cNvSpPr txBox="1"/>
-          <p:nvPr/>
-        </p:nvSpPr>
-        <p:spPr>
-          <a:xfrm>
-            <a:off x="4255045" y="5570978"/>
-            <a:ext cx="3394455" cy="646331"/>
-          </a:xfrm>
-          <a:prstGeom prst="rect">
-            <a:avLst/>
-          </a:prstGeom>
-          <a:noFill/>
-        </p:spPr>
-        <p:txBody>
-          <a:bodyPr wrap="square" rtlCol="0">
-            <a:spAutoFit/>
-          </a:bodyPr>
-          <a:lstStyle/>
-          <a:p>
-            <a:pPr marL="285750" indent="-285750">
-              <a:buFont typeface="Arial" panose="020B0604020202020204" pitchFamily="34" charset="0"/>
-              <a:buChar char="•"/>
-            </a:pPr>
-            <a:r>
-              <a:rPr lang="en-GB" dirty="0"/>
-              <a:t>b</a:t>
-            </a:r>
-            <a:r>
-              <a:rPr lang="en-DE" dirty="0"/>
-              <a:t>ootstrapping</a:t>
-            </a:r>
-          </a:p>
-          <a:p>
-            <a:pPr marL="285750" indent="-285750">
-              <a:buFont typeface="Arial" panose="020B0604020202020204" pitchFamily="34" charset="0"/>
-              <a:buChar char="•"/>
-            </a:pPr>
-            <a:r>
-              <a:rPr lang="en-GB" dirty="0"/>
-              <a:t>s</a:t>
-            </a:r>
-            <a:r>
-              <a:rPr lang="en-DE" dirty="0"/>
-              <a:t>ampling </a:t>
-            </a:r>
-            <a:r>
-              <a:rPr lang="en-GB" dirty="0">
-                <a:sym typeface="Wingdings" pitchFamily="2" charset="2"/>
-              </a:rPr>
-              <a:t> </a:t>
-            </a:r>
-            <a:r>
-              <a:rPr lang="en-GB" dirty="0"/>
-              <a:t>m</a:t>
-            </a:r>
-            <a:r>
-              <a:rPr lang="en-DE" dirty="0"/>
-              <a:t>odel-free</a:t>
-            </a:r>
-          </a:p>
-        </p:txBody>
-      </p:sp>
-      <p:sp>
-        <p:nvSpPr>
-          <p:cNvPr id="13" name="TextBox 12">
-            <a:extLst>
-              <a:ext uri="{FF2B5EF4-FFF2-40B4-BE49-F238E27FC236}">
-                <a16:creationId xmlns:a16="http://schemas.microsoft.com/office/drawing/2014/main" id="{82EC628C-CA70-A417-59B5-1C0E80AAA251}"/>
-              </a:ext>
-            </a:extLst>
-          </p:cNvPr>
-          <p:cNvSpPr txBox="1"/>
-          <p:nvPr/>
-        </p:nvSpPr>
-        <p:spPr>
-          <a:xfrm>
-            <a:off x="7977823" y="5571473"/>
-            <a:ext cx="3708826" cy="646331"/>
-          </a:xfrm>
-          <a:prstGeom prst="rect">
-            <a:avLst/>
-          </a:prstGeom>
-          <a:noFill/>
-        </p:spPr>
-        <p:txBody>
-          <a:bodyPr wrap="square" rtlCol="0">
-            <a:spAutoFit/>
-          </a:bodyPr>
-          <a:lstStyle/>
-          <a:p>
-            <a:pPr marL="285750" indent="-285750">
-              <a:buFont typeface="Arial" panose="020B0604020202020204" pitchFamily="34" charset="0"/>
-              <a:buChar char="•"/>
-            </a:pPr>
-            <a:r>
-              <a:rPr lang="en-GB" dirty="0"/>
-              <a:t>no b</a:t>
-            </a:r>
-            <a:r>
-              <a:rPr lang="en-DE" dirty="0"/>
-              <a:t>ootstrapping</a:t>
-            </a:r>
-          </a:p>
-          <a:p>
-            <a:pPr marL="285750" indent="-285750">
-              <a:buFont typeface="Arial" panose="020B0604020202020204" pitchFamily="34" charset="0"/>
-              <a:buChar char="•"/>
-            </a:pPr>
-            <a:r>
-              <a:rPr lang="en-GB" dirty="0"/>
-              <a:t>s</a:t>
-            </a:r>
-            <a:r>
-              <a:rPr lang="en-DE" dirty="0"/>
-              <a:t>ampling </a:t>
-            </a:r>
-            <a:r>
-              <a:rPr lang="en-GB" dirty="0">
-                <a:sym typeface="Wingdings" pitchFamily="2" charset="2"/>
-              </a:rPr>
-              <a:t> </a:t>
-            </a:r>
-            <a:r>
-              <a:rPr lang="en-GB" dirty="0"/>
-              <a:t>m</a:t>
-            </a:r>
-            <a:r>
-              <a:rPr lang="en-DE" dirty="0"/>
-              <a:t>odel-free</a:t>
-            </a:r>
-          </a:p>
-        </p:txBody>
-      </p:sp>
     </p:spTree>
     <p:extLst>
       <p:ext uri="{BB962C8B-B14F-4D97-AF65-F5344CB8AC3E}">
-        <p14:creationId xmlns:p14="http://schemas.microsoft.com/office/powerpoint/2010/main" val="1276916456"/>
+        <p14:creationId xmlns:p14="http://schemas.microsoft.com/office/powerpoint/2010/main" val="2226179452"/>
       </p:ext>
     </p:extLst>
   </p:cSld>
@@ -7056,10 +8461,10 @@
       </p:grpSpPr>
       <p:sp>
         <p:nvSpPr>
-          <p:cNvPr id="5" name="Titel 4">
-            <a:extLst>
-              <a:ext uri="{FF2B5EF4-FFF2-40B4-BE49-F238E27FC236}">
-                <a16:creationId xmlns:a16="http://schemas.microsoft.com/office/drawing/2014/main" id="{EEED0B19-871D-4F1F-000C-D522BFBC8220}"/>
+          <p:cNvPr id="2" name="Title 1">
+            <a:extLst>
+              <a:ext uri="{FF2B5EF4-FFF2-40B4-BE49-F238E27FC236}">
+                <a16:creationId xmlns:a16="http://schemas.microsoft.com/office/drawing/2014/main" id="{454AA315-43F4-8A94-5710-7E016D037C2C}"/>
               </a:ext>
             </a:extLst>
           </p:cNvPr>
@@ -7076,18 +8481,86 @@
           <a:lstStyle/>
           <a:p>
             <a:r>
-              <a:rPr lang="de-DE" dirty="0"/>
-              <a:t>Model-Free Learning</a:t>
+              <a:rPr lang="en-DE" dirty="0"/>
+              <a:t>Bootstrapping and Sampling</a:t>
             </a:r>
           </a:p>
         </p:txBody>
       </p:sp>
       <p:sp>
         <p:nvSpPr>
-          <p:cNvPr id="4" name="Foliennummernplatzhalter 3">
-            <a:extLst>
-              <a:ext uri="{FF2B5EF4-FFF2-40B4-BE49-F238E27FC236}">
-                <a16:creationId xmlns:a16="http://schemas.microsoft.com/office/drawing/2014/main" id="{2A3ABEFD-2E15-2C89-0B3B-679A28E47CB8}"/>
+          <p:cNvPr id="3" name="Content Placeholder 2">
+            <a:extLst>
+              <a:ext uri="{FF2B5EF4-FFF2-40B4-BE49-F238E27FC236}">
+                <a16:creationId xmlns:a16="http://schemas.microsoft.com/office/drawing/2014/main" id="{D43A814A-B09E-D7AD-778F-9A87D4268A57}"/>
+              </a:ext>
+            </a:extLst>
+          </p:cNvPr>
+          <p:cNvSpPr>
+            <a:spLocks noGrp="1"/>
+          </p:cNvSpPr>
+          <p:nvPr>
+            <p:ph idx="1"/>
+          </p:nvPr>
+        </p:nvSpPr>
+        <p:spPr>
+          <a:xfrm>
+            <a:off x="838200" y="1825625"/>
+            <a:ext cx="10515600" cy="818595"/>
+          </a:xfrm>
+        </p:spPr>
+        <p:txBody>
+          <a:bodyPr>
+            <a:normAutofit fontScale="62500" lnSpcReduction="20000"/>
+          </a:bodyPr>
+          <a:lstStyle/>
+          <a:p>
+            <a:pPr marL="0" indent="0">
+              <a:buNone/>
+            </a:pPr>
+            <a:r>
+              <a:rPr lang="en-GB" b="1" dirty="0"/>
+              <a:t>b</a:t>
+            </a:r>
+            <a:r>
+              <a:rPr lang="en-DE" b="1" dirty="0"/>
+              <a:t>ootstrapping</a:t>
+            </a:r>
+            <a:r>
+              <a:rPr lang="en-DE" dirty="0"/>
+              <a:t>: </a:t>
+            </a:r>
+            <a:r>
+              <a:rPr lang="en-GB" dirty="0"/>
+              <a:t>update estimates of state values based on estimates of values of successor states </a:t>
+            </a:r>
+            <a:endParaRPr lang="en-DE" dirty="0"/>
+          </a:p>
+          <a:p>
+            <a:pPr marL="0" indent="0">
+              <a:buNone/>
+            </a:pPr>
+            <a:r>
+              <a:rPr lang="en-GB" b="1" dirty="0"/>
+              <a:t>s</a:t>
+            </a:r>
+            <a:r>
+              <a:rPr lang="en-DE" b="1" dirty="0"/>
+              <a:t>ampling</a:t>
+            </a:r>
+            <a:r>
+              <a:rPr lang="en-DE" dirty="0"/>
+              <a:t>: experience of sample sequences (no need for complete knowledge of environment)</a:t>
+            </a:r>
+          </a:p>
+        </p:txBody>
+      </p:sp>
+      <p:sp>
+        <p:nvSpPr>
+          <p:cNvPr id="4" name="Slide Number Placeholder 3">
+            <a:extLst>
+              <a:ext uri="{FF2B5EF4-FFF2-40B4-BE49-F238E27FC236}">
+                <a16:creationId xmlns:a16="http://schemas.microsoft.com/office/drawing/2014/main" id="{28ACD391-3E92-5154-E47D-1A6B248D2D7B}"/>
               </a:ext>
             </a:extLst>
           </p:cNvPr>
@@ -7103,9 +8576,496 @@
           <a:bodyPr/>
           <a:lstStyle/>
           <a:p>
+            <a:fld id="{C48B675A-2084-C34A-84F6-1B6A8516A5F3}" type="slidenum">
+              <a:rPr lang="en-DE" smtClean="0"/>
+              <a:t>16</a:t>
+            </a:fld>
+            <a:endParaRPr lang="en-DE"/>
+          </a:p>
+        </p:txBody>
+      </p:sp>
+      <p:pic>
+        <p:nvPicPr>
+          <p:cNvPr id="5" name="Picture 4" descr="A picture containing hanging, air, wire, flying&#10;&#10;Description automatically generated">
+            <a:extLst>
+              <a:ext uri="{FF2B5EF4-FFF2-40B4-BE49-F238E27FC236}">
+                <a16:creationId xmlns:a16="http://schemas.microsoft.com/office/drawing/2014/main" id="{470E8653-E80C-691E-2A46-1B1FBDBB0127}"/>
+              </a:ext>
+            </a:extLst>
+          </p:cNvPr>
+          <p:cNvPicPr>
+            <a:picLocks noChangeAspect="1"/>
+          </p:cNvPicPr>
+          <p:nvPr/>
+        </p:nvPicPr>
+        <p:blipFill>
+          <a:blip r:embed="rId2"/>
+          <a:stretch>
+            <a:fillRect/>
+          </a:stretch>
+        </p:blipFill>
+        <p:spPr>
+          <a:xfrm>
+            <a:off x="505350" y="3322897"/>
+            <a:ext cx="3333573" cy="2079625"/>
+          </a:xfrm>
+          <a:prstGeom prst="rect">
+            <a:avLst/>
+          </a:prstGeom>
+        </p:spPr>
+      </p:pic>
+      <p:pic>
+        <p:nvPicPr>
+          <p:cNvPr id="6" name="Picture 5" descr="A picture containing hanging, colored, air, flying&#10;&#10;Description automatically generated">
+            <a:extLst>
+              <a:ext uri="{FF2B5EF4-FFF2-40B4-BE49-F238E27FC236}">
+                <a16:creationId xmlns:a16="http://schemas.microsoft.com/office/drawing/2014/main" id="{F4C08FFA-90B4-91B8-ACEC-A9659FAAD534}"/>
+              </a:ext>
+            </a:extLst>
+          </p:cNvPr>
+          <p:cNvPicPr>
+            <a:picLocks noChangeAspect="1"/>
+          </p:cNvPicPr>
+          <p:nvPr/>
+        </p:nvPicPr>
+        <p:blipFill>
+          <a:blip r:embed="rId3"/>
+          <a:stretch>
+            <a:fillRect/>
+          </a:stretch>
+        </p:blipFill>
+        <p:spPr>
+          <a:xfrm>
+            <a:off x="7977823" y="3322897"/>
+            <a:ext cx="3708827" cy="2079921"/>
+          </a:xfrm>
+          <a:prstGeom prst="rect">
+            <a:avLst/>
+          </a:prstGeom>
+        </p:spPr>
+      </p:pic>
+      <p:pic>
+        <p:nvPicPr>
+          <p:cNvPr id="7" name="Picture 6" descr="A picture containing hanging, air, flying, colored&#10;&#10;Description automatically generated">
+            <a:extLst>
+              <a:ext uri="{FF2B5EF4-FFF2-40B4-BE49-F238E27FC236}">
+                <a16:creationId xmlns:a16="http://schemas.microsoft.com/office/drawing/2014/main" id="{18F0F24E-CA05-E49B-09A2-35A78D05FEF9}"/>
+              </a:ext>
+            </a:extLst>
+          </p:cNvPr>
+          <p:cNvPicPr>
+            <a:picLocks noChangeAspect="1"/>
+          </p:cNvPicPr>
+          <p:nvPr/>
+        </p:nvPicPr>
+        <p:blipFill>
+          <a:blip r:embed="rId4"/>
+          <a:stretch>
+            <a:fillRect/>
+          </a:stretch>
+        </p:blipFill>
+        <p:spPr>
+          <a:xfrm>
+            <a:off x="4167244" y="3322897"/>
+            <a:ext cx="3482257" cy="2079625"/>
+          </a:xfrm>
+          <a:prstGeom prst="rect">
+            <a:avLst/>
+          </a:prstGeom>
+        </p:spPr>
+      </p:pic>
+      <p:sp>
+        <p:nvSpPr>
+          <p:cNvPr id="8" name="TextBox 7">
+            <a:extLst>
+              <a:ext uri="{FF2B5EF4-FFF2-40B4-BE49-F238E27FC236}">
+                <a16:creationId xmlns:a16="http://schemas.microsoft.com/office/drawing/2014/main" id="{4EBCB5B3-F3E8-8EAA-728C-FE8F49BE4FBD}"/>
+              </a:ext>
+            </a:extLst>
+          </p:cNvPr>
+          <p:cNvSpPr txBox="1"/>
+          <p:nvPr/>
+        </p:nvSpPr>
+        <p:spPr>
+          <a:xfrm>
+            <a:off x="838200" y="2784735"/>
+            <a:ext cx="2316211" cy="369332"/>
+          </a:xfrm>
+          <a:prstGeom prst="rect">
+            <a:avLst/>
+          </a:prstGeom>
+          <a:noFill/>
+        </p:spPr>
+        <p:txBody>
+          <a:bodyPr wrap="none" rtlCol="0">
+            <a:spAutoFit/>
+          </a:bodyPr>
+          <a:lstStyle/>
+          <a:p>
+            <a:r>
+              <a:rPr lang="en-DE" dirty="0"/>
+              <a:t>Dynamic Programming</a:t>
+            </a:r>
+          </a:p>
+        </p:txBody>
+      </p:sp>
+      <p:sp>
+        <p:nvSpPr>
+          <p:cNvPr id="9" name="TextBox 8">
+            <a:extLst>
+              <a:ext uri="{FF2B5EF4-FFF2-40B4-BE49-F238E27FC236}">
+                <a16:creationId xmlns:a16="http://schemas.microsoft.com/office/drawing/2014/main" id="{FF39FFDF-6D09-9D42-9283-CB36BF014035}"/>
+              </a:ext>
+            </a:extLst>
+          </p:cNvPr>
+          <p:cNvSpPr txBox="1"/>
+          <p:nvPr/>
+        </p:nvSpPr>
+        <p:spPr>
+          <a:xfrm>
+            <a:off x="4328692" y="2784735"/>
+            <a:ext cx="3394455" cy="369332"/>
+          </a:xfrm>
+          <a:prstGeom prst="rect">
+            <a:avLst/>
+          </a:prstGeom>
+          <a:noFill/>
+        </p:spPr>
+        <p:txBody>
+          <a:bodyPr wrap="none" rtlCol="0">
+            <a:spAutoFit/>
+          </a:bodyPr>
+          <a:lstStyle/>
+          <a:p>
+            <a:r>
+              <a:rPr lang="en-DE" dirty="0"/>
+              <a:t>Temporal Difference (TD) Learning</a:t>
+            </a:r>
+          </a:p>
+        </p:txBody>
+      </p:sp>
+      <p:sp>
+        <p:nvSpPr>
+          <p:cNvPr id="10" name="TextBox 9">
+            <a:extLst>
+              <a:ext uri="{FF2B5EF4-FFF2-40B4-BE49-F238E27FC236}">
+                <a16:creationId xmlns:a16="http://schemas.microsoft.com/office/drawing/2014/main" id="{3F169AA0-E1A1-10DC-52BB-EF34F1FFCECB}"/>
+              </a:ext>
+            </a:extLst>
+          </p:cNvPr>
+          <p:cNvSpPr txBox="1"/>
+          <p:nvPr/>
+        </p:nvSpPr>
+        <p:spPr>
+          <a:xfrm>
+            <a:off x="8897429" y="2784735"/>
+            <a:ext cx="1869614" cy="369332"/>
+          </a:xfrm>
+          <a:prstGeom prst="rect">
+            <a:avLst/>
+          </a:prstGeom>
+          <a:noFill/>
+        </p:spPr>
+        <p:txBody>
+          <a:bodyPr wrap="none" rtlCol="0">
+            <a:spAutoFit/>
+          </a:bodyPr>
+          <a:lstStyle/>
+          <a:p>
+            <a:r>
+              <a:rPr lang="en-DE" dirty="0"/>
+              <a:t>Monte Carlo (MC)</a:t>
+            </a:r>
+          </a:p>
+        </p:txBody>
+      </p:sp>
+      <p:sp>
+        <p:nvSpPr>
+          <p:cNvPr id="11" name="TextBox 10">
+            <a:extLst>
+              <a:ext uri="{FF2B5EF4-FFF2-40B4-BE49-F238E27FC236}">
+                <a16:creationId xmlns:a16="http://schemas.microsoft.com/office/drawing/2014/main" id="{3918091D-23DA-8F89-5D7B-666CC7AB8BBB}"/>
+              </a:ext>
+            </a:extLst>
+          </p:cNvPr>
+          <p:cNvSpPr txBox="1"/>
+          <p:nvPr/>
+        </p:nvSpPr>
+        <p:spPr>
+          <a:xfrm>
+            <a:off x="505350" y="5574694"/>
+            <a:ext cx="3661894" cy="923330"/>
+          </a:xfrm>
+          <a:prstGeom prst="rect">
+            <a:avLst/>
+          </a:prstGeom>
+          <a:noFill/>
+        </p:spPr>
+        <p:txBody>
+          <a:bodyPr wrap="square" rtlCol="0">
+            <a:spAutoFit/>
+          </a:bodyPr>
+          <a:lstStyle/>
+          <a:p>
+            <a:pPr marL="285750" indent="-285750">
+              <a:buFont typeface="Arial" panose="020B0604020202020204" pitchFamily="34" charset="0"/>
+              <a:buChar char="•"/>
+            </a:pPr>
+            <a:r>
+              <a:rPr lang="en-GB" dirty="0"/>
+              <a:t>b</a:t>
+            </a:r>
+            <a:r>
+              <a:rPr lang="en-DE" dirty="0"/>
+              <a:t>ootstrapping</a:t>
+            </a:r>
+          </a:p>
+          <a:p>
+            <a:pPr marL="285750" indent="-285750">
+              <a:buFont typeface="Arial" panose="020B0604020202020204" pitchFamily="34" charset="0"/>
+              <a:buChar char="•"/>
+            </a:pPr>
+            <a:r>
+              <a:rPr lang="en-DE" dirty="0"/>
+              <a:t>no sampling </a:t>
+            </a:r>
+            <a:r>
+              <a:rPr lang="en-GB" dirty="0">
+                <a:sym typeface="Wingdings" pitchFamily="2" charset="2"/>
+              </a:rPr>
+              <a:t> </a:t>
+            </a:r>
+            <a:r>
+              <a:rPr lang="en-GB" dirty="0"/>
+              <a:t>model-based (transition probabilities needed)</a:t>
+            </a:r>
+          </a:p>
+        </p:txBody>
+      </p:sp>
+      <p:sp>
+        <p:nvSpPr>
+          <p:cNvPr id="12" name="TextBox 11">
+            <a:extLst>
+              <a:ext uri="{FF2B5EF4-FFF2-40B4-BE49-F238E27FC236}">
+                <a16:creationId xmlns:a16="http://schemas.microsoft.com/office/drawing/2014/main" id="{291B1DDF-BDA8-7EE6-F0A8-3E5A37D16AB2}"/>
+              </a:ext>
+            </a:extLst>
+          </p:cNvPr>
+          <p:cNvSpPr txBox="1"/>
+          <p:nvPr/>
+        </p:nvSpPr>
+        <p:spPr>
+          <a:xfrm>
+            <a:off x="4255045" y="5570978"/>
+            <a:ext cx="3394455" cy="646331"/>
+          </a:xfrm>
+          <a:prstGeom prst="rect">
+            <a:avLst/>
+          </a:prstGeom>
+          <a:noFill/>
+        </p:spPr>
+        <p:txBody>
+          <a:bodyPr wrap="square" rtlCol="0">
+            <a:spAutoFit/>
+          </a:bodyPr>
+          <a:lstStyle/>
+          <a:p>
+            <a:pPr marL="285750" indent="-285750">
+              <a:buFont typeface="Arial" panose="020B0604020202020204" pitchFamily="34" charset="0"/>
+              <a:buChar char="•"/>
+            </a:pPr>
+            <a:r>
+              <a:rPr lang="en-GB" dirty="0"/>
+              <a:t>b</a:t>
+            </a:r>
+            <a:r>
+              <a:rPr lang="en-DE" dirty="0"/>
+              <a:t>ootstrapping</a:t>
+            </a:r>
+          </a:p>
+          <a:p>
+            <a:pPr marL="285750" indent="-285750">
+              <a:buFont typeface="Arial" panose="020B0604020202020204" pitchFamily="34" charset="0"/>
+              <a:buChar char="•"/>
+            </a:pPr>
+            <a:r>
+              <a:rPr lang="en-GB" dirty="0"/>
+              <a:t>s</a:t>
+            </a:r>
+            <a:r>
+              <a:rPr lang="en-DE" dirty="0"/>
+              <a:t>ampling </a:t>
+            </a:r>
+            <a:r>
+              <a:rPr lang="en-GB" dirty="0">
+                <a:sym typeface="Wingdings" pitchFamily="2" charset="2"/>
+              </a:rPr>
+              <a:t> </a:t>
+            </a:r>
+            <a:r>
+              <a:rPr lang="en-GB" dirty="0"/>
+              <a:t>m</a:t>
+            </a:r>
+            <a:r>
+              <a:rPr lang="en-DE" dirty="0"/>
+              <a:t>odel-free</a:t>
+            </a:r>
+          </a:p>
+        </p:txBody>
+      </p:sp>
+      <p:sp>
+        <p:nvSpPr>
+          <p:cNvPr id="13" name="TextBox 12">
+            <a:extLst>
+              <a:ext uri="{FF2B5EF4-FFF2-40B4-BE49-F238E27FC236}">
+                <a16:creationId xmlns:a16="http://schemas.microsoft.com/office/drawing/2014/main" id="{82EC628C-CA70-A417-59B5-1C0E80AAA251}"/>
+              </a:ext>
+            </a:extLst>
+          </p:cNvPr>
+          <p:cNvSpPr txBox="1"/>
+          <p:nvPr/>
+        </p:nvSpPr>
+        <p:spPr>
+          <a:xfrm>
+            <a:off x="7977823" y="5571473"/>
+            <a:ext cx="3708826" cy="646331"/>
+          </a:xfrm>
+          <a:prstGeom prst="rect">
+            <a:avLst/>
+          </a:prstGeom>
+          <a:noFill/>
+        </p:spPr>
+        <p:txBody>
+          <a:bodyPr wrap="square" rtlCol="0">
+            <a:spAutoFit/>
+          </a:bodyPr>
+          <a:lstStyle/>
+          <a:p>
+            <a:pPr marL="285750" indent="-285750">
+              <a:buFont typeface="Arial" panose="020B0604020202020204" pitchFamily="34" charset="0"/>
+              <a:buChar char="•"/>
+            </a:pPr>
+            <a:r>
+              <a:rPr lang="en-GB" dirty="0"/>
+              <a:t>no b</a:t>
+            </a:r>
+            <a:r>
+              <a:rPr lang="en-DE" dirty="0"/>
+              <a:t>ootstrapping</a:t>
+            </a:r>
+          </a:p>
+          <a:p>
+            <a:pPr marL="285750" indent="-285750">
+              <a:buFont typeface="Arial" panose="020B0604020202020204" pitchFamily="34" charset="0"/>
+              <a:buChar char="•"/>
+            </a:pPr>
+            <a:r>
+              <a:rPr lang="en-GB" dirty="0"/>
+              <a:t>s</a:t>
+            </a:r>
+            <a:r>
+              <a:rPr lang="en-DE" dirty="0"/>
+              <a:t>ampling </a:t>
+            </a:r>
+            <a:r>
+              <a:rPr lang="en-GB" dirty="0">
+                <a:sym typeface="Wingdings" pitchFamily="2" charset="2"/>
+              </a:rPr>
+              <a:t> </a:t>
+            </a:r>
+            <a:r>
+              <a:rPr lang="en-GB" dirty="0"/>
+              <a:t>m</a:t>
+            </a:r>
+            <a:r>
+              <a:rPr lang="en-DE" dirty="0"/>
+              <a:t>odel-free</a:t>
+            </a:r>
+          </a:p>
+        </p:txBody>
+      </p:sp>
+    </p:spTree>
+    <p:extLst>
+      <p:ext uri="{BB962C8B-B14F-4D97-AF65-F5344CB8AC3E}">
+        <p14:creationId xmlns:p14="http://schemas.microsoft.com/office/powerpoint/2010/main" val="1276916456"/>
+      </p:ext>
+    </p:extLst>
+  </p:cSld>
+  <p:clrMapOvr>
+    <a:masterClrMapping/>
+  </p:clrMapOvr>
+</p:sld>
+</file>
+
+<file path=ppt/slides/slide17.xml><?xml version="1.0" encoding="utf-8"?>
+<p:sld xmlns:a="http://schemas.openxmlformats.org/drawingml/2006/main" xmlns:r="http://schemas.openxmlformats.org/officeDocument/2006/relationships" xmlns:p="http://schemas.openxmlformats.org/presentationml/2006/main">
+  <p:cSld>
+    <p:spTree>
+      <p:nvGrpSpPr>
+        <p:cNvPr id="1" name=""/>
+        <p:cNvGrpSpPr/>
+        <p:nvPr/>
+      </p:nvGrpSpPr>
+      <p:grpSpPr>
+        <a:xfrm>
+          <a:off x="0" y="0"/>
+          <a:ext cx="0" cy="0"/>
+          <a:chOff x="0" y="0"/>
+          <a:chExt cx="0" cy="0"/>
+        </a:xfrm>
+      </p:grpSpPr>
+      <p:sp>
+        <p:nvSpPr>
+          <p:cNvPr id="5" name="Titel 4">
+            <a:extLst>
+              <a:ext uri="{FF2B5EF4-FFF2-40B4-BE49-F238E27FC236}">
+                <a16:creationId xmlns:a16="http://schemas.microsoft.com/office/drawing/2014/main" id="{EEED0B19-871D-4F1F-000C-D522BFBC8220}"/>
+              </a:ext>
+            </a:extLst>
+          </p:cNvPr>
+          <p:cNvSpPr>
+            <a:spLocks noGrp="1"/>
+          </p:cNvSpPr>
+          <p:nvPr>
+            <p:ph type="title"/>
+          </p:nvPr>
+        </p:nvSpPr>
+        <p:spPr/>
+        <p:txBody>
+          <a:bodyPr/>
+          <a:lstStyle/>
+          <a:p>
+            <a:r>
+              <a:rPr lang="de-DE" dirty="0"/>
+              <a:t>Model-Free Learning</a:t>
+            </a:r>
+          </a:p>
+        </p:txBody>
+      </p:sp>
+      <p:sp>
+        <p:nvSpPr>
+          <p:cNvPr id="4" name="Foliennummernplatzhalter 3">
+            <a:extLst>
+              <a:ext uri="{FF2B5EF4-FFF2-40B4-BE49-F238E27FC236}">
+                <a16:creationId xmlns:a16="http://schemas.microsoft.com/office/drawing/2014/main" id="{2A3ABEFD-2E15-2C89-0B3B-679A28E47CB8}"/>
+              </a:ext>
+            </a:extLst>
+          </p:cNvPr>
+          <p:cNvSpPr>
+            <a:spLocks noGrp="1"/>
+          </p:cNvSpPr>
+          <p:nvPr>
+            <p:ph type="sldNum" sz="quarter" idx="12"/>
+          </p:nvPr>
+        </p:nvSpPr>
+        <p:spPr/>
+        <p:txBody>
+          <a:bodyPr/>
+          <a:lstStyle/>
+          <a:p>
             <a:fld id="{08C366F5-AFAD-49CB-854A-9D9E238FCA13}" type="slidenum">
               <a:rPr lang="en-GB" smtClean="0"/>
-              <a:t>16</a:t>
+              <a:t>17</a:t>
             </a:fld>
             <a:endParaRPr lang="en-GB"/>
           </a:p>
@@ -7124,7 +9084,7 @@
 </p:sld>
 </file>
 
-<file path=ppt/slides/slide17.xml><?xml version="1.0" encoding="utf-8"?>
+<file path=ppt/slides/slide18.xml><?xml version="1.0" encoding="utf-8"?>
 <p:sld xmlns:a="http://schemas.openxmlformats.org/drawingml/2006/main" xmlns:r="http://schemas.openxmlformats.org/officeDocument/2006/relationships" xmlns:p="http://schemas.openxmlformats.org/presentationml/2006/main">
   <p:cSld>
     <p:spTree>
@@ -7843,7 +9803,7 @@
           <a:p>
             <a:fld id="{C48B675A-2084-C34A-84F6-1B6A8516A5F3}" type="slidenum">
               <a:rPr lang="en-DE" smtClean="0"/>
-              <a:t>17</a:t>
+              <a:t>18</a:t>
             </a:fld>
             <a:endParaRPr lang="en-DE"/>
           </a:p>
@@ -8019,7 +9979,7 @@
 </p:sld>
 </file>
 
-<file path=ppt/slides/slide18.xml><?xml version="1.0" encoding="utf-8"?>
+<file path=ppt/slides/slide19.xml><?xml version="1.0" encoding="utf-8"?>
 <p:sld xmlns:a="http://schemas.openxmlformats.org/drawingml/2006/main" xmlns:r="http://schemas.openxmlformats.org/officeDocument/2006/relationships" xmlns:p="http://schemas.openxmlformats.org/presentationml/2006/main">
   <p:cSld>
     <p:spTree>
@@ -8733,7 +10693,7 @@
           <a:p>
             <a:fld id="{C48B675A-2084-C34A-84F6-1B6A8516A5F3}" type="slidenum">
               <a:rPr lang="en-DE" smtClean="0"/>
-              <a:t>18</a:t>
+              <a:t>19</a:t>
             </a:fld>
             <a:endParaRPr lang="en-DE"/>
           </a:p>
@@ -8847,7 +10807,341 @@
 </p:sld>
 </file>
 
-<file path=ppt/slides/slide19.xml><?xml version="1.0" encoding="utf-8"?>
+<file path=ppt/slides/slide2.xml><?xml version="1.0" encoding="utf-8"?>
+<p:sld xmlns:a="http://schemas.openxmlformats.org/drawingml/2006/main" xmlns:r="http://schemas.openxmlformats.org/officeDocument/2006/relationships" xmlns:p="http://schemas.openxmlformats.org/presentationml/2006/main">
+  <p:cSld>
+    <p:spTree>
+      <p:nvGrpSpPr>
+        <p:cNvPr id="1" name=""/>
+        <p:cNvGrpSpPr/>
+        <p:nvPr/>
+      </p:nvGrpSpPr>
+      <p:grpSpPr>
+        <a:xfrm>
+          <a:off x="0" y="0"/>
+          <a:ext cx="0" cy="0"/>
+          <a:chOff x="0" y="0"/>
+          <a:chExt cx="0" cy="0"/>
+        </a:xfrm>
+      </p:grpSpPr>
+      <p:sp>
+        <p:nvSpPr>
+          <p:cNvPr id="2" name="Titel 1">
+            <a:extLst>
+              <a:ext uri="{FF2B5EF4-FFF2-40B4-BE49-F238E27FC236}">
+                <a16:creationId xmlns:a16="http://schemas.microsoft.com/office/drawing/2014/main" id="{BF3B7F27-7F08-C433-FAD6-D8184A2AF0C6}"/>
+              </a:ext>
+            </a:extLst>
+          </p:cNvPr>
+          <p:cNvSpPr>
+            <a:spLocks noGrp="1"/>
+          </p:cNvSpPr>
+          <p:nvPr>
+            <p:ph type="title"/>
+          </p:nvPr>
+        </p:nvSpPr>
+        <p:spPr/>
+        <p:txBody>
+          <a:bodyPr/>
+          <a:lstStyle/>
+          <a:p>
+            <a:r>
+              <a:rPr lang="de-DE" dirty="0" err="1"/>
+              <a:t>Tabular</a:t>
+            </a:r>
+            <a:r>
+              <a:rPr lang="de-DE" dirty="0"/>
+              <a:t> Methods</a:t>
+            </a:r>
+          </a:p>
+        </p:txBody>
+      </p:sp>
+      <p:sp>
+        <p:nvSpPr>
+          <p:cNvPr id="3" name="Inhaltsplatzhalter 2">
+            <a:extLst>
+              <a:ext uri="{FF2B5EF4-FFF2-40B4-BE49-F238E27FC236}">
+                <a16:creationId xmlns:a16="http://schemas.microsoft.com/office/drawing/2014/main" id="{E9869EEB-AEFC-29D2-4E7B-8F0465A45C79}"/>
+              </a:ext>
+            </a:extLst>
+          </p:cNvPr>
+          <p:cNvSpPr>
+            <a:spLocks noGrp="1"/>
+          </p:cNvSpPr>
+          <p:nvPr>
+            <p:ph idx="1"/>
+          </p:nvPr>
+        </p:nvSpPr>
+        <p:spPr/>
+        <p:txBody>
+          <a:bodyPr/>
+          <a:lstStyle/>
+          <a:p>
+            <a:r>
+              <a:rPr lang="de-DE" dirty="0" err="1"/>
+              <a:t>Mathematical</a:t>
+            </a:r>
+            <a:r>
+              <a:rPr lang="de-DE" dirty="0"/>
+              <a:t> </a:t>
+            </a:r>
+            <a:r>
+              <a:rPr lang="de-DE" dirty="0" err="1"/>
+              <a:t>setup</a:t>
+            </a:r>
+            <a:r>
+              <a:rPr lang="de-DE" dirty="0"/>
+              <a:t>: Markov </a:t>
+            </a:r>
+            <a:r>
+              <a:rPr lang="de-DE" dirty="0" err="1"/>
+              <a:t>decision</a:t>
+            </a:r>
+            <a:r>
+              <a:rPr lang="de-DE" dirty="0"/>
+              <a:t> </a:t>
+            </a:r>
+            <a:r>
+              <a:rPr lang="de-DE" dirty="0" err="1"/>
+              <a:t>processes</a:t>
+            </a:r>
+            <a:r>
+              <a:rPr lang="de-DE" dirty="0"/>
+              <a:t>, </a:t>
+            </a:r>
+            <a:r>
+              <a:rPr lang="de-DE" dirty="0" err="1"/>
+              <a:t>rewards</a:t>
+            </a:r>
+            <a:r>
+              <a:rPr lang="de-DE" dirty="0"/>
+              <a:t>, </a:t>
+            </a:r>
+            <a:r>
+              <a:rPr lang="de-DE" dirty="0" err="1"/>
+              <a:t>policies</a:t>
+            </a:r>
+            <a:r>
+              <a:rPr lang="de-DE" dirty="0"/>
+              <a:t>, </a:t>
+            </a:r>
+            <a:r>
+              <a:rPr lang="de-DE" dirty="0" err="1"/>
+              <a:t>state-value</a:t>
+            </a:r>
+            <a:r>
+              <a:rPr lang="de-DE" dirty="0"/>
+              <a:t> &amp; action-</a:t>
+            </a:r>
+            <a:r>
+              <a:rPr lang="de-DE" dirty="0" err="1"/>
+              <a:t>value</a:t>
+            </a:r>
+            <a:r>
+              <a:rPr lang="de-DE" dirty="0"/>
+              <a:t> </a:t>
+            </a:r>
+            <a:r>
+              <a:rPr lang="de-DE" dirty="0" err="1"/>
+              <a:t>functions</a:t>
+            </a:r>
+            <a:r>
+              <a:rPr lang="de-DE" dirty="0"/>
+              <a:t>, Bellman </a:t>
+            </a:r>
+            <a:r>
+              <a:rPr lang="de-DE" dirty="0" err="1"/>
+              <a:t>equations</a:t>
+            </a:r>
+            <a:endParaRPr lang="de-DE" dirty="0"/>
+          </a:p>
+          <a:p>
+            <a:pPr marL="0" indent="0">
+              <a:buNone/>
+            </a:pPr>
+            <a:endParaRPr lang="de-DE" dirty="0"/>
+          </a:p>
+          <a:p>
+            <a:r>
+              <a:rPr lang="de-DE" dirty="0" err="1"/>
+              <a:t>Planning</a:t>
+            </a:r>
+            <a:r>
+              <a:rPr lang="de-DE" dirty="0"/>
+              <a:t>: </a:t>
+            </a:r>
+            <a:r>
+              <a:rPr lang="de-DE" dirty="0" err="1"/>
+              <a:t>policy</a:t>
+            </a:r>
+            <a:r>
+              <a:rPr lang="de-DE" dirty="0"/>
+              <a:t> </a:t>
+            </a:r>
+            <a:r>
+              <a:rPr lang="de-DE" dirty="0" err="1"/>
+              <a:t>evaluation</a:t>
+            </a:r>
+            <a:r>
+              <a:rPr lang="de-DE" dirty="0"/>
+              <a:t> &amp; </a:t>
+            </a:r>
+            <a:r>
+              <a:rPr lang="de-DE" dirty="0" err="1"/>
+              <a:t>improvement</a:t>
+            </a:r>
+            <a:r>
+              <a:rPr lang="de-DE" dirty="0"/>
+              <a:t>, </a:t>
+            </a:r>
+            <a:r>
+              <a:rPr lang="de-DE" dirty="0" err="1"/>
+              <a:t>value</a:t>
+            </a:r>
+            <a:r>
+              <a:rPr lang="de-DE" dirty="0"/>
+              <a:t> </a:t>
+            </a:r>
+            <a:r>
+              <a:rPr lang="de-DE" dirty="0" err="1"/>
+              <a:t>iteration</a:t>
+            </a:r>
+            <a:r>
+              <a:rPr lang="de-DE" dirty="0"/>
+              <a:t>, </a:t>
+            </a:r>
+            <a:r>
+              <a:rPr lang="de-DE" dirty="0" err="1"/>
+              <a:t>policy</a:t>
+            </a:r>
+            <a:r>
+              <a:rPr lang="de-DE" dirty="0"/>
+              <a:t> </a:t>
+            </a:r>
+            <a:r>
+              <a:rPr lang="de-DE" dirty="0" err="1"/>
+              <a:t>iteration</a:t>
+            </a:r>
+            <a:r>
+              <a:rPr lang="de-DE" dirty="0"/>
+              <a:t>, </a:t>
+            </a:r>
+            <a:r>
+              <a:rPr lang="de-DE" dirty="0" err="1"/>
+              <a:t>dynamic</a:t>
+            </a:r>
+            <a:r>
+              <a:rPr lang="de-DE" dirty="0"/>
+              <a:t> </a:t>
+            </a:r>
+            <a:r>
+              <a:rPr lang="de-DE" dirty="0" err="1"/>
+              <a:t>programming</a:t>
+            </a:r>
+            <a:endParaRPr lang="de-DE" dirty="0"/>
+          </a:p>
+          <a:p>
+            <a:pPr marL="0" indent="0">
+              <a:buNone/>
+            </a:pPr>
+            <a:endParaRPr lang="de-DE" dirty="0"/>
+          </a:p>
+          <a:p>
+            <a:r>
+              <a:rPr lang="de-DE" dirty="0"/>
+              <a:t>Model-</a:t>
+            </a:r>
+            <a:r>
+              <a:rPr lang="de-DE" dirty="0" err="1"/>
+              <a:t>free</a:t>
+            </a:r>
+            <a:r>
+              <a:rPr lang="de-DE" dirty="0"/>
+              <a:t> </a:t>
+            </a:r>
+            <a:r>
+              <a:rPr lang="de-DE" dirty="0" err="1"/>
+              <a:t>learning</a:t>
+            </a:r>
+            <a:r>
+              <a:rPr lang="de-DE" dirty="0"/>
+              <a:t>: Monte Carlo </a:t>
+            </a:r>
+            <a:r>
+              <a:rPr lang="de-DE" dirty="0" err="1"/>
+              <a:t>methods</a:t>
+            </a:r>
+            <a:r>
+              <a:rPr lang="de-DE" dirty="0"/>
+              <a:t>, temporal-</a:t>
+            </a:r>
+            <a:r>
+              <a:rPr lang="de-DE" dirty="0" err="1"/>
+              <a:t>difference</a:t>
+            </a:r>
+            <a:r>
+              <a:rPr lang="de-DE" dirty="0"/>
+              <a:t> </a:t>
+            </a:r>
+            <a:r>
+              <a:rPr lang="de-DE" dirty="0" err="1"/>
+              <a:t>learning</a:t>
+            </a:r>
+            <a:r>
+              <a:rPr lang="de-DE" dirty="0"/>
+              <a:t>, SARSA, Q-</a:t>
+            </a:r>
+            <a:r>
+              <a:rPr lang="de-DE" dirty="0" err="1"/>
+              <a:t>learning</a:t>
+            </a:r>
+            <a:endParaRPr lang="de-DE" dirty="0"/>
+          </a:p>
+        </p:txBody>
+      </p:sp>
+      <p:sp>
+        <p:nvSpPr>
+          <p:cNvPr id="4" name="Foliennummernplatzhalter 3">
+            <a:extLst>
+              <a:ext uri="{FF2B5EF4-FFF2-40B4-BE49-F238E27FC236}">
+                <a16:creationId xmlns:a16="http://schemas.microsoft.com/office/drawing/2014/main" id="{E32BAF32-7768-70B1-FD8A-E309A394E8E4}"/>
+              </a:ext>
+            </a:extLst>
+          </p:cNvPr>
+          <p:cNvSpPr>
+            <a:spLocks noGrp="1"/>
+          </p:cNvSpPr>
+          <p:nvPr>
+            <p:ph type="sldNum" sz="quarter" idx="12"/>
+          </p:nvPr>
+        </p:nvSpPr>
+        <p:spPr/>
+        <p:txBody>
+          <a:bodyPr/>
+          <a:lstStyle/>
+          <a:p>
+            <a:fld id="{08C366F5-AFAD-49CB-854A-9D9E238FCA13}" type="slidenum">
+              <a:rPr lang="en-GB" smtClean="0"/>
+              <a:t>2</a:t>
+            </a:fld>
+            <a:endParaRPr lang="en-GB"/>
+          </a:p>
+        </p:txBody>
+      </p:sp>
+    </p:spTree>
+    <p:extLst>
+      <p:ext uri="{BB962C8B-B14F-4D97-AF65-F5344CB8AC3E}">
+        <p14:creationId xmlns:p14="http://schemas.microsoft.com/office/powerpoint/2010/main" val="2492885639"/>
+      </p:ext>
+    </p:extLst>
+  </p:cSld>
+  <p:clrMapOvr>
+    <a:masterClrMapping/>
+  </p:clrMapOvr>
+</p:sld>
+</file>
+
+<file path=ppt/slides/slide20.xml><?xml version="1.0" encoding="utf-8"?>
 <p:sld xmlns:a="http://schemas.openxmlformats.org/drawingml/2006/main" xmlns:r="http://schemas.openxmlformats.org/officeDocument/2006/relationships" xmlns:p="http://schemas.openxmlformats.org/presentationml/2006/main">
   <p:cSld>
     <p:spTree>
@@ -9501,7 +11795,7 @@
           <a:p>
             <a:fld id="{C48B675A-2084-C34A-84F6-1B6A8516A5F3}" type="slidenum">
               <a:rPr lang="en-DE" smtClean="0"/>
-              <a:t>19</a:t>
+              <a:t>20</a:t>
             </a:fld>
             <a:endParaRPr lang="en-DE"/>
           </a:p>
@@ -9520,324 +11814,7 @@
 </p:sld>
 </file>
 
-<file path=ppt/slides/slide2.xml><?xml version="1.0" encoding="utf-8"?>
-<p:sld xmlns:a="http://schemas.openxmlformats.org/drawingml/2006/main" xmlns:r="http://schemas.openxmlformats.org/officeDocument/2006/relationships" xmlns:p="http://schemas.openxmlformats.org/presentationml/2006/main">
-  <p:cSld>
-    <p:spTree>
-      <p:nvGrpSpPr>
-        <p:cNvPr id="1" name=""/>
-        <p:cNvGrpSpPr/>
-        <p:nvPr/>
-      </p:nvGrpSpPr>
-      <p:grpSpPr>
-        <a:xfrm>
-          <a:off x="0" y="0"/>
-          <a:ext cx="0" cy="0"/>
-          <a:chOff x="0" y="0"/>
-          <a:chExt cx="0" cy="0"/>
-        </a:xfrm>
-      </p:grpSpPr>
-      <p:sp>
-        <p:nvSpPr>
-          <p:cNvPr id="2" name="Title 1">
-            <a:extLst>
-              <a:ext uri="{FF2B5EF4-FFF2-40B4-BE49-F238E27FC236}">
-                <a16:creationId xmlns:a16="http://schemas.microsoft.com/office/drawing/2014/main" id="{95DCE220-F6B8-09A9-4663-EFAB3EE18F79}"/>
-              </a:ext>
-            </a:extLst>
-          </p:cNvPr>
-          <p:cNvSpPr>
-            <a:spLocks noGrp="1"/>
-          </p:cNvSpPr>
-          <p:nvPr>
-            <p:ph type="title"/>
-          </p:nvPr>
-        </p:nvSpPr>
-        <p:spPr/>
-        <p:txBody>
-          <a:bodyPr/>
-          <a:lstStyle/>
-          <a:p>
-            <a:r>
-              <a:rPr lang="en-GB" dirty="0"/>
-              <a:t>Sequential Decision Making</a:t>
-            </a:r>
-            <a:endParaRPr lang="en-DE" dirty="0"/>
-          </a:p>
-        </p:txBody>
-      </p:sp>
-      <p:sp>
-        <p:nvSpPr>
-          <p:cNvPr id="3" name="Content Placeholder 2">
-            <a:extLst>
-              <a:ext uri="{FF2B5EF4-FFF2-40B4-BE49-F238E27FC236}">
-                <a16:creationId xmlns:a16="http://schemas.microsoft.com/office/drawing/2014/main" id="{23EE2608-0A86-BFD4-C06E-1A9325966176}"/>
-              </a:ext>
-            </a:extLst>
-          </p:cNvPr>
-          <p:cNvSpPr>
-            <a:spLocks noGrp="1"/>
-          </p:cNvSpPr>
-          <p:nvPr>
-            <p:ph idx="1"/>
-          </p:nvPr>
-        </p:nvSpPr>
-        <p:spPr>
-          <a:xfrm>
-            <a:off x="838200" y="1825625"/>
-            <a:ext cx="7869382" cy="3671469"/>
-          </a:xfrm>
-        </p:spPr>
-        <p:txBody>
-          <a:bodyPr>
-            <a:noAutofit/>
-          </a:bodyPr>
-          <a:lstStyle/>
-          <a:p>
-            <a:pPr marL="0" indent="0">
-              <a:buNone/>
-            </a:pPr>
-            <a:r>
-              <a:rPr lang="en-GB" sz="2400" dirty="0"/>
-              <a:t>reinforcement learning (RL): </a:t>
-            </a:r>
-          </a:p>
-          <a:p>
-            <a:pPr marL="0" indent="0">
-              <a:buNone/>
-            </a:pPr>
-            <a:r>
-              <a:rPr lang="en-GB" sz="2400" dirty="0"/>
-              <a:t>formalization of sequential decision making (action policy) of software</a:t>
-            </a:r>
-            <a:r>
-              <a:rPr lang="en-DE" sz="2400" dirty="0"/>
-              <a:t> agent interacting with environment</a:t>
-            </a:r>
-          </a:p>
-          <a:p>
-            <a:pPr marL="0" indent="0">
-              <a:buNone/>
-            </a:pPr>
-            <a:endParaRPr lang="en-DE" sz="2400" dirty="0"/>
-          </a:p>
-          <a:p>
-            <a:pPr marL="0" indent="0">
-              <a:buNone/>
-            </a:pPr>
-            <a:r>
-              <a:rPr lang="en-GB" sz="2400" dirty="0"/>
-              <a:t>c</a:t>
-            </a:r>
-            <a:r>
-              <a:rPr lang="en-DE" sz="2400" dirty="0"/>
-              <a:t>orresponds to search for best (or rather good) action policy to reach a given goal (e.g., win a game)</a:t>
-            </a:r>
-          </a:p>
-          <a:p>
-            <a:pPr marL="0" indent="0">
-              <a:buNone/>
-            </a:pPr>
-            <a:r>
-              <a:rPr lang="en-DE" sz="2400" dirty="0"/>
-              <a:t>using learning from examples (data) to guide the search</a:t>
-            </a:r>
-          </a:p>
-        </p:txBody>
-      </p:sp>
-      <p:grpSp>
-        <p:nvGrpSpPr>
-          <p:cNvPr id="7" name="Group 6">
-            <a:extLst>
-              <a:ext uri="{FF2B5EF4-FFF2-40B4-BE49-F238E27FC236}">
-                <a16:creationId xmlns:a16="http://schemas.microsoft.com/office/drawing/2014/main" id="{690971B2-FD1C-52C8-1EA4-6B8FB61BD757}"/>
-              </a:ext>
-            </a:extLst>
-          </p:cNvPr>
-          <p:cNvGrpSpPr/>
-          <p:nvPr/>
-        </p:nvGrpSpPr>
-        <p:grpSpPr>
-          <a:xfrm>
-            <a:off x="8610600" y="1916917"/>
-            <a:ext cx="2750387" cy="2991600"/>
-            <a:chOff x="4623579" y="1771810"/>
-            <a:chExt cx="2750387" cy="2986245"/>
-          </a:xfrm>
-        </p:grpSpPr>
-        <p:pic>
-          <p:nvPicPr>
-            <p:cNvPr id="4" name="Picture 3">
-              <a:extLst>
-                <a:ext uri="{FF2B5EF4-FFF2-40B4-BE49-F238E27FC236}">
-                  <a16:creationId xmlns:a16="http://schemas.microsoft.com/office/drawing/2014/main" id="{248F14FA-5CD0-19C2-6EE7-688420177D94}"/>
-                </a:ext>
-              </a:extLst>
-            </p:cNvPr>
-            <p:cNvPicPr>
-              <a:picLocks noChangeAspect="1"/>
-            </p:cNvPicPr>
-            <p:nvPr/>
-          </p:nvPicPr>
-          <p:blipFill>
-            <a:blip r:embed="rId2"/>
-            <a:stretch>
-              <a:fillRect/>
-            </a:stretch>
-          </p:blipFill>
-          <p:spPr>
-            <a:xfrm>
-              <a:off x="4623579" y="2701661"/>
-              <a:ext cx="2750387" cy="1340814"/>
-            </a:xfrm>
-            <a:prstGeom prst="rect">
-              <a:avLst/>
-            </a:prstGeom>
-          </p:spPr>
-        </p:pic>
-        <p:pic>
-          <p:nvPicPr>
-            <p:cNvPr id="5" name="Picture 4">
-              <a:extLst>
-                <a:ext uri="{FF2B5EF4-FFF2-40B4-BE49-F238E27FC236}">
-                  <a16:creationId xmlns:a16="http://schemas.microsoft.com/office/drawing/2014/main" id="{AD438C21-2B0B-B4BD-4B42-6AAD917F624E}"/>
-                </a:ext>
-              </a:extLst>
-            </p:cNvPr>
-            <p:cNvPicPr>
-              <a:picLocks noChangeAspect="1"/>
-            </p:cNvPicPr>
-            <p:nvPr/>
-          </p:nvPicPr>
-          <p:blipFill>
-            <a:blip r:embed="rId3"/>
-            <a:stretch>
-              <a:fillRect/>
-            </a:stretch>
-          </p:blipFill>
-          <p:spPr>
-            <a:xfrm>
-              <a:off x="5469482" y="1771810"/>
-              <a:ext cx="1021958" cy="918030"/>
-            </a:xfrm>
-            <a:prstGeom prst="rect">
-              <a:avLst/>
-            </a:prstGeom>
-          </p:spPr>
-        </p:pic>
-        <p:pic>
-          <p:nvPicPr>
-            <p:cNvPr id="6" name="Picture 5">
-              <a:extLst>
-                <a:ext uri="{FF2B5EF4-FFF2-40B4-BE49-F238E27FC236}">
-                  <a16:creationId xmlns:a16="http://schemas.microsoft.com/office/drawing/2014/main" id="{031A7730-A865-3E78-2E6A-F69A453B857F}"/>
-                </a:ext>
-              </a:extLst>
-            </p:cNvPr>
-            <p:cNvPicPr>
-              <a:picLocks noChangeAspect="1"/>
-            </p:cNvPicPr>
-            <p:nvPr/>
-          </p:nvPicPr>
-          <p:blipFill>
-            <a:blip r:embed="rId4"/>
-            <a:stretch>
-              <a:fillRect/>
-            </a:stretch>
-          </p:blipFill>
-          <p:spPr>
-            <a:xfrm flipH="1">
-              <a:off x="5708287" y="4001698"/>
-              <a:ext cx="544348" cy="756357"/>
-            </a:xfrm>
-            <a:prstGeom prst="rect">
-              <a:avLst/>
-            </a:prstGeom>
-          </p:spPr>
-        </p:pic>
-      </p:grpSp>
-      <p:sp>
-        <p:nvSpPr>
-          <p:cNvPr id="8" name="Slide Number Placeholder 7">
-            <a:extLst>
-              <a:ext uri="{FF2B5EF4-FFF2-40B4-BE49-F238E27FC236}">
-                <a16:creationId xmlns:a16="http://schemas.microsoft.com/office/drawing/2014/main" id="{C1270C63-D3DC-A43C-D62D-538565C10BBE}"/>
-              </a:ext>
-            </a:extLst>
-          </p:cNvPr>
-          <p:cNvSpPr>
-            <a:spLocks noGrp="1"/>
-          </p:cNvSpPr>
-          <p:nvPr>
-            <p:ph type="sldNum" sz="quarter" idx="12"/>
-          </p:nvPr>
-        </p:nvSpPr>
-        <p:spPr/>
-        <p:txBody>
-          <a:bodyPr/>
-          <a:lstStyle/>
-          <a:p>
-            <a:fld id="{C48B675A-2084-C34A-84F6-1B6A8516A5F3}" type="slidenum">
-              <a:rPr lang="en-DE" smtClean="0"/>
-              <a:t>2</a:t>
-            </a:fld>
-            <a:endParaRPr lang="en-DE"/>
-          </a:p>
-        </p:txBody>
-      </p:sp>
-      <p:sp>
-        <p:nvSpPr>
-          <p:cNvPr id="9" name="TextBox 8">
-            <a:extLst>
-              <a:ext uri="{FF2B5EF4-FFF2-40B4-BE49-F238E27FC236}">
-                <a16:creationId xmlns:a16="http://schemas.microsoft.com/office/drawing/2014/main" id="{DDC35EDC-32D6-3BBA-1E46-38F485980525}"/>
-              </a:ext>
-            </a:extLst>
-          </p:cNvPr>
-          <p:cNvSpPr txBox="1"/>
-          <p:nvPr/>
-        </p:nvSpPr>
-        <p:spPr>
-          <a:xfrm>
-            <a:off x="838200" y="5438766"/>
-            <a:ext cx="11090564" cy="830997"/>
-          </a:xfrm>
-          <a:prstGeom prst="rect">
-            <a:avLst/>
-          </a:prstGeom>
-          <a:noFill/>
-        </p:spPr>
-        <p:txBody>
-          <a:bodyPr wrap="square" rtlCol="0">
-            <a:spAutoFit/>
-          </a:bodyPr>
-          <a:lstStyle/>
-          <a:p>
-            <a:r>
-              <a:rPr lang="en-GB" sz="2400" dirty="0"/>
-              <a:t>RL usually more difficult (e.g., non-differentiable as a whole) than</a:t>
-            </a:r>
-            <a:r>
-              <a:rPr lang="en-DE" sz="2400" dirty="0"/>
-              <a:t> supervised learning (which can be seen as “generalized optimization”, often of proxy metric)</a:t>
-            </a:r>
-          </a:p>
-        </p:txBody>
-      </p:sp>
-    </p:spTree>
-    <p:extLst>
-      <p:ext uri="{BB962C8B-B14F-4D97-AF65-F5344CB8AC3E}">
-        <p14:creationId xmlns:p14="http://schemas.microsoft.com/office/powerpoint/2010/main" val="2269043203"/>
-      </p:ext>
-    </p:extLst>
-  </p:cSld>
-  <p:clrMapOvr>
-    <a:masterClrMapping/>
-  </p:clrMapOvr>
-</p:sld>
-</file>
-
-<file path=ppt/slides/slide20.xml><?xml version="1.0" encoding="utf-8"?>
+<file path=ppt/slides/slide21.xml><?xml version="1.0" encoding="utf-8"?>
 <p:sld xmlns:a="http://schemas.openxmlformats.org/drawingml/2006/main" xmlns:r="http://schemas.openxmlformats.org/officeDocument/2006/relationships" xmlns:p="http://schemas.openxmlformats.org/presentationml/2006/main">
   <p:cSld>
     <p:spTree>
@@ -10703,7 +12680,7 @@
           <a:p>
             <a:fld id="{C48B675A-2084-C34A-84F6-1B6A8516A5F3}" type="slidenum">
               <a:rPr lang="en-DE" smtClean="0"/>
-              <a:t>20</a:t>
+              <a:t>21</a:t>
             </a:fld>
             <a:endParaRPr lang="en-DE"/>
           </a:p>
@@ -10752,7 +12729,7 @@
 </p:sld>
 </file>
 
-<file path=ppt/slides/slide21.xml><?xml version="1.0" encoding="utf-8"?>
+<file path=ppt/slides/slide22.xml><?xml version="1.0" encoding="utf-8"?>
 <p:sld xmlns:a="http://schemas.openxmlformats.org/drawingml/2006/main" xmlns:r="http://schemas.openxmlformats.org/officeDocument/2006/relationships" xmlns:p="http://schemas.openxmlformats.org/presentationml/2006/main">
   <p:cSld>
     <p:spTree>
@@ -10824,7 +12801,7 @@
           <a:p>
             <a:fld id="{C48B675A-2084-C34A-84F6-1B6A8516A5F3}" type="slidenum">
               <a:rPr lang="en-DE" smtClean="0"/>
-              <a:t>21</a:t>
+              <a:t>22</a:t>
             </a:fld>
             <a:endParaRPr lang="en-DE"/>
           </a:p>
@@ -11636,7 +13613,7 @@
 </p:sld>
 </file>
 
-<file path=ppt/slides/slide22.xml><?xml version="1.0" encoding="utf-8"?>
+<file path=ppt/slides/slide23.xml><?xml version="1.0" encoding="utf-8"?>
 <p:sld xmlns:a="http://schemas.openxmlformats.org/drawingml/2006/main" xmlns:r="http://schemas.openxmlformats.org/officeDocument/2006/relationships" xmlns:p="http://schemas.openxmlformats.org/presentationml/2006/main">
   <p:cSld>
     <p:spTree>
@@ -11799,7 +13776,7 @@
           <a:p>
             <a:fld id="{C48B675A-2084-C34A-84F6-1B6A8516A5F3}" type="slidenum">
               <a:rPr lang="en-DE" smtClean="0"/>
-              <a:t>22</a:t>
+              <a:t>23</a:t>
             </a:fld>
             <a:endParaRPr lang="en-DE"/>
           </a:p>
@@ -11818,7 +13795,7 @@
 </p:sld>
 </file>
 
-<file path=ppt/slides/slide23.xml><?xml version="1.0" encoding="utf-8"?>
+<file path=ppt/slides/slide24.xml><?xml version="1.0" encoding="utf-8"?>
 <p:sld xmlns:a="http://schemas.openxmlformats.org/drawingml/2006/main" xmlns:r="http://schemas.openxmlformats.org/officeDocument/2006/relationships" xmlns:p="http://schemas.openxmlformats.org/presentationml/2006/main">
   <p:cSld>
     <p:spTree>
@@ -11936,7 +13913,7 @@
           <a:p>
             <a:fld id="{3D4C94FE-FF23-4504-88E9-14D481113291}" type="slidenum">
               <a:rPr lang="en-GB" smtClean="0"/>
-              <a:t>23</a:t>
+              <a:t>24</a:t>
             </a:fld>
             <a:endParaRPr lang="en-GB"/>
           </a:p>
@@ -11977,7 +13954,7 @@
           <p:cNvPr id="2" name="Title 1">
             <a:extLst>
               <a:ext uri="{FF2B5EF4-FFF2-40B4-BE49-F238E27FC236}">
-                <a16:creationId xmlns:a16="http://schemas.microsoft.com/office/drawing/2014/main" id="{198921DF-BB12-89F5-C7E1-D4343D4F3220}"/>
+                <a16:creationId xmlns:a16="http://schemas.microsoft.com/office/drawing/2014/main" id="{95DCE220-F6B8-09A9-4663-EFAB3EE18F79}"/>
               </a:ext>
             </a:extLst>
           </p:cNvPr>
@@ -11995,19 +13972,7 @@
           <a:p>
             <a:r>
               <a:rPr lang="en-GB" dirty="0"/>
-              <a:t>M</a:t>
-            </a:r>
-            <a:r>
-              <a:rPr lang="en-DE" sz="4400" dirty="0"/>
-              <a:t>ain </a:t>
-            </a:r>
-            <a:r>
-              <a:rPr lang="en-DE" dirty="0"/>
-              <a:t>E</a:t>
-            </a:r>
-            <a:r>
-              <a:rPr lang="en-DE" sz="4400" dirty="0"/>
-              <a:t>lements of RL</a:t>
+              <a:t>Sequential Decision Making</a:t>
             </a:r>
             <a:endParaRPr lang="en-DE" dirty="0"/>
           </a:p>
@@ -12018,7 +13983,7 @@
           <p:cNvPr id="3" name="Content Placeholder 2">
             <a:extLst>
               <a:ext uri="{FF2B5EF4-FFF2-40B4-BE49-F238E27FC236}">
-                <a16:creationId xmlns:a16="http://schemas.microsoft.com/office/drawing/2014/main" id="{AA8A3C14-1EE9-A204-B53C-4AE63C8AB12F}"/>
+                <a16:creationId xmlns:a16="http://schemas.microsoft.com/office/drawing/2014/main" id="{23EE2608-0A86-BFD4-C06E-1A9325966176}"/>
               </a:ext>
             </a:extLst>
           </p:cNvPr>
@@ -12029,10 +13994,15 @@
             <p:ph idx="1"/>
           </p:nvPr>
         </p:nvSpPr>
-        <p:spPr/>
+        <p:spPr>
+          <a:xfrm>
+            <a:off x="838200" y="1825625"/>
+            <a:ext cx="7869382" cy="3671469"/>
+          </a:xfrm>
+        </p:spPr>
         <p:txBody>
           <a:bodyPr>
-            <a:normAutofit lnSpcReduction="10000"/>
+            <a:noAutofit/>
           </a:bodyPr>
           <a:lstStyle/>
           <a:p>
@@ -12040,95 +14010,170 @@
               <a:buNone/>
             </a:pPr>
             <a:r>
-              <a:rPr lang="en-GB" sz="2600" dirty="0"/>
-              <a:t>goal: find action policy maximizing reward from environment</a:t>
+              <a:rPr lang="en-GB" sz="2400" dirty="0"/>
+              <a:t>reinforcement learning (RL): </a:t>
             </a:r>
           </a:p>
           <a:p>
             <a:pPr marL="0" indent="0">
               <a:buNone/>
             </a:pPr>
-            <a:endParaRPr lang="en-GB" sz="2600" b="1" dirty="0"/>
+            <a:r>
+              <a:rPr lang="en-GB" sz="2400" dirty="0"/>
+              <a:t>formalization of sequential decision making (action policy) of software</a:t>
+            </a:r>
+            <a:r>
+              <a:rPr lang="en-DE" sz="2400" dirty="0"/>
+              <a:t> agent interacting with environment</a:t>
+            </a:r>
           </a:p>
           <a:p>
             <a:pPr marL="0" indent="0">
               <a:buNone/>
             </a:pPr>
-            <a:r>
-              <a:rPr lang="en-GB" sz="2600" b="1" dirty="0"/>
-              <a:t>action p</a:t>
-            </a:r>
-            <a:r>
-              <a:rPr lang="en-DE" sz="2600" b="1"/>
-              <a:t>olicy</a:t>
-            </a:r>
-            <a:endParaRPr lang="de-DE" sz="2600" dirty="0"/>
-          </a:p>
-          <a:p>
-            <a:r>
-              <a:rPr lang="en-DE" sz="2600"/>
-              <a:t>exploration-exploitation </a:t>
-            </a:r>
-            <a:r>
-              <a:rPr lang="en-DE" sz="2600" dirty="0"/>
-              <a:t>trade-off</a:t>
-            </a:r>
-          </a:p>
-          <a:p>
-            <a:r>
-              <a:rPr lang="en-GB" sz="2600" dirty="0"/>
-              <a:t>e.g., e</a:t>
-            </a:r>
-            <a:r>
-              <a:rPr lang="en-DE" sz="2600" dirty="0"/>
-              <a:t>psilon-greedy: random exploration at small fraction of the time</a:t>
-            </a:r>
+            <a:endParaRPr lang="en-DE" sz="2400" dirty="0"/>
           </a:p>
           <a:p>
             <a:pPr marL="0" indent="0">
               <a:buNone/>
             </a:pPr>
-            <a:endParaRPr lang="en-GB" sz="2600" b="1" dirty="0"/>
+            <a:r>
+              <a:rPr lang="en-GB" sz="2400" dirty="0"/>
+              <a:t>c</a:t>
+            </a:r>
+            <a:r>
+              <a:rPr lang="en-DE" sz="2400" dirty="0"/>
+              <a:t>orresponds to search for best (or rather good) action policy to reach a given goal (e.g., win a game)</a:t>
+            </a:r>
           </a:p>
           <a:p>
             <a:pPr marL="0" indent="0">
               <a:buNone/>
             </a:pPr>
             <a:r>
-              <a:rPr lang="en-GB" sz="2600" b="1" dirty="0"/>
-              <a:t>feedback from environment</a:t>
-            </a:r>
-            <a:endParaRPr lang="en-GB" sz="2600" dirty="0"/>
-          </a:p>
-          <a:p>
-            <a:r>
-              <a:rPr lang="en-GB" sz="2600" dirty="0"/>
-              <a:t>goal-directed, no supervision</a:t>
-            </a:r>
-          </a:p>
-          <a:p>
-            <a:r>
-              <a:rPr lang="en-GB" sz="2600" dirty="0"/>
-              <a:t>scalar r</a:t>
-            </a:r>
-            <a:r>
-              <a:rPr lang="en-DE" sz="2600"/>
-              <a:t>eward signal</a:t>
-            </a:r>
-            <a:r>
-              <a:rPr lang="en-GB" sz="2600" dirty="0"/>
-              <a:t>, cumulative and delayed (credit assignment problem)</a:t>
-            </a:r>
-            <a:endParaRPr lang="en-DE" sz="2600" dirty="0"/>
+              <a:rPr lang="en-DE" sz="2400" dirty="0"/>
+              <a:t>using learning from examples (data) to guide the search</a:t>
+            </a:r>
           </a:p>
         </p:txBody>
       </p:sp>
+      <p:grpSp>
+        <p:nvGrpSpPr>
+          <p:cNvPr id="7" name="Group 6">
+            <a:extLst>
+              <a:ext uri="{FF2B5EF4-FFF2-40B4-BE49-F238E27FC236}">
+                <a16:creationId xmlns:a16="http://schemas.microsoft.com/office/drawing/2014/main" id="{690971B2-FD1C-52C8-1EA4-6B8FB61BD757}"/>
+              </a:ext>
+            </a:extLst>
+          </p:cNvPr>
+          <p:cNvGrpSpPr/>
+          <p:nvPr/>
+        </p:nvGrpSpPr>
+        <p:grpSpPr>
+          <a:xfrm>
+            <a:off x="8610600" y="1916917"/>
+            <a:ext cx="2750387" cy="2991600"/>
+            <a:chOff x="4623579" y="1771810"/>
+            <a:chExt cx="2750387" cy="2986245"/>
+          </a:xfrm>
+        </p:grpSpPr>
+        <p:pic>
+          <p:nvPicPr>
+            <p:cNvPr id="4" name="Picture 3">
+              <a:extLst>
+                <a:ext uri="{FF2B5EF4-FFF2-40B4-BE49-F238E27FC236}">
+                  <a16:creationId xmlns:a16="http://schemas.microsoft.com/office/drawing/2014/main" id="{248F14FA-5CD0-19C2-6EE7-688420177D94}"/>
+                </a:ext>
+              </a:extLst>
+            </p:cNvPr>
+            <p:cNvPicPr>
+              <a:picLocks noChangeAspect="1"/>
+            </p:cNvPicPr>
+            <p:nvPr/>
+          </p:nvPicPr>
+          <p:blipFill>
+            <a:blip r:embed="rId2"/>
+            <a:stretch>
+              <a:fillRect/>
+            </a:stretch>
+          </p:blipFill>
+          <p:spPr>
+            <a:xfrm>
+              <a:off x="4623579" y="2701661"/>
+              <a:ext cx="2750387" cy="1340814"/>
+            </a:xfrm>
+            <a:prstGeom prst="rect">
+              <a:avLst/>
+            </a:prstGeom>
+          </p:spPr>
+        </p:pic>
+        <p:pic>
+          <p:nvPicPr>
+            <p:cNvPr id="5" name="Picture 4">
+              <a:extLst>
+                <a:ext uri="{FF2B5EF4-FFF2-40B4-BE49-F238E27FC236}">
+                  <a16:creationId xmlns:a16="http://schemas.microsoft.com/office/drawing/2014/main" id="{AD438C21-2B0B-B4BD-4B42-6AAD917F624E}"/>
+                </a:ext>
+              </a:extLst>
+            </p:cNvPr>
+            <p:cNvPicPr>
+              <a:picLocks noChangeAspect="1"/>
+            </p:cNvPicPr>
+            <p:nvPr/>
+          </p:nvPicPr>
+          <p:blipFill>
+            <a:blip r:embed="rId3"/>
+            <a:stretch>
+              <a:fillRect/>
+            </a:stretch>
+          </p:blipFill>
+          <p:spPr>
+            <a:xfrm>
+              <a:off x="5469482" y="1771810"/>
+              <a:ext cx="1021958" cy="918030"/>
+            </a:xfrm>
+            <a:prstGeom prst="rect">
+              <a:avLst/>
+            </a:prstGeom>
+          </p:spPr>
+        </p:pic>
+        <p:pic>
+          <p:nvPicPr>
+            <p:cNvPr id="6" name="Picture 5">
+              <a:extLst>
+                <a:ext uri="{FF2B5EF4-FFF2-40B4-BE49-F238E27FC236}">
+                  <a16:creationId xmlns:a16="http://schemas.microsoft.com/office/drawing/2014/main" id="{031A7730-A865-3E78-2E6A-F69A453B857F}"/>
+                </a:ext>
+              </a:extLst>
+            </p:cNvPr>
+            <p:cNvPicPr>
+              <a:picLocks noChangeAspect="1"/>
+            </p:cNvPicPr>
+            <p:nvPr/>
+          </p:nvPicPr>
+          <p:blipFill>
+            <a:blip r:embed="rId4"/>
+            <a:stretch>
+              <a:fillRect/>
+            </a:stretch>
+          </p:blipFill>
+          <p:spPr>
+            <a:xfrm flipH="1">
+              <a:off x="5708287" y="4001698"/>
+              <a:ext cx="544348" cy="756357"/>
+            </a:xfrm>
+            <a:prstGeom prst="rect">
+              <a:avLst/>
+            </a:prstGeom>
+          </p:spPr>
+        </p:pic>
+      </p:grpSp>
       <p:sp>
         <p:nvSpPr>
-          <p:cNvPr id="4" name="Slide Number Placeholder 3">
-            <a:extLst>
-              <a:ext uri="{FF2B5EF4-FFF2-40B4-BE49-F238E27FC236}">
-                <a16:creationId xmlns:a16="http://schemas.microsoft.com/office/drawing/2014/main" id="{14357DD8-C6E7-34CC-50D9-6100F19FE577}"/>
+          <p:cNvPr id="8" name="Slide Number Placeholder 7">
+            <a:extLst>
+              <a:ext uri="{FF2B5EF4-FFF2-40B4-BE49-F238E27FC236}">
+                <a16:creationId xmlns:a16="http://schemas.microsoft.com/office/drawing/2014/main" id="{C1270C63-D3DC-A43C-D62D-538565C10BBE}"/>
               </a:ext>
             </a:extLst>
           </p:cNvPr>
@@ -12152,10 +14197,49 @@
           </a:p>
         </p:txBody>
       </p:sp>
+      <p:sp>
+        <p:nvSpPr>
+          <p:cNvPr id="9" name="TextBox 8">
+            <a:extLst>
+              <a:ext uri="{FF2B5EF4-FFF2-40B4-BE49-F238E27FC236}">
+                <a16:creationId xmlns:a16="http://schemas.microsoft.com/office/drawing/2014/main" id="{DDC35EDC-32D6-3BBA-1E46-38F485980525}"/>
+              </a:ext>
+            </a:extLst>
+          </p:cNvPr>
+          <p:cNvSpPr txBox="1"/>
+          <p:nvPr/>
+        </p:nvSpPr>
+        <p:spPr>
+          <a:xfrm>
+            <a:off x="838200" y="5438766"/>
+            <a:ext cx="11090564" cy="830997"/>
+          </a:xfrm>
+          <a:prstGeom prst="rect">
+            <a:avLst/>
+          </a:prstGeom>
+          <a:noFill/>
+        </p:spPr>
+        <p:txBody>
+          <a:bodyPr wrap="square" rtlCol="0">
+            <a:spAutoFit/>
+          </a:bodyPr>
+          <a:lstStyle/>
+          <a:p>
+            <a:r>
+              <a:rPr lang="en-GB" sz="2400" dirty="0"/>
+              <a:t>RL usually more difficult (e.g., non-differentiable as a whole) than</a:t>
+            </a:r>
+            <a:r>
+              <a:rPr lang="en-DE" sz="2400" dirty="0"/>
+              <a:t> supervised learning (which can be seen as “generalized optimization”, often of proxy metric)</a:t>
+            </a:r>
+          </a:p>
+        </p:txBody>
+      </p:sp>
     </p:spTree>
     <p:extLst>
       <p:ext uri="{BB962C8B-B14F-4D97-AF65-F5344CB8AC3E}">
-        <p14:creationId xmlns:p14="http://schemas.microsoft.com/office/powerpoint/2010/main" val="2635741980"/>
+        <p14:creationId xmlns:p14="http://schemas.microsoft.com/office/powerpoint/2010/main" val="2269043203"/>
       </p:ext>
     </p:extLst>
   </p:cSld>
@@ -12187,7 +14271,7 @@
           <p:cNvPr id="2" name="Title 1">
             <a:extLst>
               <a:ext uri="{FF2B5EF4-FFF2-40B4-BE49-F238E27FC236}">
-                <a16:creationId xmlns:a16="http://schemas.microsoft.com/office/drawing/2014/main" id="{B058DEDA-AB76-774F-BC78-9FAC7097A6D8}"/>
+                <a16:creationId xmlns:a16="http://schemas.microsoft.com/office/drawing/2014/main" id="{198921DF-BB12-89F5-C7E1-D4343D4F3220}"/>
               </a:ext>
             </a:extLst>
           </p:cNvPr>
@@ -12204,9 +14288,22 @@
           <a:lstStyle/>
           <a:p>
             <a:r>
+              <a:rPr lang="en-GB" dirty="0"/>
+              <a:t>M</a:t>
+            </a:r>
+            <a:r>
+              <a:rPr lang="en-DE" sz="4400" dirty="0"/>
+              <a:t>ain </a:t>
+            </a:r>
+            <a:r>
               <a:rPr lang="en-DE" dirty="0"/>
-              <a:t>Optional Elements of RL</a:t>
-            </a:r>
+              <a:t>E</a:t>
+            </a:r>
+            <a:r>
+              <a:rPr lang="en-DE" sz="4400" dirty="0"/>
+              <a:t>lements of RL</a:t>
+            </a:r>
+            <a:endParaRPr lang="en-DE" dirty="0"/>
           </a:p>
         </p:txBody>
       </p:sp>
@@ -12215,7 +14312,7 @@
           <p:cNvPr id="3" name="Content Placeholder 2">
             <a:extLst>
               <a:ext uri="{FF2B5EF4-FFF2-40B4-BE49-F238E27FC236}">
-                <a16:creationId xmlns:a16="http://schemas.microsoft.com/office/drawing/2014/main" id="{EDE8759B-188B-A6C8-FB1F-E82713ECC0C0}"/>
+                <a16:creationId xmlns:a16="http://schemas.microsoft.com/office/drawing/2014/main" id="{AA8A3C14-1EE9-A204-B53C-4AE63C8AB12F}"/>
               </a:ext>
             </a:extLst>
           </p:cNvPr>
@@ -12229,7 +14326,7 @@
         <p:spPr/>
         <p:txBody>
           <a:bodyPr>
-            <a:normAutofit/>
+            <a:normAutofit lnSpcReduction="10000"/>
           </a:bodyPr>
           <a:lstStyle/>
           <a:p>
@@ -12237,76 +14334,95 @@
               <a:buNone/>
             </a:pPr>
             <a:r>
-              <a:rPr lang="en-GB" sz="2800" b="1" dirty="0"/>
-              <a:t>v</a:t>
-            </a:r>
-            <a:r>
-              <a:rPr lang="en-DE" sz="2800" b="1" dirty="0"/>
-              <a:t>alue functions for states or actions</a:t>
-            </a:r>
-            <a:r>
-              <a:rPr lang="en-DE" sz="2800" dirty="0"/>
-              <a:t>: improve efficiency of search in vast action policy space (alternative: direct policy search)</a:t>
+              <a:rPr lang="en-GB" sz="2600" dirty="0"/>
+              <a:t>goal: find action policy maximizing reward from environment</a:t>
             </a:r>
           </a:p>
           <a:p>
             <a:pPr marL="0" indent="0">
               <a:buNone/>
             </a:pPr>
-            <a:endParaRPr lang="en-GB" sz="2800" b="1" dirty="0"/>
+            <a:endParaRPr lang="en-GB" sz="2600" b="1" dirty="0"/>
           </a:p>
           <a:p>
             <a:pPr marL="0" indent="0">
               <a:buNone/>
             </a:pPr>
             <a:r>
-              <a:rPr lang="en-GB" sz="2800" b="1" dirty="0"/>
-              <a:t>m</a:t>
-            </a:r>
-            <a:r>
-              <a:rPr lang="en-DE" sz="2800" b="1" dirty="0"/>
-              <a:t>odel of environment</a:t>
-            </a:r>
-            <a:r>
-              <a:rPr lang="en-DE" sz="2800" dirty="0"/>
-              <a:t>: </a:t>
-            </a:r>
-            <a:r>
-              <a:rPr lang="en-GB" dirty="0"/>
-              <a:t>(model-free) learning from trial-and-error or (model-based) planning</a:t>
+              <a:rPr lang="en-GB" sz="2600" b="1" dirty="0"/>
+              <a:t>action p</a:t>
+            </a:r>
+            <a:r>
+              <a:rPr lang="en-DE" sz="2600" b="1"/>
+              <a:t>olicy</a:t>
+            </a:r>
+            <a:endParaRPr lang="de-DE" sz="2600" dirty="0"/>
+          </a:p>
+          <a:p>
+            <a:r>
+              <a:rPr lang="en-DE" sz="2600"/>
+              <a:t>exploration-exploitation </a:t>
+            </a:r>
+            <a:r>
+              <a:rPr lang="en-DE" sz="2600" dirty="0"/>
+              <a:t>trade-off</a:t>
+            </a:r>
+          </a:p>
+          <a:p>
+            <a:r>
+              <a:rPr lang="en-GB" sz="2600" dirty="0"/>
+              <a:t>e.g., e</a:t>
+            </a:r>
+            <a:r>
+              <a:rPr lang="en-DE" sz="2600" dirty="0"/>
+              <a:t>psilon-greedy: random exploration at small fraction of the time</a:t>
             </a:r>
           </a:p>
           <a:p>
             <a:pPr marL="0" indent="0">
               <a:buNone/>
             </a:pPr>
-            <a:r>
-              <a:rPr lang="en-GB" dirty="0"/>
-              <a:t>can be used in different ways:</a:t>
-            </a:r>
-          </a:p>
-          <a:p>
-            <a:pPr marL="457200" indent="-457200"/>
-            <a:r>
-              <a:rPr lang="en-GB" dirty="0"/>
-              <a:t>simulate experience from model (for learning)</a:t>
-            </a:r>
-          </a:p>
-          <a:p>
-            <a:pPr marL="457200" indent="-457200"/>
-            <a:r>
-              <a:rPr lang="en-GB" dirty="0"/>
-              <a:t>decision-time planning (e.g., heuristic search or model predictive control)</a:t>
-            </a:r>
+            <a:endParaRPr lang="en-GB" sz="2600" b="1" dirty="0"/>
+          </a:p>
+          <a:p>
+            <a:pPr marL="0" indent="0">
+              <a:buNone/>
+            </a:pPr>
+            <a:r>
+              <a:rPr lang="en-GB" sz="2600" b="1" dirty="0"/>
+              <a:t>feedback from environment</a:t>
+            </a:r>
+            <a:endParaRPr lang="en-GB" sz="2600" dirty="0"/>
+          </a:p>
+          <a:p>
+            <a:r>
+              <a:rPr lang="en-GB" sz="2600" dirty="0"/>
+              <a:t>goal-directed, no supervision</a:t>
+            </a:r>
+          </a:p>
+          <a:p>
+            <a:r>
+              <a:rPr lang="en-GB" sz="2600" dirty="0"/>
+              <a:t>scalar r</a:t>
+            </a:r>
+            <a:r>
+              <a:rPr lang="en-DE" sz="2600"/>
+              <a:t>eward signal</a:t>
+            </a:r>
+            <a:r>
+              <a:rPr lang="en-GB" sz="2600" dirty="0"/>
+              <a:t>, cumulative and delayed (credit assignment problem)</a:t>
+            </a:r>
+            <a:endParaRPr lang="en-DE" sz="2600" dirty="0"/>
           </a:p>
         </p:txBody>
       </p:sp>
       <p:sp>
         <p:nvSpPr>
-          <p:cNvPr id="5" name="Slide Number Placeholder 4">
-            <a:extLst>
-              <a:ext uri="{FF2B5EF4-FFF2-40B4-BE49-F238E27FC236}">
-                <a16:creationId xmlns:a16="http://schemas.microsoft.com/office/drawing/2014/main" id="{9120F20F-191C-79ED-062D-71B8156F7382}"/>
+          <p:cNvPr id="4" name="Slide Number Placeholder 3">
+            <a:extLst>
+              <a:ext uri="{FF2B5EF4-FFF2-40B4-BE49-F238E27FC236}">
+                <a16:creationId xmlns:a16="http://schemas.microsoft.com/office/drawing/2014/main" id="{14357DD8-C6E7-34CC-50D9-6100F19FE577}"/>
               </a:ext>
             </a:extLst>
           </p:cNvPr>
@@ -12333,7 +14449,7 @@
     </p:spTree>
     <p:extLst>
       <p:ext uri="{BB962C8B-B14F-4D97-AF65-F5344CB8AC3E}">
-        <p14:creationId xmlns:p14="http://schemas.microsoft.com/office/powerpoint/2010/main" val="2800485524"/>
+        <p14:creationId xmlns:p14="http://schemas.microsoft.com/office/powerpoint/2010/main" val="2635741980"/>
       </p:ext>
     </p:extLst>
   </p:cSld>
@@ -12362,10 +14478,10 @@
       </p:grpSpPr>
       <p:sp>
         <p:nvSpPr>
-          <p:cNvPr id="5" name="Titel 4">
-            <a:extLst>
-              <a:ext uri="{FF2B5EF4-FFF2-40B4-BE49-F238E27FC236}">
-                <a16:creationId xmlns:a16="http://schemas.microsoft.com/office/drawing/2014/main" id="{EEED0B19-871D-4F1F-000C-D522BFBC8220}"/>
+          <p:cNvPr id="2" name="Title 1">
+            <a:extLst>
+              <a:ext uri="{FF2B5EF4-FFF2-40B4-BE49-F238E27FC236}">
+                <a16:creationId xmlns:a16="http://schemas.microsoft.com/office/drawing/2014/main" id="{B058DEDA-AB76-774F-BC78-9FAC7097A6D8}"/>
               </a:ext>
             </a:extLst>
           </p:cNvPr>
@@ -12382,22 +14498,109 @@
           <a:lstStyle/>
           <a:p>
             <a:r>
-              <a:rPr lang="de-DE" dirty="0" err="1"/>
-              <a:t>Mathematical</a:t>
-            </a:r>
-            <a:r>
-              <a:rPr lang="de-DE" dirty="0"/>
-              <a:t> Setup</a:t>
+              <a:rPr lang="en-DE" dirty="0"/>
+              <a:t>Optional Elements of RL</a:t>
             </a:r>
           </a:p>
         </p:txBody>
       </p:sp>
       <p:sp>
         <p:nvSpPr>
-          <p:cNvPr id="4" name="Foliennummernplatzhalter 3">
-            <a:extLst>
-              <a:ext uri="{FF2B5EF4-FFF2-40B4-BE49-F238E27FC236}">
-                <a16:creationId xmlns:a16="http://schemas.microsoft.com/office/drawing/2014/main" id="{2A3ABEFD-2E15-2C89-0B3B-679A28E47CB8}"/>
+          <p:cNvPr id="3" name="Content Placeholder 2">
+            <a:extLst>
+              <a:ext uri="{FF2B5EF4-FFF2-40B4-BE49-F238E27FC236}">
+                <a16:creationId xmlns:a16="http://schemas.microsoft.com/office/drawing/2014/main" id="{EDE8759B-188B-A6C8-FB1F-E82713ECC0C0}"/>
+              </a:ext>
+            </a:extLst>
+          </p:cNvPr>
+          <p:cNvSpPr>
+            <a:spLocks noGrp="1"/>
+          </p:cNvSpPr>
+          <p:nvPr>
+            <p:ph idx="1"/>
+          </p:nvPr>
+        </p:nvSpPr>
+        <p:spPr/>
+        <p:txBody>
+          <a:bodyPr>
+            <a:normAutofit/>
+          </a:bodyPr>
+          <a:lstStyle/>
+          <a:p>
+            <a:pPr marL="0" indent="0">
+              <a:buNone/>
+            </a:pPr>
+            <a:r>
+              <a:rPr lang="en-GB" sz="2800" b="1" dirty="0"/>
+              <a:t>v</a:t>
+            </a:r>
+            <a:r>
+              <a:rPr lang="en-DE" sz="2800" b="1" dirty="0"/>
+              <a:t>alue functions for states or actions</a:t>
+            </a:r>
+            <a:r>
+              <a:rPr lang="en-DE" sz="2800" dirty="0"/>
+              <a:t>: improve efficiency of search in vast action policy space (alternative: direct policy search)</a:t>
+            </a:r>
+          </a:p>
+          <a:p>
+            <a:pPr marL="0" indent="0">
+              <a:buNone/>
+            </a:pPr>
+            <a:endParaRPr lang="en-GB" sz="2800" b="1" dirty="0"/>
+          </a:p>
+          <a:p>
+            <a:pPr marL="0" indent="0">
+              <a:buNone/>
+            </a:pPr>
+            <a:r>
+              <a:rPr lang="en-GB" sz="2800" b="1" dirty="0"/>
+              <a:t>m</a:t>
+            </a:r>
+            <a:r>
+              <a:rPr lang="en-DE" sz="2800" b="1" dirty="0"/>
+              <a:t>odel of environment</a:t>
+            </a:r>
+            <a:r>
+              <a:rPr lang="en-DE" sz="2800" dirty="0"/>
+              <a:t>: </a:t>
+            </a:r>
+            <a:r>
+              <a:rPr lang="en-GB" dirty="0"/>
+              <a:t>(model-free) learning from trial-and-error or (model-based) planning</a:t>
+            </a:r>
+          </a:p>
+          <a:p>
+            <a:pPr marL="0" indent="0">
+              <a:buNone/>
+            </a:pPr>
+            <a:r>
+              <a:rPr lang="en-GB" dirty="0"/>
+              <a:t>can be used in different ways:</a:t>
+            </a:r>
+          </a:p>
+          <a:p>
+            <a:pPr marL="457200" indent="-457200"/>
+            <a:r>
+              <a:rPr lang="en-GB" dirty="0"/>
+              <a:t>simulate experience from model (for learning)</a:t>
+            </a:r>
+          </a:p>
+          <a:p>
+            <a:pPr marL="457200" indent="-457200"/>
+            <a:r>
+              <a:rPr lang="en-GB" dirty="0"/>
+              <a:t>decision-time planning (e.g., heuristic search or model predictive control)</a:t>
+            </a:r>
+          </a:p>
+        </p:txBody>
+      </p:sp>
+      <p:sp>
+        <p:nvSpPr>
+          <p:cNvPr id="5" name="Slide Number Placeholder 4">
+            <a:extLst>
+              <a:ext uri="{FF2B5EF4-FFF2-40B4-BE49-F238E27FC236}">
+                <a16:creationId xmlns:a16="http://schemas.microsoft.com/office/drawing/2014/main" id="{9120F20F-191C-79ED-062D-71B8156F7382}"/>
               </a:ext>
             </a:extLst>
           </p:cNvPr>
@@ -12413,18 +14616,18 @@
           <a:bodyPr/>
           <a:lstStyle/>
           <a:p>
-            <a:fld id="{08C366F5-AFAD-49CB-854A-9D9E238FCA13}" type="slidenum">
-              <a:rPr lang="en-GB" smtClean="0"/>
+            <a:fld id="{C48B675A-2084-C34A-84F6-1B6A8516A5F3}" type="slidenum">
+              <a:rPr lang="en-DE" smtClean="0"/>
               <a:t>5</a:t>
             </a:fld>
-            <a:endParaRPr lang="en-GB"/>
+            <a:endParaRPr lang="en-DE"/>
           </a:p>
         </p:txBody>
       </p:sp>
     </p:spTree>
     <p:extLst>
       <p:ext uri="{BB962C8B-B14F-4D97-AF65-F5344CB8AC3E}">
-        <p14:creationId xmlns:p14="http://schemas.microsoft.com/office/powerpoint/2010/main" val="3512309779"/>
+        <p14:creationId xmlns:p14="http://schemas.microsoft.com/office/powerpoint/2010/main" val="2800485524"/>
       </p:ext>
     </p:extLst>
   </p:cSld>
@@ -12453,6 +14656,97 @@
       </p:grpSpPr>
       <p:sp>
         <p:nvSpPr>
+          <p:cNvPr id="5" name="Titel 4">
+            <a:extLst>
+              <a:ext uri="{FF2B5EF4-FFF2-40B4-BE49-F238E27FC236}">
+                <a16:creationId xmlns:a16="http://schemas.microsoft.com/office/drawing/2014/main" id="{EEED0B19-871D-4F1F-000C-D522BFBC8220}"/>
+              </a:ext>
+            </a:extLst>
+          </p:cNvPr>
+          <p:cNvSpPr>
+            <a:spLocks noGrp="1"/>
+          </p:cNvSpPr>
+          <p:nvPr>
+            <p:ph type="title"/>
+          </p:nvPr>
+        </p:nvSpPr>
+        <p:spPr/>
+        <p:txBody>
+          <a:bodyPr/>
+          <a:lstStyle/>
+          <a:p>
+            <a:r>
+              <a:rPr lang="de-DE" dirty="0" err="1"/>
+              <a:t>Mathematical</a:t>
+            </a:r>
+            <a:r>
+              <a:rPr lang="de-DE" dirty="0"/>
+              <a:t> Setup</a:t>
+            </a:r>
+          </a:p>
+        </p:txBody>
+      </p:sp>
+      <p:sp>
+        <p:nvSpPr>
+          <p:cNvPr id="4" name="Foliennummernplatzhalter 3">
+            <a:extLst>
+              <a:ext uri="{FF2B5EF4-FFF2-40B4-BE49-F238E27FC236}">
+                <a16:creationId xmlns:a16="http://schemas.microsoft.com/office/drawing/2014/main" id="{2A3ABEFD-2E15-2C89-0B3B-679A28E47CB8}"/>
+              </a:ext>
+            </a:extLst>
+          </p:cNvPr>
+          <p:cNvSpPr>
+            <a:spLocks noGrp="1"/>
+          </p:cNvSpPr>
+          <p:nvPr>
+            <p:ph type="sldNum" sz="quarter" idx="12"/>
+          </p:nvPr>
+        </p:nvSpPr>
+        <p:spPr/>
+        <p:txBody>
+          <a:bodyPr/>
+          <a:lstStyle/>
+          <a:p>
+            <a:fld id="{08C366F5-AFAD-49CB-854A-9D9E238FCA13}" type="slidenum">
+              <a:rPr lang="en-GB" smtClean="0"/>
+              <a:t>6</a:t>
+            </a:fld>
+            <a:endParaRPr lang="en-GB"/>
+          </a:p>
+        </p:txBody>
+      </p:sp>
+    </p:spTree>
+    <p:extLst>
+      <p:ext uri="{BB962C8B-B14F-4D97-AF65-F5344CB8AC3E}">
+        <p14:creationId xmlns:p14="http://schemas.microsoft.com/office/powerpoint/2010/main" val="3512309779"/>
+      </p:ext>
+    </p:extLst>
+  </p:cSld>
+  <p:clrMapOvr>
+    <a:masterClrMapping/>
+  </p:clrMapOvr>
+</p:sld>
+</file>
+
+<file path=ppt/slides/slide7.xml><?xml version="1.0" encoding="utf-8"?>
+<p:sld xmlns:a="http://schemas.openxmlformats.org/drawingml/2006/main" xmlns:r="http://schemas.openxmlformats.org/officeDocument/2006/relationships" xmlns:p="http://schemas.openxmlformats.org/presentationml/2006/main">
+  <p:cSld>
+    <p:spTree>
+      <p:nvGrpSpPr>
+        <p:cNvPr id="1" name=""/>
+        <p:cNvGrpSpPr/>
+        <p:nvPr/>
+      </p:nvGrpSpPr>
+      <p:grpSpPr>
+        <a:xfrm>
+          <a:off x="0" y="0"/>
+          <a:ext cx="0" cy="0"/>
+          <a:chOff x="0" y="0"/>
+          <a:chExt cx="0" cy="0"/>
+        </a:xfrm>
+      </p:grpSpPr>
+      <p:sp>
+        <p:nvSpPr>
           <p:cNvPr id="2" name="Title 1">
             <a:extLst>
               <a:ext uri="{FF2B5EF4-FFF2-40B4-BE49-F238E27FC236}">
@@ -12570,7 +14864,7 @@
           <a:p>
             <a:fld id="{C48B675A-2084-C34A-84F6-1B6A8516A5F3}" type="slidenum">
               <a:rPr lang="en-DE" smtClean="0"/>
-              <a:t>6</a:t>
+              <a:t>7</a:t>
             </a:fld>
             <a:endParaRPr lang="en-DE"/>
           </a:p>
@@ -12589,7 +14883,7 @@
 </p:sld>
 </file>
 
-<file path=ppt/slides/slide7.xml><?xml version="1.0" encoding="utf-8"?>
+<file path=ppt/slides/slide8.xml><?xml version="1.0" encoding="utf-8"?>
 <p:sld xmlns:a="http://schemas.openxmlformats.org/drawingml/2006/main" xmlns:r="http://schemas.openxmlformats.org/officeDocument/2006/relationships" xmlns:p="http://schemas.openxmlformats.org/presentationml/2006/main">
   <p:cSld>
     <p:spTree>
@@ -12952,7 +15246,7 @@
           <a:p>
             <a:fld id="{C48B675A-2084-C34A-84F6-1B6A8516A5F3}" type="slidenum">
               <a:rPr lang="en-DE" smtClean="0"/>
-              <a:t>7</a:t>
+              <a:t>8</a:t>
             </a:fld>
             <a:endParaRPr lang="en-DE"/>
           </a:p>
@@ -13069,180 +15363,6 @@
 </p:sld>
 </file>
 
-<file path=ppt/slides/slide8.xml><?xml version="1.0" encoding="utf-8"?>
-<p:sld xmlns:a="http://schemas.openxmlformats.org/drawingml/2006/main" xmlns:r="http://schemas.openxmlformats.org/officeDocument/2006/relationships" xmlns:p="http://schemas.openxmlformats.org/presentationml/2006/main">
-  <p:cSld>
-    <p:spTree>
-      <p:nvGrpSpPr>
-        <p:cNvPr id="1" name=""/>
-        <p:cNvGrpSpPr/>
-        <p:nvPr/>
-      </p:nvGrpSpPr>
-      <p:grpSpPr>
-        <a:xfrm>
-          <a:off x="0" y="0"/>
-          <a:ext cx="0" cy="0"/>
-          <a:chOff x="0" y="0"/>
-          <a:chExt cx="0" cy="0"/>
-        </a:xfrm>
-      </p:grpSpPr>
-      <p:sp>
-        <p:nvSpPr>
-          <p:cNvPr id="2" name="Title 1">
-            <a:extLst>
-              <a:ext uri="{FF2B5EF4-FFF2-40B4-BE49-F238E27FC236}">
-                <a16:creationId xmlns:a16="http://schemas.microsoft.com/office/drawing/2014/main" id="{B0223AE8-3C42-F619-8039-60559CDBE3E3}"/>
-              </a:ext>
-            </a:extLst>
-          </p:cNvPr>
-          <p:cNvSpPr>
-            <a:spLocks noGrp="1"/>
-          </p:cNvSpPr>
-          <p:nvPr>
-            <p:ph type="title"/>
-          </p:nvPr>
-        </p:nvSpPr>
-        <p:spPr/>
-        <p:txBody>
-          <a:bodyPr/>
-          <a:lstStyle/>
-          <a:p>
-            <a:r>
-              <a:rPr lang="en-DE" dirty="0"/>
-              <a:t>State and Action Values</a:t>
-            </a:r>
-          </a:p>
-        </p:txBody>
-      </p:sp>
-      <p:sp>
-        <p:nvSpPr>
-          <p:cNvPr id="3" name="Content Placeholder 2">
-            <a:extLst>
-              <a:ext uri="{FF2B5EF4-FFF2-40B4-BE49-F238E27FC236}">
-                <a16:creationId xmlns:a16="http://schemas.microsoft.com/office/drawing/2014/main" id="{110D05EE-A018-B8E8-4DF6-58F3862AED4C}"/>
-              </a:ext>
-            </a:extLst>
-          </p:cNvPr>
-          <p:cNvSpPr>
-            <a:spLocks noGrp="1"/>
-          </p:cNvSpPr>
-          <p:nvPr>
-            <p:ph idx="1"/>
-          </p:nvPr>
-        </p:nvSpPr>
-        <p:spPr/>
-        <p:txBody>
-          <a:bodyPr/>
-          <a:lstStyle/>
-          <a:p>
-            <a:pPr marL="0" indent="0">
-              <a:buNone/>
-            </a:pPr>
-            <a:r>
-              <a:rPr lang="en-GB" dirty="0"/>
-              <a:t>state/action value: total amount of expected future reward starting from given state/action (usually with discounting of later steps)</a:t>
-            </a:r>
-          </a:p>
-          <a:p>
-            <a:pPr marL="0" indent="0">
-              <a:buNone/>
-            </a:pPr>
-            <a:r>
-              <a:rPr lang="en-GB" dirty="0">
-                <a:sym typeface="Wingdings" pitchFamily="2" charset="2"/>
-              </a:rPr>
-              <a:t> </a:t>
-            </a:r>
-            <a:r>
-              <a:rPr lang="en-GB" dirty="0"/>
-              <a:t>indicating l</a:t>
-            </a:r>
-            <a:r>
-              <a:rPr lang="en-DE" dirty="0"/>
-              <a:t>ong-term desirability of states/actions</a:t>
-            </a:r>
-            <a:endParaRPr lang="en-GB" dirty="0"/>
-          </a:p>
-          <a:p>
-            <a:pPr marL="0" indent="0">
-              <a:buNone/>
-            </a:pPr>
-            <a:endParaRPr lang="en-GB" dirty="0"/>
-          </a:p>
-          <a:p>
-            <a:pPr marL="0" indent="0">
-              <a:buNone/>
-            </a:pPr>
-            <a:r>
-              <a:rPr lang="en-GB" dirty="0"/>
-              <a:t>main motivation: improve </a:t>
-            </a:r>
-            <a:r>
-              <a:rPr lang="en-DE" dirty="0"/>
-              <a:t>efficiency of search in policy space</a:t>
-            </a:r>
-          </a:p>
-          <a:p>
-            <a:pPr marL="0" indent="0">
-              <a:buNone/>
-            </a:pPr>
-            <a:r>
-              <a:rPr lang="en-DE" dirty="0"/>
-              <a:t>(</a:t>
-            </a:r>
-            <a:r>
-              <a:rPr lang="en-GB" dirty="0"/>
-              <a:t>for comparison: </a:t>
-            </a:r>
-            <a:r>
-              <a:rPr lang="en-DE" dirty="0"/>
-              <a:t>evolutionary methods search directly by evaluating entire policies)</a:t>
-            </a:r>
-          </a:p>
-        </p:txBody>
-      </p:sp>
-      <p:sp>
-        <p:nvSpPr>
-          <p:cNvPr id="4" name="Slide Number Placeholder 3">
-            <a:extLst>
-              <a:ext uri="{FF2B5EF4-FFF2-40B4-BE49-F238E27FC236}">
-                <a16:creationId xmlns:a16="http://schemas.microsoft.com/office/drawing/2014/main" id="{8F0C1062-4387-7EA8-856B-639628800E1C}"/>
-              </a:ext>
-            </a:extLst>
-          </p:cNvPr>
-          <p:cNvSpPr>
-            <a:spLocks noGrp="1"/>
-          </p:cNvSpPr>
-          <p:nvPr>
-            <p:ph type="sldNum" sz="quarter" idx="12"/>
-          </p:nvPr>
-        </p:nvSpPr>
-        <p:spPr/>
-        <p:txBody>
-          <a:bodyPr/>
-          <a:lstStyle/>
-          <a:p>
-            <a:fld id="{C48B675A-2084-C34A-84F6-1B6A8516A5F3}" type="slidenum">
-              <a:rPr lang="en-DE" smtClean="0"/>
-              <a:t>8</a:t>
-            </a:fld>
-            <a:endParaRPr lang="en-DE"/>
-          </a:p>
-        </p:txBody>
-      </p:sp>
-    </p:spTree>
-    <p:extLst>
-      <p:ext uri="{BB962C8B-B14F-4D97-AF65-F5344CB8AC3E}">
-        <p14:creationId xmlns:p14="http://schemas.microsoft.com/office/powerpoint/2010/main" val="3985292078"/>
-      </p:ext>
-    </p:extLst>
-  </p:cSld>
-  <p:clrMapOvr>
-    <a:masterClrMapping/>
-  </p:clrMapOvr>
-</p:sld>
-</file>
-
 <file path=ppt/slides/slide9.xml><?xml version="1.0" encoding="utf-8"?>
 <p:sld xmlns:a="http://schemas.openxmlformats.org/drawingml/2006/main" xmlns:r="http://schemas.openxmlformats.org/officeDocument/2006/relationships" xmlns:p="http://schemas.openxmlformats.org/presentationml/2006/main">
   <p:cSld>
@@ -13265,7 +15385,7 @@
           <p:cNvPr id="2" name="Title 1">
             <a:extLst>
               <a:ext uri="{FF2B5EF4-FFF2-40B4-BE49-F238E27FC236}">
-                <a16:creationId xmlns:a16="http://schemas.microsoft.com/office/drawing/2014/main" id="{ED2B2E7C-9701-D067-1265-0D20B8DCA7DF}"/>
+                <a16:creationId xmlns:a16="http://schemas.microsoft.com/office/drawing/2014/main" id="{B0223AE8-3C42-F619-8039-60559CDBE3E3}"/>
               </a:ext>
             </a:extLst>
           </p:cNvPr>
@@ -13283,7 +15403,94 @@
           <a:p>
             <a:r>
               <a:rPr lang="en-DE" dirty="0"/>
-              <a:t>State-Value Function</a:t>
+              <a:t>State and Action Values</a:t>
+            </a:r>
+          </a:p>
+        </p:txBody>
+      </p:sp>
+      <p:sp>
+        <p:nvSpPr>
+          <p:cNvPr id="3" name="Content Placeholder 2">
+            <a:extLst>
+              <a:ext uri="{FF2B5EF4-FFF2-40B4-BE49-F238E27FC236}">
+                <a16:creationId xmlns:a16="http://schemas.microsoft.com/office/drawing/2014/main" id="{110D05EE-A018-B8E8-4DF6-58F3862AED4C}"/>
+              </a:ext>
+            </a:extLst>
+          </p:cNvPr>
+          <p:cNvSpPr>
+            <a:spLocks noGrp="1"/>
+          </p:cNvSpPr>
+          <p:nvPr>
+            <p:ph idx="1"/>
+          </p:nvPr>
+        </p:nvSpPr>
+        <p:spPr/>
+        <p:txBody>
+          <a:bodyPr/>
+          <a:lstStyle/>
+          <a:p>
+            <a:pPr marL="0" indent="0">
+              <a:buNone/>
+            </a:pPr>
+            <a:r>
+              <a:rPr lang="en-GB" dirty="0"/>
+              <a:t>state/action value: total amount of expected future reward starting from given state/action (usually with discounting of later steps)</a:t>
+            </a:r>
+          </a:p>
+          <a:p>
+            <a:pPr marL="0" indent="0">
+              <a:buNone/>
+            </a:pPr>
+            <a:r>
+              <a:rPr lang="en-GB" dirty="0">
+                <a:sym typeface="Wingdings" pitchFamily="2" charset="2"/>
+              </a:rPr>
+              <a:t> </a:t>
+            </a:r>
+            <a:r>
+              <a:rPr lang="en-GB" dirty="0"/>
+              <a:t>indicating l</a:t>
+            </a:r>
+            <a:r>
+              <a:rPr lang="en-DE" dirty="0"/>
+              <a:t>ong-term desirability of states/actions</a:t>
+            </a:r>
+            <a:endParaRPr lang="en-GB" dirty="0"/>
+          </a:p>
+          <a:p>
+            <a:pPr marL="0" indent="0">
+              <a:buNone/>
+            </a:pPr>
+            <a:endParaRPr lang="en-GB" dirty="0"/>
+          </a:p>
+          <a:p>
+            <a:pPr marL="0" indent="0">
+              <a:buNone/>
+            </a:pPr>
+            <a:r>
+              <a:rPr lang="en-GB" dirty="0"/>
+              <a:t>main motivation: improve </a:t>
+            </a:r>
+            <a:r>
+              <a:rPr lang="en-DE" dirty="0"/>
+              <a:t>efficiency of search in policy space</a:t>
+            </a:r>
+          </a:p>
+          <a:p>
+            <a:pPr marL="0" indent="0">
+              <a:buNone/>
+            </a:pPr>
+            <a:r>
+              <a:rPr lang="en-DE" dirty="0"/>
+              <a:t>(</a:t>
+            </a:r>
+            <a:r>
+              <a:rPr lang="en-GB" dirty="0"/>
+              <a:t>for comparison: </a:t>
+            </a:r>
+            <a:r>
+              <a:rPr lang="en-DE" dirty="0"/>
+              <a:t>evolutionary methods search directly by evaluating entire policies)</a:t>
             </a:r>
           </a:p>
         </p:txBody>
@@ -13293,7 +15500,7 @@
           <p:cNvPr id="4" name="Slide Number Placeholder 3">
             <a:extLst>
               <a:ext uri="{FF2B5EF4-FFF2-40B4-BE49-F238E27FC236}">
-                <a16:creationId xmlns:a16="http://schemas.microsoft.com/office/drawing/2014/main" id="{1EFB1BDD-B851-5E2C-CF80-8DACCA77C54E}"/>
+                <a16:creationId xmlns:a16="http://schemas.microsoft.com/office/drawing/2014/main" id="{8F0C1062-4387-7EA8-856B-639628800E1C}"/>
               </a:ext>
             </a:extLst>
           </p:cNvPr>
@@ -13317,1882 +15524,10 @@
           </a:p>
         </p:txBody>
       </p:sp>
-      <p:sp>
-        <p:nvSpPr>
-          <p:cNvPr id="7" name="TextBox 6">
-            <a:extLst>
-              <a:ext uri="{FF2B5EF4-FFF2-40B4-BE49-F238E27FC236}">
-                <a16:creationId xmlns:a16="http://schemas.microsoft.com/office/drawing/2014/main" id="{F86A3A0F-766F-2A79-DF4F-182A1C27DFBE}"/>
-              </a:ext>
-            </a:extLst>
-          </p:cNvPr>
-          <p:cNvSpPr txBox="1"/>
-          <p:nvPr/>
-        </p:nvSpPr>
-        <p:spPr>
-          <a:xfrm>
-            <a:off x="4616664" y="1454224"/>
-            <a:ext cx="905569" cy="430887"/>
-          </a:xfrm>
-          <a:prstGeom prst="rect">
-            <a:avLst/>
-          </a:prstGeom>
-          <a:noFill/>
-        </p:spPr>
-        <p:txBody>
-          <a:bodyPr wrap="none" rtlCol="0">
-            <a:spAutoFit/>
-          </a:bodyPr>
-          <a:lstStyle/>
-          <a:p>
-            <a:r>
-              <a:rPr lang="en-DE" sz="2200" dirty="0"/>
-              <a:t>return</a:t>
-            </a:r>
-          </a:p>
-        </p:txBody>
-      </p:sp>
-      <p:sp>
-        <p:nvSpPr>
-          <p:cNvPr id="9" name="TextBox 8">
-            <a:extLst>
-              <a:ext uri="{FF2B5EF4-FFF2-40B4-BE49-F238E27FC236}">
-                <a16:creationId xmlns:a16="http://schemas.microsoft.com/office/drawing/2014/main" id="{F4C76EB1-E98E-D814-8DAE-F1B1E4629A94}"/>
-              </a:ext>
-            </a:extLst>
-          </p:cNvPr>
-          <p:cNvSpPr txBox="1"/>
-          <p:nvPr/>
-        </p:nvSpPr>
-        <p:spPr>
-          <a:xfrm>
-            <a:off x="8468235" y="1475244"/>
-            <a:ext cx="1679883" cy="430887"/>
-          </a:xfrm>
-          <a:prstGeom prst="rect">
-            <a:avLst/>
-          </a:prstGeom>
-          <a:noFill/>
-        </p:spPr>
-        <p:txBody>
-          <a:bodyPr wrap="none" rtlCol="0">
-            <a:spAutoFit/>
-          </a:bodyPr>
-          <a:lstStyle/>
-          <a:p>
-            <a:r>
-              <a:rPr lang="en-GB" sz="2200" dirty="0"/>
-              <a:t>d</a:t>
-            </a:r>
-            <a:r>
-              <a:rPr lang="en-DE" sz="2200" dirty="0"/>
-              <a:t>iscount rate</a:t>
-            </a:r>
-          </a:p>
-        </p:txBody>
-      </p:sp>
-      <p:sp>
-        <p:nvSpPr>
-          <p:cNvPr id="13" name="TextBox 12">
-            <a:extLst>
-              <a:ext uri="{FF2B5EF4-FFF2-40B4-BE49-F238E27FC236}">
-                <a16:creationId xmlns:a16="http://schemas.microsoft.com/office/drawing/2014/main" id="{B8E4BCE3-0435-7B93-69AA-E2F22458853D}"/>
-              </a:ext>
-            </a:extLst>
-          </p:cNvPr>
-          <p:cNvSpPr txBox="1"/>
-          <p:nvPr/>
-        </p:nvSpPr>
-        <p:spPr>
-          <a:xfrm>
-            <a:off x="8468234" y="4906378"/>
-            <a:ext cx="2885565" cy="769441"/>
-          </a:xfrm>
-          <a:prstGeom prst="rect">
-            <a:avLst/>
-          </a:prstGeom>
-          <a:noFill/>
-        </p:spPr>
-        <p:txBody>
-          <a:bodyPr wrap="square" rtlCol="0">
-            <a:spAutoFit/>
-          </a:bodyPr>
-          <a:lstStyle/>
-          <a:p>
-            <a:r>
-              <a:rPr lang="en-DE" sz="2200" dirty="0"/>
-              <a:t>Bellman (expectation) equation: recursion</a:t>
-            </a:r>
-          </a:p>
-        </p:txBody>
-      </p:sp>
-      <p:sp>
-        <p:nvSpPr>
-          <p:cNvPr id="15" name="TextBox 14">
-            <a:extLst>
-              <a:ext uri="{FF2B5EF4-FFF2-40B4-BE49-F238E27FC236}">
-                <a16:creationId xmlns:a16="http://schemas.microsoft.com/office/drawing/2014/main" id="{35D9E7E4-E111-5331-39DB-7541E009D843}"/>
-              </a:ext>
-            </a:extLst>
-          </p:cNvPr>
-          <p:cNvSpPr txBox="1"/>
-          <p:nvPr/>
-        </p:nvSpPr>
-        <p:spPr>
-          <a:xfrm>
-            <a:off x="571308" y="4877089"/>
-            <a:ext cx="3138844" cy="1107996"/>
-          </a:xfrm>
-          <a:prstGeom prst="rect">
-            <a:avLst/>
-          </a:prstGeom>
-          <a:noFill/>
-          <a:ln>
-            <a:solidFill>
-              <a:schemeClr val="tx1"/>
-            </a:solidFill>
-          </a:ln>
-        </p:spPr>
-        <p:txBody>
-          <a:bodyPr wrap="square" rtlCol="0">
-            <a:spAutoFit/>
-          </a:bodyPr>
-          <a:lstStyle/>
-          <a:p>
-            <a:r>
-              <a:rPr lang="en-GB" sz="2200" dirty="0"/>
-              <a:t>p</a:t>
-            </a:r>
-            <a:r>
-              <a:rPr lang="en-DE" sz="2200" dirty="0"/>
-              <a:t>olicy: probabilitiy to take specific action being in a given state</a:t>
-            </a:r>
-            <a:endParaRPr lang="en-DE" sz="2200" i="1" dirty="0"/>
-          </a:p>
-        </p:txBody>
-      </p:sp>
-      <mc:AlternateContent xmlns:mc="http://schemas.openxmlformats.org/markup-compatibility/2006" xmlns:a14="http://schemas.microsoft.com/office/drawing/2010/main">
-        <mc:Choice Requires="a14">
-          <p:sp>
-            <p:nvSpPr>
-              <p:cNvPr id="17" name="TextBox 16">
-                <a:extLst>
-                  <a:ext uri="{FF2B5EF4-FFF2-40B4-BE49-F238E27FC236}">
-                    <a16:creationId xmlns:a16="http://schemas.microsoft.com/office/drawing/2014/main" id="{4A9A62D7-75B9-BE74-76EF-64C53C559BFB}"/>
-                  </a:ext>
-                </a:extLst>
-              </p:cNvPr>
-              <p:cNvSpPr txBox="1"/>
-              <p:nvPr/>
-            </p:nvSpPr>
-            <p:spPr>
-              <a:xfrm>
-                <a:off x="4117036" y="4877089"/>
-                <a:ext cx="4196646" cy="1154355"/>
-              </a:xfrm>
-              <a:prstGeom prst="rect">
-                <a:avLst/>
-              </a:prstGeom>
-              <a:noFill/>
-              <a:ln>
-                <a:solidFill>
-                  <a:schemeClr val="tx1"/>
-                </a:solidFill>
-              </a:ln>
-            </p:spPr>
-            <p:txBody>
-              <a:bodyPr wrap="square" rtlCol="0">
-                <a:spAutoFit/>
-              </a:bodyPr>
-              <a:lstStyle/>
-              <a:p>
-                <a:r>
-                  <a:rPr lang="en-GB" sz="2200" dirty="0"/>
-                  <a:t>t</a:t>
-                </a:r>
-                <a:r>
-                  <a:rPr lang="en-DE" sz="2200" dirty="0"/>
-                  <a:t>ransition probability (depending on environment) from state </a:t>
-                </a:r>
-                <a14:m>
-                  <m:oMath xmlns:m="http://schemas.openxmlformats.org/officeDocument/2006/math">
-                    <m:sSub>
-                      <m:sSubPr>
-                        <m:ctrlPr>
-                          <a:rPr lang="en-US" sz="2400" b="0" i="1" smtClean="0">
-                            <a:latin typeface="Cambria Math" panose="02040503050406030204" pitchFamily="18" charset="0"/>
-                            <a:ea typeface="Cambria Math" panose="02040503050406030204" pitchFamily="18" charset="0"/>
-                          </a:rPr>
-                        </m:ctrlPr>
-                      </m:sSubPr>
-                      <m:e>
-                        <m:r>
-                          <a:rPr lang="en-US" sz="2400" b="0" i="1" smtClean="0">
-                            <a:latin typeface="Cambria Math" panose="02040503050406030204" pitchFamily="18" charset="0"/>
-                            <a:ea typeface="Cambria Math" panose="02040503050406030204" pitchFamily="18" charset="0"/>
-                          </a:rPr>
-                          <m:t>𝑠</m:t>
-                        </m:r>
-                      </m:e>
-                      <m:sub>
-                        <m:r>
-                          <a:rPr lang="en-US" sz="2400" b="0" i="1" smtClean="0">
-                            <a:latin typeface="Cambria Math" panose="02040503050406030204" pitchFamily="18" charset="0"/>
-                            <a:ea typeface="Cambria Math" panose="02040503050406030204" pitchFamily="18" charset="0"/>
-                          </a:rPr>
-                          <m:t>𝑡</m:t>
-                        </m:r>
-                      </m:sub>
-                    </m:sSub>
-                  </m:oMath>
-                </a14:m>
-                <a:r>
-                  <a:rPr lang="en-DE" sz="2200" dirty="0"/>
-                  <a:t> to state </a:t>
-                </a:r>
-                <a14:m>
-                  <m:oMath xmlns:m="http://schemas.openxmlformats.org/officeDocument/2006/math">
-                    <m:sSubSup>
-                      <m:sSubSupPr>
-                        <m:ctrlPr>
-                          <a:rPr lang="en-US" sz="2400" i="1">
-                            <a:latin typeface="Cambria Math" panose="02040503050406030204" pitchFamily="18" charset="0"/>
-                            <a:ea typeface="Cambria Math" panose="02040503050406030204" pitchFamily="18" charset="0"/>
-                          </a:rPr>
-                        </m:ctrlPr>
-                      </m:sSubSupPr>
-                      <m:e>
-                        <m:r>
-                          <a:rPr lang="en-US" sz="2400" i="1">
-                            <a:latin typeface="Cambria Math" panose="02040503050406030204" pitchFamily="18" charset="0"/>
-                            <a:ea typeface="Cambria Math" panose="02040503050406030204" pitchFamily="18" charset="0"/>
-                          </a:rPr>
-                          <m:t>𝑠</m:t>
-                        </m:r>
-                      </m:e>
-                      <m:sub>
-                        <m:r>
-                          <a:rPr lang="en-US" sz="2400" i="1">
-                            <a:latin typeface="Cambria Math" panose="02040503050406030204" pitchFamily="18" charset="0"/>
-                            <a:ea typeface="Cambria Math" panose="02040503050406030204" pitchFamily="18" charset="0"/>
-                          </a:rPr>
-                          <m:t>𝑡</m:t>
-                        </m:r>
-                        <m:r>
-                          <a:rPr lang="en-US" sz="2400" i="1">
-                            <a:latin typeface="Cambria Math" panose="02040503050406030204" pitchFamily="18" charset="0"/>
-                            <a:ea typeface="Cambria Math" panose="02040503050406030204" pitchFamily="18" charset="0"/>
-                          </a:rPr>
-                          <m:t>+1</m:t>
-                        </m:r>
-                      </m:sub>
-                      <m:sup>
-                        <m:r>
-                          <a:rPr lang="en-US" sz="2400" i="1">
-                            <a:latin typeface="Cambria Math" panose="02040503050406030204" pitchFamily="18" charset="0"/>
-                            <a:ea typeface="Cambria Math" panose="02040503050406030204" pitchFamily="18" charset="0"/>
-                          </a:rPr>
-                          <m:t>′</m:t>
-                        </m:r>
-                      </m:sup>
-                    </m:sSubSup>
-                    <m:r>
-                      <a:rPr lang="en-US" sz="2400" i="1">
-                        <a:latin typeface="Cambria Math" panose="02040503050406030204" pitchFamily="18" charset="0"/>
-                        <a:ea typeface="Cambria Math" panose="02040503050406030204" pitchFamily="18" charset="0"/>
-                      </a:rPr>
-                      <m:t> </m:t>
-                    </m:r>
-                  </m:oMath>
-                </a14:m>
-                <a:r>
-                  <a:rPr lang="en-DE" sz="2200" dirty="0"/>
-                  <a:t>for a given action</a:t>
-                </a:r>
-              </a:p>
-            </p:txBody>
-          </p:sp>
-        </mc:Choice>
-        <mc:Fallback xmlns="">
-          <p:sp>
-            <p:nvSpPr>
-              <p:cNvPr id="17" name="TextBox 16">
-                <a:extLst>
-                  <a:ext uri="{FF2B5EF4-FFF2-40B4-BE49-F238E27FC236}">
-                    <a16:creationId xmlns:a16="http://schemas.microsoft.com/office/drawing/2014/main" id="{4A9A62D7-75B9-BE74-76EF-64C53C559BFB}"/>
-                  </a:ext>
-                </a:extLst>
-              </p:cNvPr>
-              <p:cNvSpPr txBox="1">
-                <a:spLocks noRot="1" noChangeAspect="1" noMove="1" noResize="1" noEditPoints="1" noAdjustHandles="1" noChangeArrowheads="1" noChangeShapeType="1" noTextEdit="1"/>
-              </p:cNvSpPr>
-              <p:nvPr/>
-            </p:nvSpPr>
-            <p:spPr>
-              <a:xfrm>
-                <a:off x="4117036" y="4877089"/>
-                <a:ext cx="4196646" cy="1154355"/>
-              </a:xfrm>
-              <a:prstGeom prst="rect">
-                <a:avLst/>
-              </a:prstGeom>
-              <a:blipFill>
-                <a:blip r:embed="rId2"/>
-                <a:stretch>
-                  <a:fillRect l="-1502" t="-2151" r="-601" b="-8602"/>
-                </a:stretch>
-              </a:blipFill>
-              <a:ln>
-                <a:solidFill>
-                  <a:schemeClr val="tx1"/>
-                </a:solidFill>
-              </a:ln>
-            </p:spPr>
-            <p:txBody>
-              <a:bodyPr/>
-              <a:lstStyle/>
-              <a:p>
-                <a:r>
-                  <a:rPr lang="de-DE">
-                    <a:noFill/>
-                  </a:rPr>
-                  <a:t> </a:t>
-                </a:r>
-              </a:p>
-            </p:txBody>
-          </p:sp>
-        </mc:Fallback>
-      </mc:AlternateContent>
-      <mc:AlternateContent xmlns:mc="http://schemas.openxmlformats.org/markup-compatibility/2006" xmlns:a14="http://schemas.microsoft.com/office/drawing/2010/main">
-        <mc:Choice Requires="a14">
-          <p:sp>
-            <p:nvSpPr>
-              <p:cNvPr id="3" name="TextBox 2">
-                <a:extLst>
-                  <a:ext uri="{FF2B5EF4-FFF2-40B4-BE49-F238E27FC236}">
-                    <a16:creationId xmlns:a16="http://schemas.microsoft.com/office/drawing/2014/main" id="{9126A8EE-7175-F901-57A1-E7EBCCAAE429}"/>
-                  </a:ext>
-                </a:extLst>
-              </p:cNvPr>
-              <p:cNvSpPr txBox="1"/>
-              <p:nvPr/>
-            </p:nvSpPr>
-            <p:spPr>
-              <a:xfrm>
-                <a:off x="1634063" y="2133759"/>
-                <a:ext cx="9016123" cy="2331920"/>
-              </a:xfrm>
-              <a:prstGeom prst="rect">
-                <a:avLst/>
-              </a:prstGeom>
-              <a:noFill/>
-            </p:spPr>
-            <p:txBody>
-              <a:bodyPr wrap="none" lIns="0" tIns="0" rIns="0" bIns="0" rtlCol="0">
-                <a:spAutoFit/>
-              </a:bodyPr>
-              <a:lstStyle/>
-              <a:p>
-                <a:pPr/>
-                <a14:m>
-                  <m:oMathPara xmlns:m="http://schemas.openxmlformats.org/officeDocument/2006/math">
-                    <m:oMathParaPr>
-                      <m:jc m:val="centerGroup"/>
-                    </m:oMathParaPr>
-                    <m:oMath xmlns:m="http://schemas.openxmlformats.org/officeDocument/2006/math">
-                      <m:sSub>
-                        <m:sSubPr>
-                          <m:ctrlPr>
-                            <a:rPr lang="en-DE" sz="2800" i="1" smtClean="0">
-                              <a:latin typeface="Cambria Math" panose="02040503050406030204" pitchFamily="18" charset="0"/>
-                            </a:rPr>
-                          </m:ctrlPr>
-                        </m:sSubPr>
-                        <m:e>
-                          <m:r>
-                            <a:rPr lang="en-US" sz="2800" b="0" i="1" smtClean="0">
-                              <a:latin typeface="Cambria Math" panose="02040503050406030204" pitchFamily="18" charset="0"/>
-                            </a:rPr>
-                            <m:t>𝑣</m:t>
-                          </m:r>
-                        </m:e>
-                        <m:sub>
-                          <m:r>
-                            <a:rPr lang="en-DE" sz="2800" i="1" smtClean="0">
-                              <a:latin typeface="Cambria Math" panose="02040503050406030204" pitchFamily="18" charset="0"/>
-                              <a:ea typeface="Cambria Math" panose="02040503050406030204" pitchFamily="18" charset="0"/>
-                            </a:rPr>
-                            <m:t>𝜋</m:t>
-                          </m:r>
-                        </m:sub>
-                      </m:sSub>
-                      <m:d>
-                        <m:dPr>
-                          <m:ctrlPr>
-                            <a:rPr lang="en-DE" sz="2800" i="1" smtClean="0">
-                              <a:latin typeface="Cambria Math" panose="02040503050406030204" pitchFamily="18" charset="0"/>
-                            </a:rPr>
-                          </m:ctrlPr>
-                        </m:dPr>
-                        <m:e>
-                          <m:sSub>
-                            <m:sSubPr>
-                              <m:ctrlPr>
-                                <a:rPr lang="en-DE" sz="2800" i="1" smtClean="0">
-                                  <a:latin typeface="Cambria Math" panose="02040503050406030204" pitchFamily="18" charset="0"/>
-                                </a:rPr>
-                              </m:ctrlPr>
-                            </m:sSubPr>
-                            <m:e>
-                              <m:r>
-                                <a:rPr lang="en-US" sz="2800" b="0" i="1" smtClean="0">
-                                  <a:latin typeface="Cambria Math" panose="02040503050406030204" pitchFamily="18" charset="0"/>
-                                </a:rPr>
-                                <m:t>𝑠</m:t>
-                              </m:r>
-                            </m:e>
-                            <m:sub>
-                              <m:r>
-                                <a:rPr lang="en-US" sz="2800" b="0" i="1" smtClean="0">
-                                  <a:latin typeface="Cambria Math" panose="02040503050406030204" pitchFamily="18" charset="0"/>
-                                </a:rPr>
-                                <m:t>𝑡</m:t>
-                              </m:r>
-                            </m:sub>
-                          </m:sSub>
-                        </m:e>
-                      </m:d>
-                      <m:r>
-                        <a:rPr lang="en-US" sz="2800" b="0" i="1" smtClean="0">
-                          <a:latin typeface="Cambria Math" panose="02040503050406030204" pitchFamily="18" charset="0"/>
-                        </a:rPr>
-                        <m:t>=</m:t>
-                      </m:r>
-                      <m:sSub>
-                        <m:sSubPr>
-                          <m:ctrlPr>
-                            <a:rPr lang="en-US" sz="2800" b="0" i="1" smtClean="0">
-                              <a:latin typeface="Cambria Math" panose="02040503050406030204" pitchFamily="18" charset="0"/>
-                            </a:rPr>
-                          </m:ctrlPr>
-                        </m:sSubPr>
-                        <m:e>
-                          <m:r>
-                            <a:rPr lang="en-US" sz="2800" b="0" i="1" smtClean="0">
-                              <a:latin typeface="Cambria Math" panose="02040503050406030204" pitchFamily="18" charset="0"/>
-                            </a:rPr>
-                            <m:t>𝐸</m:t>
-                          </m:r>
-                        </m:e>
-                        <m:sub>
-                          <m:r>
-                            <a:rPr lang="en-US" sz="2800" b="0" i="1" smtClean="0">
-                              <a:latin typeface="Cambria Math" panose="02040503050406030204" pitchFamily="18" charset="0"/>
-                              <a:ea typeface="Cambria Math" panose="02040503050406030204" pitchFamily="18" charset="0"/>
-                            </a:rPr>
-                            <m:t>𝜋</m:t>
-                          </m:r>
-                        </m:sub>
-                      </m:sSub>
-                      <m:d>
-                        <m:dPr>
-                          <m:begChr m:val="["/>
-                          <m:endChr m:val="]"/>
-                          <m:ctrlPr>
-                            <a:rPr lang="en-US" sz="2800" b="0" i="1" smtClean="0">
-                              <a:latin typeface="Cambria Math" panose="02040503050406030204" pitchFamily="18" charset="0"/>
-                            </a:rPr>
-                          </m:ctrlPr>
-                        </m:dPr>
-                        <m:e>
-                          <m:nary>
-                            <m:naryPr>
-                              <m:chr m:val="∑"/>
-                              <m:ctrlPr>
-                                <a:rPr lang="en-US" sz="2800" b="0" i="1" smtClean="0">
-                                  <a:latin typeface="Cambria Math" panose="02040503050406030204" pitchFamily="18" charset="0"/>
-                                </a:rPr>
-                              </m:ctrlPr>
-                            </m:naryPr>
-                            <m:sub>
-                              <m:r>
-                                <m:rPr>
-                                  <m:brk m:alnAt="23"/>
-                                </m:rPr>
-                                <a:rPr lang="en-US" sz="2800" b="0" i="1" smtClean="0">
-                                  <a:latin typeface="Cambria Math" panose="02040503050406030204" pitchFamily="18" charset="0"/>
-                                </a:rPr>
-                                <m:t>𝑘</m:t>
-                              </m:r>
-                              <m:r>
-                                <a:rPr lang="en-US" sz="2800" b="0" i="1" smtClean="0">
-                                  <a:latin typeface="Cambria Math" panose="02040503050406030204" pitchFamily="18" charset="0"/>
-                                </a:rPr>
-                                <m:t>=</m:t>
-                              </m:r>
-                              <m:r>
-                                <a:rPr lang="en-US" sz="2800" b="0" i="1" smtClean="0">
-                                  <a:latin typeface="Cambria Math" panose="02040503050406030204" pitchFamily="18" charset="0"/>
-                                </a:rPr>
-                                <m:t>𝑜</m:t>
-                              </m:r>
-                            </m:sub>
-                            <m:sup>
-                              <m:r>
-                                <a:rPr lang="en-US" sz="2800" b="0" i="1" smtClean="0">
-                                  <a:latin typeface="Cambria Math" panose="02040503050406030204" pitchFamily="18" charset="0"/>
-                                  <a:ea typeface="Cambria Math" panose="02040503050406030204" pitchFamily="18" charset="0"/>
-                                </a:rPr>
-                                <m:t>∞</m:t>
-                              </m:r>
-                            </m:sup>
-                            <m:e>
-                              <m:sSup>
-                                <m:sSupPr>
-                                  <m:ctrlPr>
-                                    <a:rPr lang="en-US" sz="2800" b="0" i="1" smtClean="0">
-                                      <a:latin typeface="Cambria Math" panose="02040503050406030204" pitchFamily="18" charset="0"/>
-                                    </a:rPr>
-                                  </m:ctrlPr>
-                                </m:sSupPr>
-                                <m:e>
-                                  <m:r>
-                                    <a:rPr lang="en-US" sz="2800" b="0" i="1" smtClean="0">
-                                      <a:latin typeface="Cambria Math" panose="02040503050406030204" pitchFamily="18" charset="0"/>
-                                      <a:ea typeface="Cambria Math" panose="02040503050406030204" pitchFamily="18" charset="0"/>
-                                    </a:rPr>
-                                    <m:t>𝛾</m:t>
-                                  </m:r>
-                                </m:e>
-                                <m:sup>
-                                  <m:r>
-                                    <a:rPr lang="en-US" sz="2800" b="0" i="1" smtClean="0">
-                                      <a:latin typeface="Cambria Math" panose="02040503050406030204" pitchFamily="18" charset="0"/>
-                                    </a:rPr>
-                                    <m:t>𝑘</m:t>
-                                  </m:r>
-                                </m:sup>
-                              </m:sSup>
-                              <m:sSub>
-                                <m:sSubPr>
-                                  <m:ctrlPr>
-                                    <a:rPr lang="en-US" sz="2800" b="0" i="1" smtClean="0">
-                                      <a:latin typeface="Cambria Math" panose="02040503050406030204" pitchFamily="18" charset="0"/>
-                                    </a:rPr>
-                                  </m:ctrlPr>
-                                </m:sSubPr>
-                                <m:e>
-                                  <m:r>
-                                    <a:rPr lang="en-US" sz="2800" b="0" i="1" smtClean="0">
-                                      <a:latin typeface="Cambria Math" panose="02040503050406030204" pitchFamily="18" charset="0"/>
-                                    </a:rPr>
-                                    <m:t>𝑟</m:t>
-                                  </m:r>
-                                </m:e>
-                                <m:sub>
-                                  <m:r>
-                                    <a:rPr lang="en-US" sz="2800" b="0" i="1" smtClean="0">
-                                      <a:latin typeface="Cambria Math" panose="02040503050406030204" pitchFamily="18" charset="0"/>
-                                    </a:rPr>
-                                    <m:t>𝑡</m:t>
-                                  </m:r>
-                                  <m:r>
-                                    <a:rPr lang="en-US" sz="2800" b="0" i="1" smtClean="0">
-                                      <a:latin typeface="Cambria Math" panose="02040503050406030204" pitchFamily="18" charset="0"/>
-                                    </a:rPr>
-                                    <m:t>+</m:t>
-                                  </m:r>
-                                  <m:r>
-                                    <a:rPr lang="en-US" sz="2800" b="0" i="1" smtClean="0">
-                                      <a:latin typeface="Cambria Math" panose="02040503050406030204" pitchFamily="18" charset="0"/>
-                                    </a:rPr>
-                                    <m:t>𝑘</m:t>
-                                  </m:r>
-                                  <m:r>
-                                    <a:rPr lang="en-US" sz="2800" b="0" i="1" smtClean="0">
-                                      <a:latin typeface="Cambria Math" panose="02040503050406030204" pitchFamily="18" charset="0"/>
-                                    </a:rPr>
-                                    <m:t>+1</m:t>
-                                  </m:r>
-                                </m:sub>
-                              </m:sSub>
-                            </m:e>
-                          </m:nary>
-                          <m:r>
-                            <a:rPr lang="en-US" sz="2800" b="0" i="1" smtClean="0">
-                              <a:latin typeface="Cambria Math" panose="02040503050406030204" pitchFamily="18" charset="0"/>
-                            </a:rPr>
-                            <m:t>|</m:t>
-                          </m:r>
-                          <m:sSub>
-                            <m:sSubPr>
-                              <m:ctrlPr>
-                                <a:rPr lang="en-US" sz="2800" b="0" i="1" smtClean="0">
-                                  <a:latin typeface="Cambria Math" panose="02040503050406030204" pitchFamily="18" charset="0"/>
-                                </a:rPr>
-                              </m:ctrlPr>
-                            </m:sSubPr>
-                            <m:e>
-                              <m:r>
-                                <a:rPr lang="en-US" sz="2800" b="0" i="1" smtClean="0">
-                                  <a:latin typeface="Cambria Math" panose="02040503050406030204" pitchFamily="18" charset="0"/>
-                                </a:rPr>
-                                <m:t>𝑠</m:t>
-                              </m:r>
-                            </m:e>
-                            <m:sub>
-                              <m:r>
-                                <a:rPr lang="en-US" sz="2800" b="0" i="1" smtClean="0">
-                                  <a:latin typeface="Cambria Math" panose="02040503050406030204" pitchFamily="18" charset="0"/>
-                                </a:rPr>
-                                <m:t>𝑡</m:t>
-                              </m:r>
-                            </m:sub>
-                          </m:sSub>
-                        </m:e>
-                      </m:d>
-                      <m:r>
-                        <a:rPr lang="en-US" sz="2800" b="0" i="1" smtClean="0">
-                          <a:latin typeface="Cambria Math" panose="02040503050406030204" pitchFamily="18" charset="0"/>
-                        </a:rPr>
-                        <m:t>=</m:t>
-                      </m:r>
-                      <m:sSub>
-                        <m:sSubPr>
-                          <m:ctrlPr>
-                            <a:rPr lang="en-US" sz="2800" b="0" i="1" smtClean="0">
-                              <a:latin typeface="Cambria Math" panose="02040503050406030204" pitchFamily="18" charset="0"/>
-                            </a:rPr>
-                          </m:ctrlPr>
-                        </m:sSubPr>
-                        <m:e>
-                          <m:r>
-                            <a:rPr lang="en-US" sz="2800" b="0" i="1" smtClean="0">
-                              <a:latin typeface="Cambria Math" panose="02040503050406030204" pitchFamily="18" charset="0"/>
-                            </a:rPr>
-                            <m:t>𝐸</m:t>
-                          </m:r>
-                        </m:e>
-                        <m:sub>
-                          <m:r>
-                            <a:rPr lang="en-US" sz="2800" b="0" i="1" smtClean="0">
-                              <a:latin typeface="Cambria Math" panose="02040503050406030204" pitchFamily="18" charset="0"/>
-                              <a:ea typeface="Cambria Math" panose="02040503050406030204" pitchFamily="18" charset="0"/>
-                            </a:rPr>
-                            <m:t>𝜋</m:t>
-                          </m:r>
-                        </m:sub>
-                      </m:sSub>
-                      <m:d>
-                        <m:dPr>
-                          <m:begChr m:val="["/>
-                          <m:endChr m:val="]"/>
-                          <m:ctrlPr>
-                            <a:rPr lang="en-US" sz="2800" b="0" i="1" smtClean="0">
-                              <a:latin typeface="Cambria Math" panose="02040503050406030204" pitchFamily="18" charset="0"/>
-                            </a:rPr>
-                          </m:ctrlPr>
-                        </m:dPr>
-                        <m:e>
-                          <m:sSub>
-                            <m:sSubPr>
-                              <m:ctrlPr>
-                                <a:rPr lang="en-US" sz="2800" b="0" i="1" smtClean="0">
-                                  <a:latin typeface="Cambria Math" panose="02040503050406030204" pitchFamily="18" charset="0"/>
-                                </a:rPr>
-                              </m:ctrlPr>
-                            </m:sSubPr>
-                            <m:e>
-                              <m:r>
-                                <a:rPr lang="en-US" sz="2800" b="0" i="1" smtClean="0">
-                                  <a:latin typeface="Cambria Math" panose="02040503050406030204" pitchFamily="18" charset="0"/>
-                                </a:rPr>
-                                <m:t>𝑟</m:t>
-                              </m:r>
-                            </m:e>
-                            <m:sub>
-                              <m:r>
-                                <a:rPr lang="en-US" sz="2800" b="0" i="1" smtClean="0">
-                                  <a:latin typeface="Cambria Math" panose="02040503050406030204" pitchFamily="18" charset="0"/>
-                                </a:rPr>
-                                <m:t>𝑡</m:t>
-                              </m:r>
-                              <m:r>
-                                <a:rPr lang="en-US" sz="2800" b="0" i="1" smtClean="0">
-                                  <a:latin typeface="Cambria Math" panose="02040503050406030204" pitchFamily="18" charset="0"/>
-                                </a:rPr>
-                                <m:t>+1</m:t>
-                              </m:r>
-                            </m:sub>
-                          </m:sSub>
-                          <m:r>
-                            <a:rPr lang="en-US" sz="2800" b="0" i="1" smtClean="0">
-                              <a:latin typeface="Cambria Math" panose="02040503050406030204" pitchFamily="18" charset="0"/>
-                            </a:rPr>
-                            <m:t>+</m:t>
-                          </m:r>
-                          <m:r>
-                            <a:rPr lang="en-US" sz="2800" b="0" i="1" smtClean="0">
-                              <a:latin typeface="Cambria Math" panose="02040503050406030204" pitchFamily="18" charset="0"/>
-                              <a:ea typeface="Cambria Math" panose="02040503050406030204" pitchFamily="18" charset="0"/>
-                            </a:rPr>
-                            <m:t>𝛾</m:t>
-                          </m:r>
-                          <m:sSub>
-                            <m:sSubPr>
-                              <m:ctrlPr>
-                                <a:rPr lang="en-US" sz="2800" b="0" i="1" smtClean="0">
-                                  <a:latin typeface="Cambria Math" panose="02040503050406030204" pitchFamily="18" charset="0"/>
-                                  <a:ea typeface="Cambria Math" panose="02040503050406030204" pitchFamily="18" charset="0"/>
-                                </a:rPr>
-                              </m:ctrlPr>
-                            </m:sSubPr>
-                            <m:e>
-                              <m:r>
-                                <a:rPr lang="en-US" sz="2800" b="0" i="1" smtClean="0">
-                                  <a:latin typeface="Cambria Math" panose="02040503050406030204" pitchFamily="18" charset="0"/>
-                                  <a:ea typeface="Cambria Math" panose="02040503050406030204" pitchFamily="18" charset="0"/>
-                                </a:rPr>
-                                <m:t>𝑣</m:t>
-                              </m:r>
-                            </m:e>
-                            <m:sub>
-                              <m:r>
-                                <a:rPr lang="en-US" sz="2800" b="0" i="1" smtClean="0">
-                                  <a:latin typeface="Cambria Math" panose="02040503050406030204" pitchFamily="18" charset="0"/>
-                                  <a:ea typeface="Cambria Math" panose="02040503050406030204" pitchFamily="18" charset="0"/>
-                                </a:rPr>
-                                <m:t>𝜋</m:t>
-                              </m:r>
-                            </m:sub>
-                          </m:sSub>
-                          <m:d>
-                            <m:dPr>
-                              <m:ctrlPr>
-                                <a:rPr lang="en-US" sz="2800" b="0" i="1" smtClean="0">
-                                  <a:latin typeface="Cambria Math" panose="02040503050406030204" pitchFamily="18" charset="0"/>
-                                  <a:ea typeface="Cambria Math" panose="02040503050406030204" pitchFamily="18" charset="0"/>
-                                </a:rPr>
-                              </m:ctrlPr>
-                            </m:dPr>
-                            <m:e>
-                              <m:sSub>
-                                <m:sSubPr>
-                                  <m:ctrlPr>
-                                    <a:rPr lang="en-US" sz="2800" b="0" i="1" smtClean="0">
-                                      <a:latin typeface="Cambria Math" panose="02040503050406030204" pitchFamily="18" charset="0"/>
-                                      <a:ea typeface="Cambria Math" panose="02040503050406030204" pitchFamily="18" charset="0"/>
-                                    </a:rPr>
-                                  </m:ctrlPr>
-                                </m:sSubPr>
-                                <m:e>
-                                  <m:r>
-                                    <a:rPr lang="en-US" sz="2800" b="0" i="1" smtClean="0">
-                                      <a:latin typeface="Cambria Math" panose="02040503050406030204" pitchFamily="18" charset="0"/>
-                                      <a:ea typeface="Cambria Math" panose="02040503050406030204" pitchFamily="18" charset="0"/>
-                                    </a:rPr>
-                                    <m:t>𝑠</m:t>
-                                  </m:r>
-                                </m:e>
-                                <m:sub>
-                                  <m:r>
-                                    <a:rPr lang="en-US" sz="2800" b="0" i="1" smtClean="0">
-                                      <a:latin typeface="Cambria Math" panose="02040503050406030204" pitchFamily="18" charset="0"/>
-                                      <a:ea typeface="Cambria Math" panose="02040503050406030204" pitchFamily="18" charset="0"/>
-                                    </a:rPr>
-                                    <m:t>𝑡</m:t>
-                                  </m:r>
-                                  <m:r>
-                                    <a:rPr lang="en-US" sz="2800" b="0" i="1" smtClean="0">
-                                      <a:latin typeface="Cambria Math" panose="02040503050406030204" pitchFamily="18" charset="0"/>
-                                      <a:ea typeface="Cambria Math" panose="02040503050406030204" pitchFamily="18" charset="0"/>
-                                    </a:rPr>
-                                    <m:t>+1</m:t>
-                                  </m:r>
-                                </m:sub>
-                              </m:sSub>
-                            </m:e>
-                          </m:d>
-                          <m:r>
-                            <a:rPr lang="en-US" sz="2800" b="0" i="1" smtClean="0">
-                              <a:latin typeface="Cambria Math" panose="02040503050406030204" pitchFamily="18" charset="0"/>
-                              <a:ea typeface="Cambria Math" panose="02040503050406030204" pitchFamily="18" charset="0"/>
-                            </a:rPr>
-                            <m:t>|</m:t>
-                          </m:r>
-                          <m:sSub>
-                            <m:sSubPr>
-                              <m:ctrlPr>
-                                <a:rPr lang="en-US" sz="2800" b="0" i="1" smtClean="0">
-                                  <a:latin typeface="Cambria Math" panose="02040503050406030204" pitchFamily="18" charset="0"/>
-                                  <a:ea typeface="Cambria Math" panose="02040503050406030204" pitchFamily="18" charset="0"/>
-                                </a:rPr>
-                              </m:ctrlPr>
-                            </m:sSubPr>
-                            <m:e>
-                              <m:r>
-                                <a:rPr lang="en-US" sz="2800" b="0" i="1" smtClean="0">
-                                  <a:latin typeface="Cambria Math" panose="02040503050406030204" pitchFamily="18" charset="0"/>
-                                  <a:ea typeface="Cambria Math" panose="02040503050406030204" pitchFamily="18" charset="0"/>
-                                </a:rPr>
-                                <m:t>𝑠</m:t>
-                              </m:r>
-                            </m:e>
-                            <m:sub>
-                              <m:r>
-                                <a:rPr lang="en-US" sz="2800" b="0" i="1" smtClean="0">
-                                  <a:latin typeface="Cambria Math" panose="02040503050406030204" pitchFamily="18" charset="0"/>
-                                  <a:ea typeface="Cambria Math" panose="02040503050406030204" pitchFamily="18" charset="0"/>
-                                </a:rPr>
-                                <m:t>𝑡</m:t>
-                              </m:r>
-                            </m:sub>
-                          </m:sSub>
-                        </m:e>
-                      </m:d>
-                    </m:oMath>
-                  </m:oMathPara>
-                </a14:m>
-                <a:endParaRPr lang="en-US" sz="2800" b="0" i="1" dirty="0">
-                  <a:latin typeface="Cambria Math" panose="02040503050406030204" pitchFamily="18" charset="0"/>
-                </a:endParaRPr>
-              </a:p>
-              <a:p>
-                <a:pPr/>
-                <a14:m>
-                  <m:oMathPara xmlns:m="http://schemas.openxmlformats.org/officeDocument/2006/math">
-                    <m:oMathParaPr>
-                      <m:jc m:val="centerGroup"/>
-                    </m:oMathParaPr>
-                    <m:oMath xmlns:m="http://schemas.openxmlformats.org/officeDocument/2006/math">
-                      <m:r>
-                        <a:rPr lang="en-US" sz="2800" b="0" i="1" smtClean="0">
-                          <a:latin typeface="Cambria Math" panose="02040503050406030204" pitchFamily="18" charset="0"/>
-                        </a:rPr>
-                        <m:t>=</m:t>
-                      </m:r>
-                      <m:nary>
-                        <m:naryPr>
-                          <m:chr m:val="∑"/>
-                          <m:supHide m:val="on"/>
-                          <m:ctrlPr>
-                            <a:rPr lang="en-US" sz="2800" b="0" i="1" smtClean="0">
-                              <a:latin typeface="Cambria Math" panose="02040503050406030204" pitchFamily="18" charset="0"/>
-                            </a:rPr>
-                          </m:ctrlPr>
-                        </m:naryPr>
-                        <m:sub>
-                          <m:sSub>
-                            <m:sSubPr>
-                              <m:ctrlPr>
-                                <a:rPr lang="en-US" sz="2800" b="0" i="1" smtClean="0">
-                                  <a:latin typeface="Cambria Math" panose="02040503050406030204" pitchFamily="18" charset="0"/>
-                                </a:rPr>
-                              </m:ctrlPr>
-                            </m:sSubPr>
-                            <m:e>
-                              <m:r>
-                                <a:rPr lang="en-US" sz="2800" b="0" i="1" smtClean="0">
-                                  <a:latin typeface="Cambria Math" panose="02040503050406030204" pitchFamily="18" charset="0"/>
-                                </a:rPr>
-                                <m:t>𝑎</m:t>
-                              </m:r>
-                            </m:e>
-                            <m:sub>
-                              <m:r>
-                                <a:rPr lang="en-US" sz="2800" b="0" i="1" smtClean="0">
-                                  <a:latin typeface="Cambria Math" panose="02040503050406030204" pitchFamily="18" charset="0"/>
-                                </a:rPr>
-                                <m:t>𝑡</m:t>
-                              </m:r>
-                            </m:sub>
-                          </m:sSub>
-                        </m:sub>
-                        <m:sup/>
-                        <m:e>
-                          <m:r>
-                            <a:rPr lang="en-US" sz="2800" b="0" i="1" smtClean="0">
-                              <a:latin typeface="Cambria Math" panose="02040503050406030204" pitchFamily="18" charset="0"/>
-                              <a:ea typeface="Cambria Math" panose="02040503050406030204" pitchFamily="18" charset="0"/>
-                            </a:rPr>
-                            <m:t>𝜋</m:t>
-                          </m:r>
-                          <m:d>
-                            <m:dPr>
-                              <m:ctrlPr>
-                                <a:rPr lang="en-US" sz="2800" b="0" i="1" smtClean="0">
-                                  <a:latin typeface="Cambria Math" panose="02040503050406030204" pitchFamily="18" charset="0"/>
-                                  <a:ea typeface="Cambria Math" panose="02040503050406030204" pitchFamily="18" charset="0"/>
-                                </a:rPr>
-                              </m:ctrlPr>
-                            </m:dPr>
-                            <m:e>
-                              <m:sSub>
-                                <m:sSubPr>
-                                  <m:ctrlPr>
-                                    <a:rPr lang="en-US" sz="2800" b="0" i="1" smtClean="0">
-                                      <a:latin typeface="Cambria Math" panose="02040503050406030204" pitchFamily="18" charset="0"/>
-                                      <a:ea typeface="Cambria Math" panose="02040503050406030204" pitchFamily="18" charset="0"/>
-                                    </a:rPr>
-                                  </m:ctrlPr>
-                                </m:sSubPr>
-                                <m:e>
-                                  <m:r>
-                                    <a:rPr lang="en-US" sz="2800" b="0" i="1" smtClean="0">
-                                      <a:latin typeface="Cambria Math" panose="02040503050406030204" pitchFamily="18" charset="0"/>
-                                      <a:ea typeface="Cambria Math" panose="02040503050406030204" pitchFamily="18" charset="0"/>
-                                    </a:rPr>
-                                    <m:t>𝑎</m:t>
-                                  </m:r>
-                                </m:e>
-                                <m:sub>
-                                  <m:r>
-                                    <a:rPr lang="en-US" sz="2800" b="0" i="1" smtClean="0">
-                                      <a:latin typeface="Cambria Math" panose="02040503050406030204" pitchFamily="18" charset="0"/>
-                                      <a:ea typeface="Cambria Math" panose="02040503050406030204" pitchFamily="18" charset="0"/>
-                                    </a:rPr>
-                                    <m:t>𝑡</m:t>
-                                  </m:r>
-                                </m:sub>
-                              </m:sSub>
-                              <m:r>
-                                <a:rPr lang="en-US" sz="2800" b="0" i="1" smtClean="0">
-                                  <a:latin typeface="Cambria Math" panose="02040503050406030204" pitchFamily="18" charset="0"/>
-                                  <a:ea typeface="Cambria Math" panose="02040503050406030204" pitchFamily="18" charset="0"/>
-                                </a:rPr>
-                                <m:t>|</m:t>
-                              </m:r>
-                              <m:sSub>
-                                <m:sSubPr>
-                                  <m:ctrlPr>
-                                    <a:rPr lang="en-US" sz="2800" b="0" i="1" smtClean="0">
-                                      <a:latin typeface="Cambria Math" panose="02040503050406030204" pitchFamily="18" charset="0"/>
-                                      <a:ea typeface="Cambria Math" panose="02040503050406030204" pitchFamily="18" charset="0"/>
-                                    </a:rPr>
-                                  </m:ctrlPr>
-                                </m:sSubPr>
-                                <m:e>
-                                  <m:r>
-                                    <a:rPr lang="en-US" sz="2800" b="0" i="1" smtClean="0">
-                                      <a:latin typeface="Cambria Math" panose="02040503050406030204" pitchFamily="18" charset="0"/>
-                                      <a:ea typeface="Cambria Math" panose="02040503050406030204" pitchFamily="18" charset="0"/>
-                                    </a:rPr>
-                                    <m:t>𝑠</m:t>
-                                  </m:r>
-                                </m:e>
-                                <m:sub>
-                                  <m:r>
-                                    <a:rPr lang="en-US" sz="2800" b="0" i="1" smtClean="0">
-                                      <a:latin typeface="Cambria Math" panose="02040503050406030204" pitchFamily="18" charset="0"/>
-                                      <a:ea typeface="Cambria Math" panose="02040503050406030204" pitchFamily="18" charset="0"/>
-                                    </a:rPr>
-                                    <m:t>𝑡</m:t>
-                                  </m:r>
-                                </m:sub>
-                              </m:sSub>
-                            </m:e>
-                          </m:d>
-                          <m:nary>
-                            <m:naryPr>
-                              <m:chr m:val="∑"/>
-                              <m:supHide m:val="on"/>
-                              <m:ctrlPr>
-                                <a:rPr lang="en-US" sz="2800" b="0" i="1" smtClean="0">
-                                  <a:latin typeface="Cambria Math" panose="02040503050406030204" pitchFamily="18" charset="0"/>
-                                  <a:ea typeface="Cambria Math" panose="02040503050406030204" pitchFamily="18" charset="0"/>
-                                </a:rPr>
-                              </m:ctrlPr>
-                            </m:naryPr>
-                            <m:sub>
-                              <m:sSubSup>
-                                <m:sSubSupPr>
-                                  <m:ctrlPr>
-                                    <a:rPr lang="en-US" sz="2800" i="1">
-                                      <a:latin typeface="Cambria Math" panose="02040503050406030204" pitchFamily="18" charset="0"/>
-                                      <a:ea typeface="Cambria Math" panose="02040503050406030204" pitchFamily="18" charset="0"/>
-                                    </a:rPr>
-                                  </m:ctrlPr>
-                                </m:sSubSupPr>
-                                <m:e>
-                                  <m:r>
-                                    <a:rPr lang="en-US" sz="2800" i="1">
-                                      <a:latin typeface="Cambria Math" panose="02040503050406030204" pitchFamily="18" charset="0"/>
-                                      <a:ea typeface="Cambria Math" panose="02040503050406030204" pitchFamily="18" charset="0"/>
-                                    </a:rPr>
-                                    <m:t>𝑠</m:t>
-                                  </m:r>
-                                </m:e>
-                                <m:sub>
-                                  <m:r>
-                                    <a:rPr lang="en-US" sz="2800" i="1">
-                                      <a:latin typeface="Cambria Math" panose="02040503050406030204" pitchFamily="18" charset="0"/>
-                                      <a:ea typeface="Cambria Math" panose="02040503050406030204" pitchFamily="18" charset="0"/>
-                                    </a:rPr>
-                                    <m:t>𝑡</m:t>
-                                  </m:r>
-                                  <m:r>
-                                    <a:rPr lang="en-US" sz="2800" i="1">
-                                      <a:latin typeface="Cambria Math" panose="02040503050406030204" pitchFamily="18" charset="0"/>
-                                      <a:ea typeface="Cambria Math" panose="02040503050406030204" pitchFamily="18" charset="0"/>
-                                    </a:rPr>
-                                    <m:t>+1</m:t>
-                                  </m:r>
-                                </m:sub>
-                                <m:sup>
-                                  <m:r>
-                                    <a:rPr lang="en-US" sz="2800" i="1">
-                                      <a:latin typeface="Cambria Math" panose="02040503050406030204" pitchFamily="18" charset="0"/>
-                                      <a:ea typeface="Cambria Math" panose="02040503050406030204" pitchFamily="18" charset="0"/>
-                                    </a:rPr>
-                                    <m:t>′</m:t>
-                                  </m:r>
-                                </m:sup>
-                              </m:sSubSup>
-                              <m:r>
-                                <m:rPr>
-                                  <m:brk m:alnAt="7"/>
-                                </m:rPr>
-                                <a:rPr lang="en-US" sz="2800" b="0" i="1" smtClean="0">
-                                  <a:latin typeface="Cambria Math" panose="02040503050406030204" pitchFamily="18" charset="0"/>
-                                  <a:ea typeface="Cambria Math" panose="02040503050406030204" pitchFamily="18" charset="0"/>
-                                </a:rPr>
-                                <m:t>,</m:t>
-                              </m:r>
-                              <m:sSub>
-                                <m:sSubPr>
-                                  <m:ctrlPr>
-                                    <a:rPr lang="en-US" sz="2800" b="0" i="1" smtClean="0">
-                                      <a:latin typeface="Cambria Math" panose="02040503050406030204" pitchFamily="18" charset="0"/>
-                                      <a:ea typeface="Cambria Math" panose="02040503050406030204" pitchFamily="18" charset="0"/>
-                                    </a:rPr>
-                                  </m:ctrlPr>
-                                </m:sSubPr>
-                                <m:e>
-                                  <m:r>
-                                    <a:rPr lang="en-US" sz="2800" b="0" i="1" smtClean="0">
-                                      <a:latin typeface="Cambria Math" panose="02040503050406030204" pitchFamily="18" charset="0"/>
-                                      <a:ea typeface="Cambria Math" panose="02040503050406030204" pitchFamily="18" charset="0"/>
-                                    </a:rPr>
-                                    <m:t>𝑟</m:t>
-                                  </m:r>
-                                </m:e>
-                                <m:sub>
-                                  <m:r>
-                                    <a:rPr lang="en-US" sz="2800" b="0" i="1" smtClean="0">
-                                      <a:latin typeface="Cambria Math" panose="02040503050406030204" pitchFamily="18" charset="0"/>
-                                      <a:ea typeface="Cambria Math" panose="02040503050406030204" pitchFamily="18" charset="0"/>
-                                    </a:rPr>
-                                    <m:t>𝑡</m:t>
-                                  </m:r>
-                                  <m:r>
-                                    <a:rPr lang="en-US" sz="2800" b="0" i="1" smtClean="0">
-                                      <a:latin typeface="Cambria Math" panose="02040503050406030204" pitchFamily="18" charset="0"/>
-                                      <a:ea typeface="Cambria Math" panose="02040503050406030204" pitchFamily="18" charset="0"/>
-                                    </a:rPr>
-                                    <m:t>+1</m:t>
-                                  </m:r>
-                                </m:sub>
-                              </m:sSub>
-                            </m:sub>
-                            <m:sup/>
-                            <m:e>
-                              <m:r>
-                                <a:rPr lang="en-US" sz="2800" b="0" i="1" smtClean="0">
-                                  <a:latin typeface="Cambria Math" panose="02040503050406030204" pitchFamily="18" charset="0"/>
-                                  <a:ea typeface="Cambria Math" panose="02040503050406030204" pitchFamily="18" charset="0"/>
-                                </a:rPr>
-                                <m:t>𝑝</m:t>
-                              </m:r>
-                              <m:d>
-                                <m:dPr>
-                                  <m:ctrlPr>
-                                    <a:rPr lang="en-US" sz="2800" b="0" i="1" smtClean="0">
-                                      <a:latin typeface="Cambria Math" panose="02040503050406030204" pitchFamily="18" charset="0"/>
-                                      <a:ea typeface="Cambria Math" panose="02040503050406030204" pitchFamily="18" charset="0"/>
-                                    </a:rPr>
-                                  </m:ctrlPr>
-                                </m:dPr>
-                                <m:e>
-                                  <m:sSubSup>
-                                    <m:sSubSupPr>
-                                      <m:ctrlPr>
-                                        <a:rPr lang="en-US" sz="2800" i="1">
-                                          <a:latin typeface="Cambria Math" panose="02040503050406030204" pitchFamily="18" charset="0"/>
-                                          <a:ea typeface="Cambria Math" panose="02040503050406030204" pitchFamily="18" charset="0"/>
-                                        </a:rPr>
-                                      </m:ctrlPr>
-                                    </m:sSubSupPr>
-                                    <m:e>
-                                      <m:r>
-                                        <a:rPr lang="en-US" sz="2800" i="1">
-                                          <a:latin typeface="Cambria Math" panose="02040503050406030204" pitchFamily="18" charset="0"/>
-                                          <a:ea typeface="Cambria Math" panose="02040503050406030204" pitchFamily="18" charset="0"/>
-                                        </a:rPr>
-                                        <m:t>𝑠</m:t>
-                                      </m:r>
-                                    </m:e>
-                                    <m:sub>
-                                      <m:r>
-                                        <a:rPr lang="en-US" sz="2800" i="1">
-                                          <a:latin typeface="Cambria Math" panose="02040503050406030204" pitchFamily="18" charset="0"/>
-                                          <a:ea typeface="Cambria Math" panose="02040503050406030204" pitchFamily="18" charset="0"/>
-                                        </a:rPr>
-                                        <m:t>𝑡</m:t>
-                                      </m:r>
-                                      <m:r>
-                                        <a:rPr lang="en-US" sz="2800" i="1">
-                                          <a:latin typeface="Cambria Math" panose="02040503050406030204" pitchFamily="18" charset="0"/>
-                                          <a:ea typeface="Cambria Math" panose="02040503050406030204" pitchFamily="18" charset="0"/>
-                                        </a:rPr>
-                                        <m:t>+1</m:t>
-                                      </m:r>
-                                    </m:sub>
-                                    <m:sup>
-                                      <m:r>
-                                        <a:rPr lang="en-US" sz="2800" i="1">
-                                          <a:latin typeface="Cambria Math" panose="02040503050406030204" pitchFamily="18" charset="0"/>
-                                          <a:ea typeface="Cambria Math" panose="02040503050406030204" pitchFamily="18" charset="0"/>
-                                        </a:rPr>
-                                        <m:t>′</m:t>
-                                      </m:r>
-                                    </m:sup>
-                                  </m:sSubSup>
-                                  <m:r>
-                                    <a:rPr lang="en-US" sz="2800" b="0" i="1" smtClean="0">
-                                      <a:latin typeface="Cambria Math" panose="02040503050406030204" pitchFamily="18" charset="0"/>
-                                      <a:ea typeface="Cambria Math" panose="02040503050406030204" pitchFamily="18" charset="0"/>
-                                    </a:rPr>
-                                    <m:t>,</m:t>
-                                  </m:r>
-                                  <m:sSub>
-                                    <m:sSubPr>
-                                      <m:ctrlPr>
-                                        <a:rPr lang="en-US" sz="2800" b="0" i="1" smtClean="0">
-                                          <a:latin typeface="Cambria Math" panose="02040503050406030204" pitchFamily="18" charset="0"/>
-                                          <a:ea typeface="Cambria Math" panose="02040503050406030204" pitchFamily="18" charset="0"/>
-                                        </a:rPr>
-                                      </m:ctrlPr>
-                                    </m:sSubPr>
-                                    <m:e>
-                                      <m:r>
-                                        <a:rPr lang="en-US" sz="2800" b="0" i="1" smtClean="0">
-                                          <a:latin typeface="Cambria Math" panose="02040503050406030204" pitchFamily="18" charset="0"/>
-                                          <a:ea typeface="Cambria Math" panose="02040503050406030204" pitchFamily="18" charset="0"/>
-                                        </a:rPr>
-                                        <m:t>𝑟</m:t>
-                                      </m:r>
-                                    </m:e>
-                                    <m:sub>
-                                      <m:r>
-                                        <a:rPr lang="en-US" sz="2800" b="0" i="1" smtClean="0">
-                                          <a:latin typeface="Cambria Math" panose="02040503050406030204" pitchFamily="18" charset="0"/>
-                                          <a:ea typeface="Cambria Math" panose="02040503050406030204" pitchFamily="18" charset="0"/>
-                                        </a:rPr>
-                                        <m:t>𝑡</m:t>
-                                      </m:r>
-                                      <m:r>
-                                        <a:rPr lang="en-US" sz="2800" b="0" i="1" smtClean="0">
-                                          <a:latin typeface="Cambria Math" panose="02040503050406030204" pitchFamily="18" charset="0"/>
-                                          <a:ea typeface="Cambria Math" panose="02040503050406030204" pitchFamily="18" charset="0"/>
-                                        </a:rPr>
-                                        <m:t>+1</m:t>
-                                      </m:r>
-                                    </m:sub>
-                                  </m:sSub>
-                                  <m:r>
-                                    <a:rPr lang="en-US" sz="2800" b="0" i="1" smtClean="0">
-                                      <a:latin typeface="Cambria Math" panose="02040503050406030204" pitchFamily="18" charset="0"/>
-                                      <a:ea typeface="Cambria Math" panose="02040503050406030204" pitchFamily="18" charset="0"/>
-                                    </a:rPr>
-                                    <m:t>|</m:t>
-                                  </m:r>
-                                  <m:sSub>
-                                    <m:sSubPr>
-                                      <m:ctrlPr>
-                                        <a:rPr lang="en-US" sz="2800" b="0" i="1" smtClean="0">
-                                          <a:latin typeface="Cambria Math" panose="02040503050406030204" pitchFamily="18" charset="0"/>
-                                          <a:ea typeface="Cambria Math" panose="02040503050406030204" pitchFamily="18" charset="0"/>
-                                        </a:rPr>
-                                      </m:ctrlPr>
-                                    </m:sSubPr>
-                                    <m:e>
-                                      <m:r>
-                                        <a:rPr lang="en-US" sz="2800" b="0" i="1" smtClean="0">
-                                          <a:latin typeface="Cambria Math" panose="02040503050406030204" pitchFamily="18" charset="0"/>
-                                          <a:ea typeface="Cambria Math" panose="02040503050406030204" pitchFamily="18" charset="0"/>
-                                        </a:rPr>
-                                        <m:t>𝑠</m:t>
-                                      </m:r>
-                                    </m:e>
-                                    <m:sub>
-                                      <m:r>
-                                        <a:rPr lang="en-US" sz="2800" b="0" i="1" smtClean="0">
-                                          <a:latin typeface="Cambria Math" panose="02040503050406030204" pitchFamily="18" charset="0"/>
-                                          <a:ea typeface="Cambria Math" panose="02040503050406030204" pitchFamily="18" charset="0"/>
-                                        </a:rPr>
-                                        <m:t>𝑡</m:t>
-                                      </m:r>
-                                    </m:sub>
-                                  </m:sSub>
-                                  <m:r>
-                                    <a:rPr lang="en-US" sz="2800" b="0" i="1" smtClean="0">
-                                      <a:latin typeface="Cambria Math" panose="02040503050406030204" pitchFamily="18" charset="0"/>
-                                      <a:ea typeface="Cambria Math" panose="02040503050406030204" pitchFamily="18" charset="0"/>
-                                    </a:rPr>
-                                    <m:t>,</m:t>
-                                  </m:r>
-                                  <m:sSub>
-                                    <m:sSubPr>
-                                      <m:ctrlPr>
-                                        <a:rPr lang="en-US" sz="2800" b="0" i="1" smtClean="0">
-                                          <a:latin typeface="Cambria Math" panose="02040503050406030204" pitchFamily="18" charset="0"/>
-                                          <a:ea typeface="Cambria Math" panose="02040503050406030204" pitchFamily="18" charset="0"/>
-                                        </a:rPr>
-                                      </m:ctrlPr>
-                                    </m:sSubPr>
-                                    <m:e>
-                                      <m:r>
-                                        <a:rPr lang="en-US" sz="2800" b="0" i="1" smtClean="0">
-                                          <a:latin typeface="Cambria Math" panose="02040503050406030204" pitchFamily="18" charset="0"/>
-                                          <a:ea typeface="Cambria Math" panose="02040503050406030204" pitchFamily="18" charset="0"/>
-                                        </a:rPr>
-                                        <m:t>𝑎</m:t>
-                                      </m:r>
-                                    </m:e>
-                                    <m:sub>
-                                      <m:r>
-                                        <a:rPr lang="en-US" sz="2800" b="0" i="1" smtClean="0">
-                                          <a:latin typeface="Cambria Math" panose="02040503050406030204" pitchFamily="18" charset="0"/>
-                                          <a:ea typeface="Cambria Math" panose="02040503050406030204" pitchFamily="18" charset="0"/>
-                                        </a:rPr>
-                                        <m:t>𝑡</m:t>
-                                      </m:r>
-                                    </m:sub>
-                                  </m:sSub>
-                                </m:e>
-                              </m:d>
-                              <m:d>
-                                <m:dPr>
-                                  <m:begChr m:val="["/>
-                                  <m:endChr m:val="]"/>
-                                  <m:ctrlPr>
-                                    <a:rPr lang="en-US" sz="2800" b="0" i="1" smtClean="0">
-                                      <a:latin typeface="Cambria Math" panose="02040503050406030204" pitchFamily="18" charset="0"/>
-                                      <a:ea typeface="Cambria Math" panose="02040503050406030204" pitchFamily="18" charset="0"/>
-                                    </a:rPr>
-                                  </m:ctrlPr>
-                                </m:dPr>
-                                <m:e>
-                                  <m:sSub>
-                                    <m:sSubPr>
-                                      <m:ctrlPr>
-                                        <a:rPr lang="en-US" sz="2800" b="0" i="1" smtClean="0">
-                                          <a:latin typeface="Cambria Math" panose="02040503050406030204" pitchFamily="18" charset="0"/>
-                                          <a:ea typeface="Cambria Math" panose="02040503050406030204" pitchFamily="18" charset="0"/>
-                                        </a:rPr>
-                                      </m:ctrlPr>
-                                    </m:sSubPr>
-                                    <m:e>
-                                      <m:r>
-                                        <a:rPr lang="en-US" sz="2800" b="0" i="1" smtClean="0">
-                                          <a:latin typeface="Cambria Math" panose="02040503050406030204" pitchFamily="18" charset="0"/>
-                                          <a:ea typeface="Cambria Math" panose="02040503050406030204" pitchFamily="18" charset="0"/>
-                                        </a:rPr>
-                                        <m:t>𝑟</m:t>
-                                      </m:r>
-                                    </m:e>
-                                    <m:sub>
-                                      <m:r>
-                                        <a:rPr lang="en-US" sz="2800" b="0" i="1" smtClean="0">
-                                          <a:latin typeface="Cambria Math" panose="02040503050406030204" pitchFamily="18" charset="0"/>
-                                          <a:ea typeface="Cambria Math" panose="02040503050406030204" pitchFamily="18" charset="0"/>
-                                        </a:rPr>
-                                        <m:t>𝑡</m:t>
-                                      </m:r>
-                                      <m:r>
-                                        <a:rPr lang="en-US" sz="2800" b="0" i="1" smtClean="0">
-                                          <a:latin typeface="Cambria Math" panose="02040503050406030204" pitchFamily="18" charset="0"/>
-                                          <a:ea typeface="Cambria Math" panose="02040503050406030204" pitchFamily="18" charset="0"/>
-                                        </a:rPr>
-                                        <m:t>+1</m:t>
-                                      </m:r>
-                                    </m:sub>
-                                  </m:sSub>
-                                  <m:r>
-                                    <a:rPr lang="en-US" sz="2800" b="0" i="1" smtClean="0">
-                                      <a:latin typeface="Cambria Math" panose="02040503050406030204" pitchFamily="18" charset="0"/>
-                                      <a:ea typeface="Cambria Math" panose="02040503050406030204" pitchFamily="18" charset="0"/>
-                                    </a:rPr>
-                                    <m:t>+</m:t>
-                                  </m:r>
-                                  <m:r>
-                                    <a:rPr lang="en-US" sz="2800" b="0" i="1" smtClean="0">
-                                      <a:latin typeface="Cambria Math" panose="02040503050406030204" pitchFamily="18" charset="0"/>
-                                      <a:ea typeface="Cambria Math" panose="02040503050406030204" pitchFamily="18" charset="0"/>
-                                    </a:rPr>
-                                    <m:t>𝛾</m:t>
-                                  </m:r>
-                                  <m:sSub>
-                                    <m:sSubPr>
-                                      <m:ctrlPr>
-                                        <a:rPr lang="en-US" sz="2800" b="0" i="1" smtClean="0">
-                                          <a:latin typeface="Cambria Math" panose="02040503050406030204" pitchFamily="18" charset="0"/>
-                                          <a:ea typeface="Cambria Math" panose="02040503050406030204" pitchFamily="18" charset="0"/>
-                                        </a:rPr>
-                                      </m:ctrlPr>
-                                    </m:sSubPr>
-                                    <m:e>
-                                      <m:r>
-                                        <a:rPr lang="en-US" sz="2800" b="0" i="1" smtClean="0">
-                                          <a:latin typeface="Cambria Math" panose="02040503050406030204" pitchFamily="18" charset="0"/>
-                                          <a:ea typeface="Cambria Math" panose="02040503050406030204" pitchFamily="18" charset="0"/>
-                                        </a:rPr>
-                                        <m:t>𝑣</m:t>
-                                      </m:r>
-                                    </m:e>
-                                    <m:sub>
-                                      <m:r>
-                                        <a:rPr lang="en-US" sz="2800" b="0" i="1" smtClean="0">
-                                          <a:latin typeface="Cambria Math" panose="02040503050406030204" pitchFamily="18" charset="0"/>
-                                          <a:ea typeface="Cambria Math" panose="02040503050406030204" pitchFamily="18" charset="0"/>
-                                        </a:rPr>
-                                        <m:t>𝜋</m:t>
-                                      </m:r>
-                                    </m:sub>
-                                  </m:sSub>
-                                  <m:d>
-                                    <m:dPr>
-                                      <m:ctrlPr>
-                                        <a:rPr lang="en-US" sz="2800" b="0" i="1" smtClean="0">
-                                          <a:latin typeface="Cambria Math" panose="02040503050406030204" pitchFamily="18" charset="0"/>
-                                          <a:ea typeface="Cambria Math" panose="02040503050406030204" pitchFamily="18" charset="0"/>
-                                        </a:rPr>
-                                      </m:ctrlPr>
-                                    </m:dPr>
-                                    <m:e>
-                                      <m:sSubSup>
-                                        <m:sSubSupPr>
-                                          <m:ctrlPr>
-                                            <a:rPr lang="en-US" sz="2800" i="1">
-                                              <a:latin typeface="Cambria Math" panose="02040503050406030204" pitchFamily="18" charset="0"/>
-                                              <a:ea typeface="Cambria Math" panose="02040503050406030204" pitchFamily="18" charset="0"/>
-                                            </a:rPr>
-                                          </m:ctrlPr>
-                                        </m:sSubSupPr>
-                                        <m:e>
-                                          <m:r>
-                                            <a:rPr lang="en-US" sz="2800" i="1">
-                                              <a:latin typeface="Cambria Math" panose="02040503050406030204" pitchFamily="18" charset="0"/>
-                                              <a:ea typeface="Cambria Math" panose="02040503050406030204" pitchFamily="18" charset="0"/>
-                                            </a:rPr>
-                                            <m:t>𝑠</m:t>
-                                          </m:r>
-                                        </m:e>
-                                        <m:sub>
-                                          <m:r>
-                                            <a:rPr lang="en-US" sz="2800" i="1">
-                                              <a:latin typeface="Cambria Math" panose="02040503050406030204" pitchFamily="18" charset="0"/>
-                                              <a:ea typeface="Cambria Math" panose="02040503050406030204" pitchFamily="18" charset="0"/>
-                                            </a:rPr>
-                                            <m:t>𝑡</m:t>
-                                          </m:r>
-                                          <m:r>
-                                            <a:rPr lang="en-US" sz="2800" i="1">
-                                              <a:latin typeface="Cambria Math" panose="02040503050406030204" pitchFamily="18" charset="0"/>
-                                              <a:ea typeface="Cambria Math" panose="02040503050406030204" pitchFamily="18" charset="0"/>
-                                            </a:rPr>
-                                            <m:t>+1</m:t>
-                                          </m:r>
-                                        </m:sub>
-                                        <m:sup>
-                                          <m:r>
-                                            <a:rPr lang="en-US" sz="2800" i="1">
-                                              <a:latin typeface="Cambria Math" panose="02040503050406030204" pitchFamily="18" charset="0"/>
-                                              <a:ea typeface="Cambria Math" panose="02040503050406030204" pitchFamily="18" charset="0"/>
-                                            </a:rPr>
-                                            <m:t>′</m:t>
-                                          </m:r>
-                                        </m:sup>
-                                      </m:sSubSup>
-                                    </m:e>
-                                  </m:d>
-                                </m:e>
-                              </m:d>
-                            </m:e>
-                          </m:nary>
-                        </m:e>
-                      </m:nary>
-                    </m:oMath>
-                  </m:oMathPara>
-                </a14:m>
-                <a:endParaRPr lang="en-DE" sz="2800" dirty="0"/>
-              </a:p>
-            </p:txBody>
-          </p:sp>
-        </mc:Choice>
-        <mc:Fallback xmlns="">
-          <p:sp>
-            <p:nvSpPr>
-              <p:cNvPr id="3" name="TextBox 2">
-                <a:extLst>
-                  <a:ext uri="{FF2B5EF4-FFF2-40B4-BE49-F238E27FC236}">
-                    <a16:creationId xmlns:a16="http://schemas.microsoft.com/office/drawing/2014/main" id="{9126A8EE-7175-F901-57A1-E7EBCCAAE429}"/>
-                  </a:ext>
-                </a:extLst>
-              </p:cNvPr>
-              <p:cNvSpPr txBox="1">
-                <a:spLocks noRot="1" noChangeAspect="1" noMove="1" noResize="1" noEditPoints="1" noAdjustHandles="1" noChangeArrowheads="1" noChangeShapeType="1" noTextEdit="1"/>
-              </p:cNvSpPr>
-              <p:nvPr/>
-            </p:nvSpPr>
-            <p:spPr>
-              <a:xfrm>
-                <a:off x="1634063" y="2133759"/>
-                <a:ext cx="9016123" cy="2331920"/>
-              </a:xfrm>
-              <a:prstGeom prst="rect">
-                <a:avLst/>
-              </a:prstGeom>
-              <a:blipFill>
-                <a:blip r:embed="rId3"/>
-                <a:stretch>
-                  <a:fillRect l="-9986" t="-60870" b="-85870"/>
-                </a:stretch>
-              </a:blipFill>
-            </p:spPr>
-            <p:txBody>
-              <a:bodyPr/>
-              <a:lstStyle/>
-              <a:p>
-                <a:r>
-                  <a:rPr lang="en-DE">
-                    <a:noFill/>
-                  </a:rPr>
-                  <a:t> </a:t>
-                </a:r>
-              </a:p>
-            </p:txBody>
-          </p:sp>
-        </mc:Fallback>
-      </mc:AlternateContent>
-      <p:sp>
-        <p:nvSpPr>
-          <p:cNvPr id="19" name="Left Brace 18">
-            <a:extLst>
-              <a:ext uri="{FF2B5EF4-FFF2-40B4-BE49-F238E27FC236}">
-                <a16:creationId xmlns:a16="http://schemas.microsoft.com/office/drawing/2014/main" id="{277115C8-7CDA-F941-965F-CE13CAC5ECDF}"/>
-              </a:ext>
-            </a:extLst>
-          </p:cNvPr>
-          <p:cNvSpPr/>
-          <p:nvPr/>
-        </p:nvSpPr>
-        <p:spPr>
-          <a:xfrm rot="5400000">
-            <a:off x="4890890" y="749972"/>
-            <a:ext cx="320518" cy="2489095"/>
-          </a:xfrm>
-          <a:prstGeom prst="leftBrace">
-            <a:avLst>
-              <a:gd name="adj1" fmla="val 8333"/>
-              <a:gd name="adj2" fmla="val 49166"/>
-            </a:avLst>
-          </a:prstGeom>
-          <a:ln w="12700"/>
-        </p:spPr>
-        <p:style>
-          <a:lnRef idx="1">
-            <a:schemeClr val="accent1"/>
-          </a:lnRef>
-          <a:fillRef idx="0">
-            <a:schemeClr val="accent1"/>
-          </a:fillRef>
-          <a:effectRef idx="0">
-            <a:schemeClr val="accent1"/>
-          </a:effectRef>
-          <a:fontRef idx="minor">
-            <a:schemeClr val="tx1"/>
-          </a:fontRef>
-        </p:style>
-        <p:txBody>
-          <a:bodyPr rtlCol="0" anchor="ctr"/>
-          <a:lstStyle/>
-          <a:p>
-            <a:pPr algn="ctr"/>
-            <a:endParaRPr lang="en-DE"/>
-          </a:p>
-        </p:txBody>
-      </p:sp>
-      <p:cxnSp>
-        <p:nvCxnSpPr>
-          <p:cNvPr id="21" name="Straight Arrow Connector 20">
-            <a:extLst>
-              <a:ext uri="{FF2B5EF4-FFF2-40B4-BE49-F238E27FC236}">
-                <a16:creationId xmlns:a16="http://schemas.microsoft.com/office/drawing/2014/main" id="{2282F94A-C2EB-AFB0-C700-67868031BDBE}"/>
-              </a:ext>
-            </a:extLst>
-          </p:cNvPr>
-          <p:cNvCxnSpPr/>
-          <p:nvPr/>
-        </p:nvCxnSpPr>
-        <p:spPr>
-          <a:xfrm flipH="1">
-            <a:off x="8610600" y="1885111"/>
-            <a:ext cx="829678" cy="700434"/>
-          </a:xfrm>
-          <a:prstGeom prst="straightConnector1">
-            <a:avLst/>
-          </a:prstGeom>
-          <a:ln>
-            <a:tailEnd type="triangle"/>
-          </a:ln>
-        </p:spPr>
-        <p:style>
-          <a:lnRef idx="1">
-            <a:schemeClr val="accent1"/>
-          </a:lnRef>
-          <a:fillRef idx="0">
-            <a:schemeClr val="accent1"/>
-          </a:fillRef>
-          <a:effectRef idx="0">
-            <a:schemeClr val="accent1"/>
-          </a:effectRef>
-          <a:fontRef idx="minor">
-            <a:schemeClr val="tx1"/>
-          </a:fontRef>
-        </p:style>
-      </p:cxnSp>
-      <p:cxnSp>
-        <p:nvCxnSpPr>
-          <p:cNvPr id="24" name="Straight Arrow Connector 23">
-            <a:extLst>
-              <a:ext uri="{FF2B5EF4-FFF2-40B4-BE49-F238E27FC236}">
-                <a16:creationId xmlns:a16="http://schemas.microsoft.com/office/drawing/2014/main" id="{5FF27745-54C9-FD6B-9DD3-B4F1128351D0}"/>
-              </a:ext>
-            </a:extLst>
-          </p:cNvPr>
-          <p:cNvCxnSpPr>
-            <a:cxnSpLocks/>
-            <a:stCxn id="13" idx="0"/>
-          </p:cNvCxnSpPr>
-          <p:nvPr/>
-        </p:nvCxnSpPr>
-        <p:spPr>
-          <a:xfrm flipH="1" flipV="1">
-            <a:off x="9301655" y="4272456"/>
-            <a:ext cx="609362" cy="633922"/>
-          </a:xfrm>
-          <a:prstGeom prst="straightConnector1">
-            <a:avLst/>
-          </a:prstGeom>
-          <a:ln>
-            <a:tailEnd type="triangle"/>
-          </a:ln>
-        </p:spPr>
-        <p:style>
-          <a:lnRef idx="1">
-            <a:schemeClr val="accent1"/>
-          </a:lnRef>
-          <a:fillRef idx="0">
-            <a:schemeClr val="accent1"/>
-          </a:fillRef>
-          <a:effectRef idx="0">
-            <a:schemeClr val="accent1"/>
-          </a:effectRef>
-          <a:fontRef idx="minor">
-            <a:schemeClr val="tx1"/>
-          </a:fontRef>
-        </p:style>
-      </p:cxnSp>
-      <p:cxnSp>
-        <p:nvCxnSpPr>
-          <p:cNvPr id="29" name="Straight Arrow Connector 28">
-            <a:extLst>
-              <a:ext uri="{FF2B5EF4-FFF2-40B4-BE49-F238E27FC236}">
-                <a16:creationId xmlns:a16="http://schemas.microsoft.com/office/drawing/2014/main" id="{6CFC785C-433A-C24F-4F57-2347239C1CB0}"/>
-              </a:ext>
-            </a:extLst>
-          </p:cNvPr>
-          <p:cNvCxnSpPr>
-            <a:cxnSpLocks/>
-            <a:stCxn id="15" idx="0"/>
-          </p:cNvCxnSpPr>
-          <p:nvPr/>
-        </p:nvCxnSpPr>
-        <p:spPr>
-          <a:xfrm flipV="1">
-            <a:off x="2140730" y="3993931"/>
-            <a:ext cx="581449" cy="883158"/>
-          </a:xfrm>
-          <a:prstGeom prst="straightConnector1">
-            <a:avLst/>
-          </a:prstGeom>
-          <a:ln>
-            <a:tailEnd type="triangle"/>
-          </a:ln>
-        </p:spPr>
-        <p:style>
-          <a:lnRef idx="1">
-            <a:schemeClr val="accent1"/>
-          </a:lnRef>
-          <a:fillRef idx="0">
-            <a:schemeClr val="accent1"/>
-          </a:fillRef>
-          <a:effectRef idx="0">
-            <a:schemeClr val="accent1"/>
-          </a:effectRef>
-          <a:fontRef idx="minor">
-            <a:schemeClr val="tx1"/>
-          </a:fontRef>
-        </p:style>
-      </p:cxnSp>
-      <p:cxnSp>
-        <p:nvCxnSpPr>
-          <p:cNvPr id="31" name="Straight Arrow Connector 30">
-            <a:extLst>
-              <a:ext uri="{FF2B5EF4-FFF2-40B4-BE49-F238E27FC236}">
-                <a16:creationId xmlns:a16="http://schemas.microsoft.com/office/drawing/2014/main" id="{AC3F895B-1239-0440-2FAE-74FD00099180}"/>
-              </a:ext>
-            </a:extLst>
-          </p:cNvPr>
-          <p:cNvCxnSpPr>
-            <a:cxnSpLocks/>
-            <a:stCxn id="17" idx="0"/>
-          </p:cNvCxnSpPr>
-          <p:nvPr/>
-        </p:nvCxnSpPr>
-        <p:spPr>
-          <a:xfrm flipH="1" flipV="1">
-            <a:off x="5297214" y="3993931"/>
-            <a:ext cx="918145" cy="883158"/>
-          </a:xfrm>
-          <a:prstGeom prst="straightConnector1">
-            <a:avLst/>
-          </a:prstGeom>
-          <a:ln>
-            <a:tailEnd type="triangle"/>
-          </a:ln>
-        </p:spPr>
-        <p:style>
-          <a:lnRef idx="1">
-            <a:schemeClr val="accent1"/>
-          </a:lnRef>
-          <a:fillRef idx="0">
-            <a:schemeClr val="accent1"/>
-          </a:fillRef>
-          <a:effectRef idx="0">
-            <a:schemeClr val="accent1"/>
-          </a:effectRef>
-          <a:fontRef idx="minor">
-            <a:schemeClr val="tx1"/>
-          </a:fontRef>
-        </p:style>
-      </p:cxnSp>
-      <p:sp>
-        <p:nvSpPr>
-          <p:cNvPr id="5" name="TextBox 4">
-            <a:extLst>
-              <a:ext uri="{FF2B5EF4-FFF2-40B4-BE49-F238E27FC236}">
-                <a16:creationId xmlns:a16="http://schemas.microsoft.com/office/drawing/2014/main" id="{E8A28ACD-56E5-3C56-68CC-AEB9A6A1E18C}"/>
-              </a:ext>
-            </a:extLst>
-          </p:cNvPr>
-          <p:cNvSpPr txBox="1"/>
-          <p:nvPr/>
-        </p:nvSpPr>
-        <p:spPr>
-          <a:xfrm>
-            <a:off x="4117036" y="6123543"/>
-            <a:ext cx="3944314" cy="369332"/>
-          </a:xfrm>
-          <a:prstGeom prst="rect">
-            <a:avLst/>
-          </a:prstGeom>
-          <a:noFill/>
-        </p:spPr>
-        <p:txBody>
-          <a:bodyPr wrap="square" rtlCol="0">
-            <a:spAutoFit/>
-          </a:bodyPr>
-          <a:lstStyle/>
-          <a:p>
-            <a:r>
-              <a:rPr lang="en-GB" dirty="0"/>
-              <a:t>(s</a:t>
-            </a:r>
-            <a:r>
-              <a:rPr lang="en-DE" dirty="0"/>
-              <a:t>weep through entire state space)</a:t>
-            </a:r>
-          </a:p>
-        </p:txBody>
-      </p:sp>
-      <p:sp>
-        <p:nvSpPr>
-          <p:cNvPr id="6" name="TextBox 5">
-            <a:extLst>
-              <a:ext uri="{FF2B5EF4-FFF2-40B4-BE49-F238E27FC236}">
-                <a16:creationId xmlns:a16="http://schemas.microsoft.com/office/drawing/2014/main" id="{AA4B3A5C-3343-E2FA-59CA-78F1332A61AB}"/>
-              </a:ext>
-            </a:extLst>
-          </p:cNvPr>
-          <p:cNvSpPr txBox="1"/>
-          <p:nvPr/>
-        </p:nvSpPr>
-        <p:spPr>
-          <a:xfrm>
-            <a:off x="84103" y="1764427"/>
-            <a:ext cx="2229649" cy="369332"/>
-          </a:xfrm>
-          <a:prstGeom prst="rect">
-            <a:avLst/>
-          </a:prstGeom>
-          <a:noFill/>
-        </p:spPr>
-        <p:txBody>
-          <a:bodyPr wrap="none" rtlCol="0">
-            <a:spAutoFit/>
-          </a:bodyPr>
-          <a:lstStyle/>
-          <a:p>
-            <a:r>
-              <a:rPr lang="en-GB" dirty="0"/>
-              <a:t>(n</a:t>
-            </a:r>
-            <a:r>
-              <a:rPr lang="en-DE" dirty="0"/>
-              <a:t>eeded for all states)</a:t>
-            </a:r>
-          </a:p>
-        </p:txBody>
-      </p:sp>
-      <p:cxnSp>
-        <p:nvCxnSpPr>
-          <p:cNvPr id="10" name="Straight Arrow Connector 9">
-            <a:extLst>
-              <a:ext uri="{FF2B5EF4-FFF2-40B4-BE49-F238E27FC236}">
-                <a16:creationId xmlns:a16="http://schemas.microsoft.com/office/drawing/2014/main" id="{B4E2CBBA-87B7-4BA4-3F0B-61B11CA2A450}"/>
-              </a:ext>
-            </a:extLst>
-          </p:cNvPr>
-          <p:cNvCxnSpPr>
-            <a:stCxn id="6" idx="2"/>
-          </p:cNvCxnSpPr>
-          <p:nvPr/>
-        </p:nvCxnSpPr>
-        <p:spPr>
-          <a:xfrm>
-            <a:off x="1198928" y="2133759"/>
-            <a:ext cx="671913" cy="451786"/>
-          </a:xfrm>
-          <a:prstGeom prst="straightConnector1">
-            <a:avLst/>
-          </a:prstGeom>
-          <a:ln>
-            <a:tailEnd type="triangle"/>
-          </a:ln>
-        </p:spPr>
-        <p:style>
-          <a:lnRef idx="1">
-            <a:schemeClr val="accent1"/>
-          </a:lnRef>
-          <a:fillRef idx="0">
-            <a:schemeClr val="accent1"/>
-          </a:fillRef>
-          <a:effectRef idx="0">
-            <a:schemeClr val="accent1"/>
-          </a:effectRef>
-          <a:fontRef idx="minor">
-            <a:schemeClr val="tx1"/>
-          </a:fontRef>
-        </p:style>
-      </p:cxnSp>
-      <p:sp>
-        <p:nvSpPr>
-          <p:cNvPr id="8" name="TextBox 5">
-            <a:extLst>
-              <a:ext uri="{FF2B5EF4-FFF2-40B4-BE49-F238E27FC236}">
-                <a16:creationId xmlns:a16="http://schemas.microsoft.com/office/drawing/2014/main" id="{7FDD51CF-77E5-7BB7-2BDA-0F5094E9A4E5}"/>
-              </a:ext>
-            </a:extLst>
-          </p:cNvPr>
-          <p:cNvSpPr txBox="1"/>
-          <p:nvPr/>
-        </p:nvSpPr>
-        <p:spPr>
-          <a:xfrm>
-            <a:off x="15194" y="3059668"/>
-            <a:ext cx="1112228" cy="369332"/>
-          </a:xfrm>
-          <a:prstGeom prst="rect">
-            <a:avLst/>
-          </a:prstGeom>
-          <a:noFill/>
-        </p:spPr>
-        <p:txBody>
-          <a:bodyPr wrap="none" rtlCol="0">
-            <a:spAutoFit/>
-          </a:bodyPr>
-          <a:lstStyle/>
-          <a:p>
-            <a:r>
-              <a:rPr lang="de-DE" dirty="0"/>
-              <a:t>on-</a:t>
-            </a:r>
-            <a:r>
-              <a:rPr lang="de-DE" dirty="0" err="1"/>
-              <a:t>policy</a:t>
-            </a:r>
-            <a:endParaRPr lang="en-DE" dirty="0"/>
-          </a:p>
-        </p:txBody>
-      </p:sp>
-      <p:cxnSp>
-        <p:nvCxnSpPr>
-          <p:cNvPr id="14" name="Straight Arrow Connector 9">
-            <a:extLst>
-              <a:ext uri="{FF2B5EF4-FFF2-40B4-BE49-F238E27FC236}">
-                <a16:creationId xmlns:a16="http://schemas.microsoft.com/office/drawing/2014/main" id="{E333265D-643E-9A46-F9C5-BBD2442D0199}"/>
-              </a:ext>
-            </a:extLst>
-          </p:cNvPr>
-          <p:cNvCxnSpPr>
-            <a:cxnSpLocks/>
-            <a:stCxn id="8" idx="3"/>
-          </p:cNvCxnSpPr>
-          <p:nvPr/>
-        </p:nvCxnSpPr>
-        <p:spPr>
-          <a:xfrm flipV="1">
-            <a:off x="1127422" y="2885044"/>
-            <a:ext cx="869544" cy="359290"/>
-          </a:xfrm>
-          <a:prstGeom prst="straightConnector1">
-            <a:avLst/>
-          </a:prstGeom>
-          <a:ln>
-            <a:tailEnd type="triangle"/>
-          </a:ln>
-        </p:spPr>
-        <p:style>
-          <a:lnRef idx="1">
-            <a:schemeClr val="accent1"/>
-          </a:lnRef>
-          <a:fillRef idx="0">
-            <a:schemeClr val="accent1"/>
-          </a:fillRef>
-          <a:effectRef idx="0">
-            <a:schemeClr val="accent1"/>
-          </a:effectRef>
-          <a:fontRef idx="minor">
-            <a:schemeClr val="tx1"/>
-          </a:fontRef>
-        </p:style>
-      </p:cxnSp>
     </p:spTree>
     <p:extLst>
       <p:ext uri="{BB962C8B-B14F-4D97-AF65-F5344CB8AC3E}">
-        <p14:creationId xmlns:p14="http://schemas.microsoft.com/office/powerpoint/2010/main" val="3242170843"/>
+        <p14:creationId xmlns:p14="http://schemas.microsoft.com/office/powerpoint/2010/main" val="3985292078"/>
       </p:ext>
     </p:extLst>
   </p:cSld>
